--- a/docs/ativo/material_reuniao_orientador_2026-07-08.pptx
+++ b/docs/ativo/material_reuniao_orientador_2026-07-08.pptx
@@ -23,6 +23,14 @@
     <p:sldId id="271" r:id="rId22"/>
     <p:sldId id="272" r:id="rId23"/>
     <p:sldId id="273" r:id="rId24"/>
+    <p:sldId id="274" r:id="rId25"/>
+    <p:sldId id="275" r:id="rId26"/>
+    <p:sldId id="276" r:id="rId27"/>
+    <p:sldId id="277" r:id="rId28"/>
+    <p:sldId id="278" r:id="rId29"/>
+    <p:sldId id="279" r:id="rId30"/>
+    <p:sldId id="280" r:id="rId31"/>
+    <p:sldId id="281" r:id="rId32"/>
   </p:sldIdLst>
   <p:sldSz cx="12188952" cy="6858000" type="screen4x3"/>
   <p:notesSz cx="6858000" cy="9144000"/>
@@ -3178,7 +3186,7 @@
               </a:defRPr>
             </a:pPr>
             <a:r>
-              <a:t>Consolidação do plano de trabalho</a:t>
+              <a:t>Reta final até 15 de julho</a:t>
             </a:r>
           </a:p>
           <a:p>
@@ -3190,19 +3198,19 @@
               </a:defRPr>
             </a:pPr>
             <a:r>
-              <a:t>Estado da escrita, adequação ética e solicitação de extensão</a:t>
-            </a:r>
-          </a:p>
-          <a:p>
-            <a:pPr>
-              <a:defRPr sz="1500" i="1">
+              <a:t>Estado da escrita, decisões éticas e ajuste de cronograma</a:t>
+            </a:r>
+          </a:p>
+          <a:p>
+            <a:pPr>
+              <a:defRPr sz="1400" i="1">
                 <a:solidFill>
                   <a:srgbClr val="707682"/>
                 </a:solidFill>
               </a:defRPr>
             </a:pPr>
             <a:r>
-              <a:t>Alinhamento após 3 semanas sem reuniões — foco em 2 pendências específicas</a:t>
+              <a:t>Equidade racial em classificação facial via conditioning por tom de pele (MST) sobre FairFace</a:t>
             </a:r>
           </a:p>
         </p:txBody>
@@ -3273,7 +3281,7 @@
               </a:defRPr>
             </a:pPr>
             <a:r>
-              <a:t>Reunião:  08 de julho de 2026</a:t>
+              <a:t>Reunião:  8 de julho de 2026</a:t>
             </a:r>
           </a:p>
         </p:txBody>
@@ -3326,7 +3334,7 @@
               </a:defRPr>
             </a:pPr>
             <a:r>
-              <a:t>Análise da Resolução 200/2021/CONSU Unifesp</a:t>
+              <a:t>O que cada capítulo já tem</a:t>
             </a:r>
           </a:p>
         </p:txBody>
@@ -3407,7 +3415,7 @@
                   <a:srgbClr val="1F2A4E"/>
                 </a:solidFill>
               </a:rPr>
-              <a:t>Base legal:  </a:t>
+              <a:t>Capítulo 1 — Introdução  </a:t>
             </a:r>
             <a:r>
               <a:rPr sz="1600">
@@ -3415,7 +3423,7 @@
                   <a:srgbClr val="3D424E"/>
                 </a:solidFill>
               </a:rPr>
-              <a:t>Resolução nº 200/2021/CONSELHO UNIVERSITÁRIO Unifesp (SEI 0719529)</a:t>
+              <a:t>argumento central: F1 macro alto mascara disparidade Black 90 % × Latinx 60 % em SOTA sobre FairFace</a:t>
             </a:r>
           </a:p>
           <a:p>
@@ -3430,7 +3438,7 @@
                   <a:srgbClr val="1F2A4E"/>
                 </a:solidFill>
               </a:rPr>
-              <a:t>  </a:t>
+              <a:t>Capítulo 2 — Revisão  </a:t>
             </a:r>
             <a:r>
               <a:rPr sz="1600">
@@ -3438,7 +3446,7 @@
                   <a:srgbClr val="3D424E"/>
                 </a:solidFill>
               </a:rPr>
-              <a:t/>
+              <a:t>fairness (Buolamwini, Hardt, Kleinberg), MST (Schumann, Pereira), FiLM (Perez), 104 papers verificados</a:t>
             </a:r>
           </a:p>
           <a:p>
@@ -3453,7 +3461,7 @@
                   <a:srgbClr val="1F2A4E"/>
                 </a:solidFill>
               </a:rPr>
-              <a:t>Pergunta central:  </a:t>
+              <a:t>Capítulo 3 — Objetivos  </a:t>
             </a:r>
             <a:r>
               <a:rPr sz="1600">
@@ -3461,7 +3469,7 @@
                   <a:srgbClr val="3D424E"/>
                 </a:solidFill>
               </a:rPr>
-              <a:t>o projeto envolve, direta ou indiretamente, seres humanos?</a:t>
+              <a:t>objetivo geral, seis específicos, seis hipóteses testáveis, sete contribuições esperadas</a:t>
             </a:r>
           </a:p>
           <a:p>
@@ -3476,7 +3484,7 @@
                   <a:srgbClr val="1F2A4E"/>
                 </a:solidFill>
               </a:rPr>
-              <a:t>Datasets utilizados:  </a:t>
+              <a:t>Capítulo 4 — Metodologia  </a:t>
             </a:r>
             <a:r>
               <a:rPr sz="1600">
@@ -3484,7 +3492,7 @@
                   <a:srgbClr val="3D424E"/>
                 </a:solidFill>
               </a:rPr>
-              <a:t>FairFace, RFW, BFW, BUPT — todos secundários, públicos, sem coleta primária</a:t>
+              <a:t>pipeline em seis etapas, quatro configurações comparativas, adequação ética já resolvida</a:t>
             </a:r>
           </a:p>
           <a:p>
@@ -3499,7 +3507,7 @@
                   <a:srgbClr val="1F2A4E"/>
                 </a:solidFill>
               </a:rPr>
-              <a:t>Natureza da pesquisa:  </a:t>
+              <a:t>Capítulo 5 — Cronograma  </a:t>
             </a:r>
             <a:r>
               <a:rPr sz="1600">
@@ -3507,7 +3515,7 @@
                   <a:srgbClr val="3D424E"/>
                 </a:solidFill>
               </a:rPr>
-              <a:t>puramente computacional, sem intervenção em seres humanos</a:t>
+              <a:t>único capítulo que só fecha depois desta reunião (marcos ajustados hoje)</a:t>
             </a:r>
           </a:p>
           <a:p>
@@ -3522,7 +3530,7 @@
                   <a:srgbClr val="1F2A4E"/>
                 </a:solidFill>
               </a:rPr>
-              <a:t>Ajuste v3.6 aplicado:  </a:t>
+              <a:t>  </a:t>
             </a:r>
             <a:r>
               <a:rPr sz="1600">
@@ -3530,7 +3538,7 @@
                   <a:srgbClr val="3D424E"/>
                 </a:solidFill>
               </a:rPr>
-              <a:t>validação MST do OE-1 substituída por processo interno (Mestrando + Orientador)</a:t>
+              <a:t/>
             </a:r>
           </a:p>
           <a:p>
@@ -3545,7 +3553,7 @@
                   <a:srgbClr val="1F2A4E"/>
                 </a:solidFill>
               </a:rPr>
-              <a:t>  </a:t>
+              <a:t>Formato:  </a:t>
             </a:r>
             <a:r>
               <a:rPr sz="1600">
@@ -3553,30 +3561,7 @@
                   <a:srgbClr val="3D424E"/>
                 </a:solidFill>
               </a:rPr>
-              <a:t/>
-            </a:r>
-          </a:p>
-          <a:p>
-            <a:pPr>
-              <a:spcAft>
-                <a:spcPts val="800"/>
-              </a:spcAft>
-            </a:pPr>
-            <a:r>
-              <a:rPr sz="1600" b="1">
-                <a:solidFill>
-                  <a:srgbClr val="1F2A4E"/>
-                </a:solidFill>
-              </a:rPr>
-              <a:t>Enquadramento:  </a:t>
-            </a:r>
-            <a:r>
-              <a:rPr sz="1600">
-                <a:solidFill>
-                  <a:srgbClr val="3D424E"/>
-                </a:solidFill>
-              </a:rPr>
-              <a:t>Art. 8º — dispensa de cadastro no CEP; exige apenas Declaração de Responsabilidade</a:t>
+              <a:t>corpo escrito em Markdown estruturado; próximos sete dias faço a transposição para LaTeX/Overleaf</a:t>
             </a:r>
           </a:p>
         </p:txBody>
@@ -3611,7 +3596,7 @@
               </a:defRPr>
             </a:pPr>
             <a:r>
-              <a:t>Auditoria completa em _checklist_etica_cep.md</a:t>
+              <a:t>Se quiser ver, abro qualquer capítulo agora — está tudo no GitHub.</a:t>
             </a:r>
           </a:p>
         </p:txBody>
@@ -3664,7 +3649,7 @@
               </a:defRPr>
             </a:pPr>
             <a:r>
-              <a:t>Ajuste técnico no OE-1 (v3.5 → v3.6)</a:t>
+              <a:t>A pergunta central da tese, em uma frase</a:t>
             </a:r>
           </a:p>
         </p:txBody>
@@ -3712,375 +3697,167 @@
           </a:p>
         </p:txBody>
       </p:sp>
-      <p:graphicFrame>
-        <p:nvGraphicFramePr>
-          <p:cNvPr id="4" name="Table 3"/>
-          <p:cNvGraphicFramePr>
-            <a:graphicFrameLocks noGrp="1"/>
-          </p:cNvGraphicFramePr>
+      <p:sp>
+        <p:nvSpPr>
+          <p:cNvPr id="4" name="TextBox 3"/>
+          <p:cNvSpPr txBox="1"/>
           <p:nvPr/>
-        </p:nvGraphicFramePr>
-        <p:xfrm>
-          <a:off x="457200" y="1371600"/>
-          <a:ext cx="11430000" cy="4754880"/>
-        </p:xfrm>
-        <a:graphic>
-          <a:graphicData uri="http://schemas.openxmlformats.org/drawingml/2006/table">
-            <a:tbl>
-              <a:tblPr firstRow="1" bandRow="1">
-                <a:tableStyleId>{5C22544A-7EE6-4342-B048-85BDC9FD1C3A}</a:tableStyleId>
-              </a:tblPr>
-              <a:tblGrid>
-                <a:gridCol w="2286000"/>
-                <a:gridCol w="4114800"/>
-                <a:gridCol w="5029200"/>
-              </a:tblGrid>
-              <a:tr h="792480">
-                <a:tc>
-                  <a:txBody>
-                    <a:bodyPr/>
-                    <a:lstStyle/>
-                    <a:p>
-                      <a:r>
-                        <a:rPr sz="1300" b="1">
-                          <a:solidFill>
-                            <a:srgbClr val="FFFFFF"/>
-                          </a:solidFill>
-                        </a:rPr>
-                        <a:t>Aspecto</a:t>
-                      </a:r>
-                    </a:p>
-                  </a:txBody>
-                  <a:tcPr>
-                    <a:solidFill>
-                      <a:srgbClr val="1F2A4E"/>
-                    </a:solidFill>
-                  </a:tcPr>
-                </a:tc>
-                <a:tc>
-                  <a:txBody>
-                    <a:bodyPr/>
-                    <a:lstStyle/>
-                    <a:p>
-                      <a:r>
-                        <a:rPr sz="1300" b="1">
-                          <a:solidFill>
-                            <a:srgbClr val="FFFFFF"/>
-                          </a:solidFill>
-                        </a:rPr>
-                        <a:t>v3.5 (anterior)</a:t>
-                      </a:r>
-                    </a:p>
-                  </a:txBody>
-                  <a:tcPr>
-                    <a:solidFill>
-                      <a:srgbClr val="1F2A4E"/>
-                    </a:solidFill>
-                  </a:tcPr>
-                </a:tc>
-                <a:tc>
-                  <a:txBody>
-                    <a:bodyPr/>
-                    <a:lstStyle/>
-                    <a:p>
-                      <a:r>
-                        <a:rPr sz="1300" b="1">
-                          <a:solidFill>
-                            <a:srgbClr val="FFFFFF"/>
-                          </a:solidFill>
-                        </a:rPr>
-                        <a:t>v3.6 (atual)</a:t>
-                      </a:r>
-                    </a:p>
-                  </a:txBody>
-                  <a:tcPr>
-                    <a:solidFill>
-                      <a:srgbClr val="1F2A4E"/>
-                    </a:solidFill>
-                  </a:tcPr>
-                </a:tc>
-              </a:tr>
-              <a:tr h="792480">
-                <a:tc>
-                  <a:txBody>
-                    <a:bodyPr/>
-                    <a:lstStyle/>
-                    <a:p>
-                      <a:r>
-                        <a:rPr sz="1100">
-                          <a:solidFill>
-                            <a:srgbClr val="3D424E"/>
-                          </a:solidFill>
-                        </a:rPr>
-                        <a:t>Método</a:t>
-                      </a:r>
-                    </a:p>
-                  </a:txBody>
-                  <a:tcPr/>
-                </a:tc>
-                <a:tc>
-                  <a:txBody>
-                    <a:bodyPr/>
-                    <a:lstStyle/>
-                    <a:p>
-                      <a:r>
-                        <a:rPr sz="1100">
-                          <a:solidFill>
-                            <a:srgbClr val="3D424E"/>
-                          </a:solidFill>
-                        </a:rPr>
-                        <a:t>Crowdsourcing externo via Prolific</a:t>
-                      </a:r>
-                    </a:p>
-                  </a:txBody>
-                  <a:tcPr/>
-                </a:tc>
-                <a:tc>
-                  <a:txBody>
-                    <a:bodyPr/>
-                    <a:lstStyle/>
-                    <a:p>
-                      <a:r>
-                        <a:rPr sz="1100">
-                          <a:solidFill>
-                            <a:srgbClr val="3D424E"/>
-                          </a:solidFill>
-                        </a:rPr>
-                        <a:t>Validação interna pela equipe acadêmica</a:t>
-                      </a:r>
-                    </a:p>
-                  </a:txBody>
-                  <a:tcPr/>
-                </a:tc>
-              </a:tr>
-              <a:tr h="792480">
-                <a:tc>
-                  <a:txBody>
-                    <a:bodyPr/>
-                    <a:lstStyle/>
-                    <a:p>
-                      <a:r>
-                        <a:rPr sz="1100">
-                          <a:solidFill>
-                            <a:srgbClr val="3D424E"/>
-                          </a:solidFill>
-                        </a:rPr>
-                        <a:t>Anotadores</a:t>
-                      </a:r>
-                    </a:p>
-                  </a:txBody>
-                  <a:tcPr/>
-                </a:tc>
-                <a:tc>
-                  <a:txBody>
-                    <a:bodyPr/>
-                    <a:lstStyle/>
-                    <a:p>
-                      <a:r>
-                        <a:rPr sz="1100">
-                          <a:solidFill>
-                            <a:srgbClr val="3D424E"/>
-                          </a:solidFill>
-                        </a:rPr>
-                        <a:t>~3 externos pagos</a:t>
-                      </a:r>
-                    </a:p>
-                  </a:txBody>
-                  <a:tcPr/>
-                </a:tc>
-                <a:tc>
-                  <a:txBody>
-                    <a:bodyPr/>
-                    <a:lstStyle/>
-                    <a:p>
-                      <a:r>
-                        <a:rPr sz="1100">
-                          <a:solidFill>
-                            <a:srgbClr val="3D424E"/>
-                          </a:solidFill>
-                        </a:rPr>
-                        <a:t>Mestrando + Orientador</a:t>
-                      </a:r>
-                    </a:p>
-                  </a:txBody>
-                  <a:tcPr/>
-                </a:tc>
-              </a:tr>
-              <a:tr h="792480">
-                <a:tc>
-                  <a:txBody>
-                    <a:bodyPr/>
-                    <a:lstStyle/>
-                    <a:p>
-                      <a:r>
-                        <a:rPr sz="1100">
-                          <a:solidFill>
-                            <a:srgbClr val="3D424E"/>
-                          </a:solidFill>
-                        </a:rPr>
-                        <a:t>Escala</a:t>
-                      </a:r>
-                    </a:p>
-                  </a:txBody>
-                  <a:tcPr/>
-                </a:tc>
-                <a:tc>
-                  <a:txBody>
-                    <a:bodyPr/>
-                    <a:lstStyle/>
-                    <a:p>
-                      <a:r>
-                        <a:rPr sz="1100">
-                          <a:solidFill>
-                            <a:srgbClr val="3D424E"/>
-                          </a:solidFill>
-                        </a:rPr>
-                        <a:t>~700 imgs estratificadas</a:t>
-                      </a:r>
-                    </a:p>
-                  </a:txBody>
-                  <a:tcPr/>
-                </a:tc>
-                <a:tc>
-                  <a:txBody>
-                    <a:bodyPr/>
-                    <a:lstStyle/>
-                    <a:p>
-                      <a:r>
-                        <a:rPr sz="1100">
-                          <a:solidFill>
-                            <a:srgbClr val="3D424E"/>
-                          </a:solidFill>
-                        </a:rPr>
-                        <a:t>~200-300 imgs estratificadas</a:t>
-                      </a:r>
-                    </a:p>
-                  </a:txBody>
-                  <a:tcPr/>
-                </a:tc>
-              </a:tr>
-              <a:tr h="792480">
-                <a:tc>
-                  <a:txBody>
-                    <a:bodyPr/>
-                    <a:lstStyle/>
-                    <a:p>
-                      <a:r>
-                        <a:rPr sz="1100">
-                          <a:solidFill>
-                            <a:srgbClr val="3D424E"/>
-                          </a:solidFill>
-                        </a:rPr>
-                        <a:t>Estratificação</a:t>
-                      </a:r>
-                    </a:p>
-                  </a:txBody>
-                  <a:tcPr/>
-                </a:tc>
-                <a:tc>
-                  <a:txBody>
-                    <a:bodyPr/>
-                    <a:lstStyle/>
-                    <a:p>
-                      <a:r>
-                        <a:rPr sz="1100">
-                          <a:solidFill>
-                            <a:srgbClr val="3D424E"/>
-                          </a:solidFill>
-                        </a:rPr>
-                        <a:t>Por raça e tom MST</a:t>
-                      </a:r>
-                    </a:p>
-                  </a:txBody>
-                  <a:tcPr/>
-                </a:tc>
-                <a:tc>
-                  <a:txBody>
-                    <a:bodyPr/>
-                    <a:lstStyle/>
-                    <a:p>
-                      <a:r>
-                        <a:rPr sz="1100">
-                          <a:solidFill>
-                            <a:srgbClr val="3D424E"/>
-                          </a:solidFill>
-                        </a:rPr>
-                        <a:t>Por raça e tom MST (preservada)</a:t>
-                      </a:r>
-                    </a:p>
-                  </a:txBody>
-                  <a:tcPr/>
-                </a:tc>
-              </a:tr>
-              <a:tr h="792480">
-                <a:tc>
-                  <a:txBody>
-                    <a:bodyPr/>
-                    <a:lstStyle/>
-                    <a:p>
-                      <a:r>
-                        <a:rPr sz="1100">
-                          <a:solidFill>
-                            <a:srgbClr val="3D424E"/>
-                          </a:solidFill>
-                        </a:rPr>
-                        <a:t>Implicação ética</a:t>
-                      </a:r>
-                    </a:p>
-                  </a:txBody>
-                  <a:tcPr>
-                    <a:solidFill>
-                      <a:srgbClr val="E8EAED"/>
-                    </a:solidFill>
-                  </a:tcPr>
-                </a:tc>
-                <a:tc>
-                  <a:txBody>
-                    <a:bodyPr/>
-                    <a:lstStyle/>
-                    <a:p>
-                      <a:r>
-                        <a:rPr sz="1100">
-                          <a:solidFill>
-                            <a:srgbClr val="3D424E"/>
-                          </a:solidFill>
-                        </a:rPr>
-                        <a:t>Requer CEP (pesquisa indireta com humanos)</a:t>
-                      </a:r>
-                    </a:p>
-                  </a:txBody>
-                  <a:tcPr>
-                    <a:solidFill>
-                      <a:srgbClr val="E8EAED"/>
-                    </a:solidFill>
-                  </a:tcPr>
-                </a:tc>
-                <a:tc>
-                  <a:txBody>
-                    <a:bodyPr/>
-                    <a:lstStyle/>
-                    <a:p>
-                      <a:r>
-                        <a:rPr sz="1100">
-                          <a:solidFill>
-                            <a:srgbClr val="3D424E"/>
-                          </a:solidFill>
-                        </a:rPr>
-                        <a:t>Dispensa CEP → apenas Declaração</a:t>
-                      </a:r>
-                    </a:p>
-                  </a:txBody>
-                  <a:tcPr>
-                    <a:solidFill>
-                      <a:srgbClr val="E8EAED"/>
-                    </a:solidFill>
-                  </a:tcPr>
-                </a:tc>
-              </a:tr>
-            </a:tbl>
-          </a:graphicData>
-        </a:graphic>
-      </p:graphicFrame>
+        </p:nvSpPr>
+        <p:spPr>
+          <a:xfrm>
+            <a:off x="457200" y="1371600"/>
+            <a:ext cx="11430000" cy="4937760"/>
+          </a:xfrm>
+          <a:prstGeom prst="rect">
+            <a:avLst/>
+          </a:prstGeom>
+          <a:noFill/>
+        </p:spPr>
+        <p:txBody>
+          <a:bodyPr wrap="square">
+            <a:spAutoFit/>
+          </a:bodyPr>
+          <a:lstStyle/>
+          <a:p>
+            <a:pPr>
+              <a:spcAft>
+                <a:spcPts val="800"/>
+              </a:spcAft>
+            </a:pPr>
+            <a:r>
+              <a:rPr sz="1600" b="1">
+                <a:solidFill>
+                  <a:srgbClr val="1F2A4E"/>
+                </a:solidFill>
+              </a:rPr>
+              <a:t>  </a:t>
+            </a:r>
+            <a:r>
+              <a:rPr sz="1600">
+                <a:solidFill>
+                  <a:srgbClr val="3D424E"/>
+                </a:solidFill>
+              </a:rPr>
+              <a:t/>
+            </a:r>
+          </a:p>
+          <a:p>
+            <a:pPr>
+              <a:spcAft>
+                <a:spcPts val="800"/>
+              </a:spcAft>
+            </a:pPr>
+            <a:r>
+              <a:rPr sz="1600" b="1">
+                <a:solidFill>
+                  <a:srgbClr val="1F2A4E"/>
+                </a:solidFill>
+              </a:rPr>
+              <a:t>Pergunta de pesquisa:  </a:t>
+            </a:r>
+            <a:r>
+              <a:rPr sz="1600">
+                <a:solidFill>
+                  <a:srgbClr val="3D424E"/>
+                </a:solidFill>
+              </a:rPr>
+              <a:t>condicionar arquiteturalmente um classificador racial pelo tom de pele (MST) reduz a disparidade Black × Latinx sem sacrificar acurácia agregada?</a:t>
+            </a:r>
+          </a:p>
+          <a:p>
+            <a:pPr>
+              <a:spcAft>
+                <a:spcPts val="800"/>
+              </a:spcAft>
+            </a:pPr>
+            <a:r>
+              <a:rPr sz="1600" b="1">
+                <a:solidFill>
+                  <a:srgbClr val="1F2A4E"/>
+                </a:solidFill>
+              </a:rPr>
+              <a:t>  </a:t>
+            </a:r>
+            <a:r>
+              <a:rPr sz="1600">
+                <a:solidFill>
+                  <a:srgbClr val="3D424E"/>
+                </a:solidFill>
+              </a:rPr>
+              <a:t/>
+            </a:r>
+          </a:p>
+          <a:p>
+            <a:pPr>
+              <a:spcAft>
+                <a:spcPts val="800"/>
+              </a:spcAft>
+            </a:pPr>
+            <a:r>
+              <a:rPr sz="1600" b="1">
+                <a:solidFill>
+                  <a:srgbClr val="1F2A4E"/>
+                </a:solidFill>
+              </a:rPr>
+              <a:t>Por que MST em vez de Fitzpatrick:  </a:t>
+            </a:r>
+            <a:r>
+              <a:rPr sz="1600">
+                <a:solidFill>
+                  <a:srgbClr val="3D424E"/>
+                </a:solidFill>
+              </a:rPr>
+              <a:t>Fitzpatrick foi projetada para dermatologia (queimadura solar), tem apenas 6 classes e viés fototípico documentado. MST tem 10 classes e foi desenhada para representatividade em CV — Google 2022, Schumann 2023.</a:t>
+            </a:r>
+          </a:p>
+          <a:p>
+            <a:pPr>
+              <a:spcAft>
+                <a:spcPts val="800"/>
+              </a:spcAft>
+            </a:pPr>
+            <a:r>
+              <a:rPr sz="1600" b="1">
+                <a:solidFill>
+                  <a:srgbClr val="1F2A4E"/>
+                </a:solidFill>
+              </a:rPr>
+              <a:t>  </a:t>
+            </a:r>
+            <a:r>
+              <a:rPr sz="1600">
+                <a:solidFill>
+                  <a:srgbClr val="3D424E"/>
+                </a:solidFill>
+              </a:rPr>
+              <a:t/>
+            </a:r>
+          </a:p>
+          <a:p>
+            <a:pPr>
+              <a:spcAft>
+                <a:spcPts val="800"/>
+              </a:spcAft>
+            </a:pPr>
+            <a:r>
+              <a:rPr sz="1600" b="1">
+                <a:solidFill>
+                  <a:srgbClr val="1F2A4E"/>
+                </a:solidFill>
+              </a:rPr>
+              <a:t>Por que FiLM em vez de concatenação simples:  </a:t>
+            </a:r>
+            <a:r>
+              <a:rPr sz="1600">
+                <a:solidFill>
+                  <a:srgbClr val="3D424E"/>
+                </a:solidFill>
+              </a:rPr>
+              <a:t>FiLM (Perez, AAAI 2018) modula features por escala e deslocamento condicionados — permite que o mesmo backbone reaja diferente ao mesmo pixel dependendo do contexto MST. Concatenação exige que o modelo re-aprenda a semântica do sinal.</a:t>
+            </a:r>
+          </a:p>
+        </p:txBody>
+      </p:sp>
       <p:sp>
         <p:nvSpPr>
           <p:cNvPr id="5" name="TextBox 4"/>
@@ -4111,7 +3888,7 @@
               </a:defRPr>
             </a:pPr>
             <a:r>
-              <a:t>Rigor metodológico preservado via estratificação; escala adaptada ao processo interno.</a:t>
+              <a:t>Slide-âncora do Cap 1. Toda a argumentação da tese sai daqui.</a:t>
             </a:r>
           </a:p>
         </p:txBody>
@@ -4164,7 +3941,7 @@
               </a:defRPr>
             </a:pPr>
             <a:r>
-              <a:t>Trâmite administrativo — próximos passos</a:t>
+              <a:t>Pipeline proposto — seis etapas encadeadas</a:t>
             </a:r>
           </a:p>
         </p:txBody>
@@ -4212,6 +3989,1112 @@
           </a:p>
         </p:txBody>
       </p:sp>
+      <p:graphicFrame>
+        <p:nvGraphicFramePr>
+          <p:cNvPr id="4" name="Table 3"/>
+          <p:cNvGraphicFramePr>
+            <a:graphicFrameLocks noGrp="1"/>
+          </p:cNvGraphicFramePr>
+          <p:nvPr/>
+        </p:nvGraphicFramePr>
+        <p:xfrm>
+          <a:off x="457200" y="1371600"/>
+          <a:ext cx="11430000" cy="4754880"/>
+        </p:xfrm>
+        <a:graphic>
+          <a:graphicData uri="http://schemas.openxmlformats.org/drawingml/2006/table">
+            <a:tbl>
+              <a:tblPr firstRow="1" bandRow="1">
+                <a:tableStyleId>{5C22544A-7EE6-4342-B048-85BDC9FD1C3A}</a:tableStyleId>
+              </a:tblPr>
+              <a:tblGrid>
+                <a:gridCol w="2560320"/>
+                <a:gridCol w="5029200"/>
+                <a:gridCol w="3840480"/>
+              </a:tblGrid>
+              <a:tr h="679268">
+                <a:tc>
+                  <a:txBody>
+                    <a:bodyPr/>
+                    <a:lstStyle/>
+                    <a:p>
+                      <a:r>
+                        <a:rPr sz="1300" b="1">
+                          <a:solidFill>
+                            <a:srgbClr val="FFFFFF"/>
+                          </a:solidFill>
+                        </a:rPr>
+                        <a:t>Etapa</a:t>
+                      </a:r>
+                    </a:p>
+                  </a:txBody>
+                  <a:tcPr>
+                    <a:solidFill>
+                      <a:srgbClr val="1F2A4E"/>
+                    </a:solidFill>
+                  </a:tcPr>
+                </a:tc>
+                <a:tc>
+                  <a:txBody>
+                    <a:bodyPr/>
+                    <a:lstStyle/>
+                    <a:p>
+                      <a:r>
+                        <a:rPr sz="1300" b="1">
+                          <a:solidFill>
+                            <a:srgbClr val="FFFFFF"/>
+                          </a:solidFill>
+                        </a:rPr>
+                        <a:t>O que faz</a:t>
+                      </a:r>
+                    </a:p>
+                  </a:txBody>
+                  <a:tcPr>
+                    <a:solidFill>
+                      <a:srgbClr val="1F2A4E"/>
+                    </a:solidFill>
+                  </a:tcPr>
+                </a:tc>
+                <a:tc>
+                  <a:txBody>
+                    <a:bodyPr/>
+                    <a:lstStyle/>
+                    <a:p>
+                      <a:r>
+                        <a:rPr sz="1300" b="1">
+                          <a:solidFill>
+                            <a:srgbClr val="FFFFFF"/>
+                          </a:solidFill>
+                        </a:rPr>
+                        <a:t>Entrega / contribuição</a:t>
+                      </a:r>
+                    </a:p>
+                  </a:txBody>
+                  <a:tcPr>
+                    <a:solidFill>
+                      <a:srgbClr val="1F2A4E"/>
+                    </a:solidFill>
+                  </a:tcPr>
+                </a:tc>
+              </a:tr>
+              <a:tr h="679268">
+                <a:tc>
+                  <a:txBody>
+                    <a:bodyPr/>
+                    <a:lstStyle/>
+                    <a:p>
+                      <a:r>
+                        <a:rPr sz="1100">
+                          <a:solidFill>
+                            <a:srgbClr val="3D424E"/>
+                          </a:solidFill>
+                        </a:rPr>
+                        <a:t>1. Classificador MST</a:t>
+                      </a:r>
+                    </a:p>
+                  </a:txBody>
+                  <a:tcPr/>
+                </a:tc>
+                <a:tc>
+                  <a:txBody>
+                    <a:bodyPr/>
+                    <a:lstStyle/>
+                    <a:p>
+                      <a:r>
+                        <a:rPr sz="1100">
+                          <a:solidFill>
+                            <a:srgbClr val="3D424E"/>
+                          </a:solidFill>
+                        </a:rPr>
+                        <a:t>SkinToneNet pré-treinado + validação interna em subset FairFace estratificado</a:t>
+                      </a:r>
+                    </a:p>
+                  </a:txBody>
+                  <a:tcPr/>
+                </a:tc>
+                <a:tc>
+                  <a:txBody>
+                    <a:bodyPr/>
+                    <a:lstStyle/>
+                    <a:p>
+                      <a:r>
+                        <a:rPr sz="1100">
+                          <a:solidFill>
+                            <a:srgbClr val="3D424E"/>
+                          </a:solidFill>
+                        </a:rPr>
+                        <a:t>Insumo do pipeline (não é contribuição)</a:t>
+                      </a:r>
+                    </a:p>
+                  </a:txBody>
+                  <a:tcPr/>
+                </a:tc>
+              </a:tr>
+              <a:tr h="679268">
+                <a:tc>
+                  <a:txBody>
+                    <a:bodyPr/>
+                    <a:lstStyle/>
+                    <a:p>
+                      <a:r>
+                        <a:rPr sz="1100">
+                          <a:solidFill>
+                            <a:srgbClr val="3D424E"/>
+                          </a:solidFill>
+                        </a:rPr>
+                        <a:t>2. Auditoria FairFace</a:t>
+                      </a:r>
+                    </a:p>
+                  </a:txBody>
+                  <a:tcPr/>
+                </a:tc>
+                <a:tc>
+                  <a:txBody>
+                    <a:bodyPr/>
+                    <a:lstStyle/>
+                    <a:p>
+                      <a:r>
+                        <a:rPr sz="1100">
+                          <a:solidFill>
+                            <a:srgbClr val="3D424E"/>
+                          </a:solidFill>
+                        </a:rPr>
+                        <a:t>Aplicar SkinToneNet sobre todo FairFace validation set</a:t>
+                      </a:r>
+                    </a:p>
+                  </a:txBody>
+                  <a:tcPr/>
+                </a:tc>
+                <a:tc>
+                  <a:txBody>
+                    <a:bodyPr/>
+                    <a:lstStyle/>
+                    <a:p>
+                      <a:r>
+                        <a:rPr sz="1100">
+                          <a:solidFill>
+                            <a:srgbClr val="3D424E"/>
+                          </a:solidFill>
+                        </a:rPr>
+                        <a:t>Matriz pública MST × race classes — Contribuição C2</a:t>
+                      </a:r>
+                    </a:p>
+                  </a:txBody>
+                  <a:tcPr/>
+                </a:tc>
+              </a:tr>
+              <a:tr h="679268">
+                <a:tc>
+                  <a:txBody>
+                    <a:bodyPr/>
+                    <a:lstStyle/>
+                    <a:p>
+                      <a:r>
+                        <a:rPr sz="1100">
+                          <a:solidFill>
+                            <a:srgbClr val="3D424E"/>
+                          </a:solidFill>
+                        </a:rPr>
+                        <a:t>3. Race classifier com conditioning</a:t>
+                      </a:r>
+                    </a:p>
+                  </a:txBody>
+                  <a:tcPr>
+                    <a:solidFill>
+                      <a:srgbClr val="E8EAED"/>
+                    </a:solidFill>
+                  </a:tcPr>
+                </a:tc>
+                <a:tc>
+                  <a:txBody>
+                    <a:bodyPr/>
+                    <a:lstStyle/>
+                    <a:p>
+                      <a:r>
+                        <a:rPr sz="1100">
+                          <a:solidFill>
+                            <a:srgbClr val="3D424E"/>
+                          </a:solidFill>
+                        </a:rPr>
+                        <a:t>ConvNeXt-T fine-tuned em FairFace, camadas FiLM por estágio recebendo vetor MST</a:t>
+                      </a:r>
+                    </a:p>
+                  </a:txBody>
+                  <a:tcPr>
+                    <a:solidFill>
+                      <a:srgbClr val="E8EAED"/>
+                    </a:solidFill>
+                  </a:tcPr>
+                </a:tc>
+                <a:tc>
+                  <a:txBody>
+                    <a:bodyPr/>
+                    <a:lstStyle/>
+                    <a:p>
+                      <a:r>
+                        <a:rPr sz="1100">
+                          <a:solidFill>
+                            <a:srgbClr val="3D424E"/>
+                          </a:solidFill>
+                        </a:rPr>
+                        <a:t>Configurações A/B/C/D — Contribuição C3</a:t>
+                      </a:r>
+                    </a:p>
+                  </a:txBody>
+                  <a:tcPr>
+                    <a:solidFill>
+                      <a:srgbClr val="E8EAED"/>
+                    </a:solidFill>
+                  </a:tcPr>
+                </a:tc>
+              </a:tr>
+              <a:tr h="679268">
+                <a:tc>
+                  <a:txBody>
+                    <a:bodyPr/>
+                    <a:lstStyle/>
+                    <a:p>
+                      <a:r>
+                        <a:rPr sz="1100">
+                          <a:solidFill>
+                            <a:srgbClr val="3D424E"/>
+                          </a:solidFill>
+                        </a:rPr>
+                        <a:t>4. Comparação contra baselines</a:t>
+                      </a:r>
+                    </a:p>
+                  </a:txBody>
+                  <a:tcPr/>
+                </a:tc>
+                <a:tc>
+                  <a:txBody>
+                    <a:bodyPr/>
+                    <a:lstStyle/>
+                    <a:p>
+                      <a:r>
+                        <a:rPr sz="1100">
+                          <a:solidFill>
+                            <a:srgbClr val="3D424E"/>
+                          </a:solidFill>
+                        </a:rPr>
+                        <a:t>6 baselines: ResNet-34, ConvNeXt-T puro, FSCL+, Group DRO, FineFACE, Adversarial</a:t>
+                      </a:r>
+                    </a:p>
+                  </a:txBody>
+                  <a:tcPr/>
+                </a:tc>
+                <a:tc>
+                  <a:txBody>
+                    <a:bodyPr/>
+                    <a:lstStyle/>
+                    <a:p>
+                      <a:r>
+                        <a:rPr sz="1100">
+                          <a:solidFill>
+                            <a:srgbClr val="3D424E"/>
+                          </a:solidFill>
+                        </a:rPr>
+                        <a:t>Triangulação DR + worst-class F1 + EO_h — Contribuição C4</a:t>
+                      </a:r>
+                    </a:p>
+                  </a:txBody>
+                  <a:tcPr/>
+                </a:tc>
+              </a:tr>
+              <a:tr h="679268">
+                <a:tc>
+                  <a:txBody>
+                    <a:bodyPr/>
+                    <a:lstStyle/>
+                    <a:p>
+                      <a:r>
+                        <a:rPr sz="1100">
+                          <a:solidFill>
+                            <a:srgbClr val="3D424E"/>
+                          </a:solidFill>
+                        </a:rPr>
+                        <a:t>5. Fair transferência</a:t>
+                      </a:r>
+                    </a:p>
+                  </a:txBody>
+                  <a:tcPr/>
+                </a:tc>
+                <a:tc>
+                  <a:txBody>
+                    <a:bodyPr/>
+                    <a:lstStyle/>
+                    <a:p>
+                      <a:r>
+                        <a:rPr sz="1100">
+                          <a:solidFill>
+                            <a:srgbClr val="3D424E"/>
+                          </a:solidFill>
+                        </a:rPr>
+                        <a:t>Aplicar backbone fair em face recognition downstream (RFW ou BFW)</a:t>
+                      </a:r>
+                    </a:p>
+                  </a:txBody>
+                  <a:tcPr/>
+                </a:tc>
+                <a:tc>
+                  <a:txBody>
+                    <a:bodyPr/>
+                    <a:lstStyle/>
+                    <a:p>
+                      <a:r>
+                        <a:rPr sz="1100">
+                          <a:solidFill>
+                            <a:srgbClr val="3D424E"/>
+                          </a:solidFill>
+                        </a:rPr>
+                        <a:t>Demonstração de fair transfer — Contribuição C5</a:t>
+                      </a:r>
+                    </a:p>
+                  </a:txBody>
+                  <a:tcPr/>
+                </a:tc>
+              </a:tr>
+              <a:tr h="679272">
+                <a:tc>
+                  <a:txBody>
+                    <a:bodyPr/>
+                    <a:lstStyle/>
+                    <a:p>
+                      <a:r>
+                        <a:rPr sz="1100">
+                          <a:solidFill>
+                            <a:srgbClr val="3D424E"/>
+                          </a:solidFill>
+                        </a:rPr>
+                        <a:t>6. Síntese decompositiva</a:t>
+                      </a:r>
+                    </a:p>
+                  </a:txBody>
+                  <a:tcPr>
+                    <a:solidFill>
+                      <a:srgbClr val="E8EAED"/>
+                    </a:solidFill>
+                  </a:tcPr>
+                </a:tc>
+                <a:tc>
+                  <a:txBody>
+                    <a:bodyPr/>
+                    <a:lstStyle/>
+                    <a:p>
+                      <a:r>
+                        <a:rPr sz="1100">
+                          <a:solidFill>
+                            <a:srgbClr val="3D424E"/>
+                          </a:solidFill>
+                        </a:rPr>
+                        <a:t>Combinar C2 + C5 para separar componente fenotípico do algorítmico do erro Latinx</a:t>
+                      </a:r>
+                    </a:p>
+                  </a:txBody>
+                  <a:tcPr>
+                    <a:solidFill>
+                      <a:srgbClr val="E8EAED"/>
+                    </a:solidFill>
+                  </a:tcPr>
+                </a:tc>
+                <a:tc>
+                  <a:txBody>
+                    <a:bodyPr/>
+                    <a:lstStyle/>
+                    <a:p>
+                      <a:r>
+                        <a:rPr sz="1100">
+                          <a:solidFill>
+                            <a:srgbClr val="3D424E"/>
+                          </a:solidFill>
+                        </a:rPr>
+                        <a:t>Decomposição pixel info × skin tone — Contribuição C6/OE-6</a:t>
+                      </a:r>
+                    </a:p>
+                  </a:txBody>
+                  <a:tcPr>
+                    <a:solidFill>
+                      <a:srgbClr val="E8EAED"/>
+                    </a:solidFill>
+                  </a:tcPr>
+                </a:tc>
+              </a:tr>
+            </a:tbl>
+          </a:graphicData>
+        </a:graphic>
+      </p:graphicFrame>
+      <p:sp>
+        <p:nvSpPr>
+          <p:cNvPr id="5" name="TextBox 4"/>
+          <p:cNvSpPr txBox="1"/>
+          <p:nvPr/>
+        </p:nvSpPr>
+        <p:spPr>
+          <a:xfrm>
+            <a:off x="457200" y="6446520"/>
+            <a:ext cx="11430000" cy="365760"/>
+          </a:xfrm>
+          <a:prstGeom prst="rect">
+            <a:avLst/>
+          </a:prstGeom>
+          <a:noFill/>
+        </p:spPr>
+        <p:txBody>
+          <a:bodyPr wrap="none">
+            <a:spAutoFit/>
+          </a:bodyPr>
+          <a:lstStyle/>
+          <a:p>
+            <a:pPr>
+              <a:defRPr sz="1000" i="1">
+                <a:solidFill>
+                  <a:srgbClr val="707682"/>
+                </a:solidFill>
+              </a:defRPr>
+            </a:pPr>
+            <a:r>
+              <a:t>Etapa 3 é onde o mecanismo FiLM entra. Etapa 6 é o diagnóstico central da tese.</a:t>
+            </a:r>
+          </a:p>
+        </p:txBody>
+      </p:sp>
+    </p:spTree>
+  </p:cSld>
+  <p:clrMapOvr>
+    <a:masterClrMapping/>
+  </p:clrMapOvr>
+</p:sld>
+</file>
+
+<file path=ppt/slides/slide13.xml><?xml version="1.0" encoding="utf-8"?>
+<p:sld xmlns:a="http://schemas.openxmlformats.org/drawingml/2006/main" xmlns:p="http://schemas.openxmlformats.org/presentationml/2006/main" xmlns:r="http://schemas.openxmlformats.org/officeDocument/2006/relationships">
+  <p:cSld>
+    <p:spTree>
+      <p:nvGrpSpPr>
+        <p:cNvPr id="1" name=""/>
+        <p:cNvGrpSpPr/>
+        <p:nvPr/>
+      </p:nvGrpSpPr>
+      <p:grpSpPr/>
+      <p:sp>
+        <p:nvSpPr>
+          <p:cNvPr id="2" name="TextBox 1"/>
+          <p:cNvSpPr txBox="1"/>
+          <p:nvPr/>
+        </p:nvSpPr>
+        <p:spPr>
+          <a:xfrm>
+            <a:off x="457200" y="365760"/>
+            <a:ext cx="11430000" cy="822960"/>
+          </a:xfrm>
+          <a:prstGeom prst="rect">
+            <a:avLst/>
+          </a:prstGeom>
+          <a:noFill/>
+        </p:spPr>
+        <p:txBody>
+          <a:bodyPr wrap="square">
+            <a:spAutoFit/>
+          </a:bodyPr>
+          <a:lstStyle/>
+          <a:p>
+            <a:pPr>
+              <a:defRPr sz="2600" b="1">
+                <a:solidFill>
+                  <a:srgbClr val="1F2A4E"/>
+                </a:solidFill>
+              </a:defRPr>
+            </a:pPr>
+            <a:r>
+              <a:t>Quatro configurações do estudo comparativo (Etapa 3)</a:t>
+            </a:r>
+          </a:p>
+        </p:txBody>
+      </p:sp>
+      <p:sp>
+        <p:nvSpPr>
+          <p:cNvPr id="3" name="Rectangle 2"/>
+          <p:cNvSpPr/>
+          <p:nvPr/>
+        </p:nvSpPr>
+        <p:spPr>
+          <a:xfrm>
+            <a:off x="457200" y="1143000"/>
+            <a:ext cx="11430000" cy="36576"/>
+          </a:xfrm>
+          <a:prstGeom prst="rect">
+            <a:avLst/>
+          </a:prstGeom>
+          <a:solidFill>
+            <a:srgbClr val="1F2A4E"/>
+          </a:solidFill>
+          <a:ln>
+            <a:noFill/>
+          </a:ln>
+        </p:spPr>
+        <p:style>
+          <a:lnRef idx="1">
+            <a:schemeClr val="accent1"/>
+          </a:lnRef>
+          <a:fillRef idx="3">
+            <a:schemeClr val="accent1"/>
+          </a:fillRef>
+          <a:effectRef idx="2">
+            <a:schemeClr val="accent1"/>
+          </a:effectRef>
+          <a:fontRef idx="minor">
+            <a:schemeClr val="lt1"/>
+          </a:fontRef>
+        </p:style>
+        <p:txBody>
+          <a:bodyPr rtlCol="0" anchor="ctr"/>
+          <a:lstStyle/>
+          <a:p>
+            <a:pPr algn="ctr"/>
+          </a:p>
+        </p:txBody>
+      </p:sp>
+      <p:graphicFrame>
+        <p:nvGraphicFramePr>
+          <p:cNvPr id="4" name="Table 3"/>
+          <p:cNvGraphicFramePr>
+            <a:graphicFrameLocks noGrp="1"/>
+          </p:cNvGraphicFramePr>
+          <p:nvPr/>
+        </p:nvGraphicFramePr>
+        <p:xfrm>
+          <a:off x="457200" y="1371600"/>
+          <a:ext cx="12161520" cy="4754880"/>
+        </p:xfrm>
+        <a:graphic>
+          <a:graphicData uri="http://schemas.openxmlformats.org/drawingml/2006/table">
+            <a:tbl>
+              <a:tblPr firstRow="1" bandRow="1">
+                <a:tableStyleId>{5C22544A-7EE6-4342-B048-85BDC9FD1C3A}</a:tableStyleId>
+              </a:tblPr>
+              <a:tblGrid>
+                <a:gridCol w="914400"/>
+                <a:gridCol w="3474720"/>
+                <a:gridCol w="3200400"/>
+                <a:gridCol w="4572000"/>
+              </a:tblGrid>
+              <a:tr h="950976">
+                <a:tc>
+                  <a:txBody>
+                    <a:bodyPr/>
+                    <a:lstStyle/>
+                    <a:p>
+                      <a:r>
+                        <a:rPr sz="1300" b="1">
+                          <a:solidFill>
+                            <a:srgbClr val="FFFFFF"/>
+                          </a:solidFill>
+                        </a:rPr>
+                        <a:t>Config</a:t>
+                      </a:r>
+                    </a:p>
+                  </a:txBody>
+                  <a:tcPr>
+                    <a:solidFill>
+                      <a:srgbClr val="1F2A4E"/>
+                    </a:solidFill>
+                  </a:tcPr>
+                </a:tc>
+                <a:tc>
+                  <a:txBody>
+                    <a:bodyPr/>
+                    <a:lstStyle/>
+                    <a:p>
+                      <a:r>
+                        <a:rPr sz="1300" b="1">
+                          <a:solidFill>
+                            <a:srgbClr val="FFFFFF"/>
+                          </a:solidFill>
+                        </a:rPr>
+                        <a:t>Backbone + conditioning</a:t>
+                      </a:r>
+                    </a:p>
+                  </a:txBody>
+                  <a:tcPr>
+                    <a:solidFill>
+                      <a:srgbClr val="1F2A4E"/>
+                    </a:solidFill>
+                  </a:tcPr>
+                </a:tc>
+                <a:tc>
+                  <a:txBody>
+                    <a:bodyPr/>
+                    <a:lstStyle/>
+                    <a:p>
+                      <a:r>
+                        <a:rPr sz="1300" b="1">
+                          <a:solidFill>
+                            <a:srgbClr val="FFFFFF"/>
+                          </a:solidFill>
+                        </a:rPr>
+                        <a:t>Sinal</a:t>
+                      </a:r>
+                    </a:p>
+                  </a:txBody>
+                  <a:tcPr>
+                    <a:solidFill>
+                      <a:srgbClr val="1F2A4E"/>
+                    </a:solidFill>
+                  </a:tcPr>
+                </a:tc>
+                <a:tc>
+                  <a:txBody>
+                    <a:bodyPr/>
+                    <a:lstStyle/>
+                    <a:p>
+                      <a:r>
+                        <a:rPr sz="1300" b="1">
+                          <a:solidFill>
+                            <a:srgbClr val="FFFFFF"/>
+                          </a:solidFill>
+                        </a:rPr>
+                        <a:t>Papel no estudo</a:t>
+                      </a:r>
+                    </a:p>
+                  </a:txBody>
+                  <a:tcPr>
+                    <a:solidFill>
+                      <a:srgbClr val="1F2A4E"/>
+                    </a:solidFill>
+                  </a:tcPr>
+                </a:tc>
+              </a:tr>
+              <a:tr h="950976">
+                <a:tc>
+                  <a:txBody>
+                    <a:bodyPr/>
+                    <a:lstStyle/>
+                    <a:p>
+                      <a:r>
+                        <a:rPr sz="1100">
+                          <a:solidFill>
+                            <a:srgbClr val="3D424E"/>
+                          </a:solidFill>
+                        </a:rPr>
+                        <a:t>A</a:t>
+                      </a:r>
+                    </a:p>
+                  </a:txBody>
+                  <a:tcPr/>
+                </a:tc>
+                <a:tc>
+                  <a:txBody>
+                    <a:bodyPr/>
+                    <a:lstStyle/>
+                    <a:p>
+                      <a:r>
+                        <a:rPr sz="1100">
+                          <a:solidFill>
+                            <a:srgbClr val="3D424E"/>
+                          </a:solidFill>
+                        </a:rPr>
+                        <a:t>ConvNeXt-T sem conditioning</a:t>
+                      </a:r>
+                    </a:p>
+                  </a:txBody>
+                  <a:tcPr/>
+                </a:tc>
+                <a:tc>
+                  <a:txBody>
+                    <a:bodyPr/>
+                    <a:lstStyle/>
+                    <a:p>
+                      <a:r>
+                        <a:rPr sz="1100">
+                          <a:solidFill>
+                            <a:srgbClr val="3D424E"/>
+                          </a:solidFill>
+                        </a:rPr>
+                        <a:t>—</a:t>
+                      </a:r>
+                    </a:p>
+                  </a:txBody>
+                  <a:tcPr/>
+                </a:tc>
+                <a:tc>
+                  <a:txBody>
+                    <a:bodyPr/>
+                    <a:lstStyle/>
+                    <a:p>
+                      <a:r>
+                        <a:rPr sz="1100">
+                          <a:solidFill>
+                            <a:srgbClr val="3D424E"/>
+                          </a:solidFill>
+                        </a:rPr>
+                        <a:t>Baseline de controle</a:t>
+                      </a:r>
+                    </a:p>
+                  </a:txBody>
+                  <a:tcPr/>
+                </a:tc>
+              </a:tr>
+              <a:tr h="950976">
+                <a:tc>
+                  <a:txBody>
+                    <a:bodyPr/>
+                    <a:lstStyle/>
+                    <a:p>
+                      <a:r>
+                        <a:rPr sz="1100">
+                          <a:solidFill>
+                            <a:srgbClr val="3D424E"/>
+                          </a:solidFill>
+                        </a:rPr>
+                        <a:t>B</a:t>
+                      </a:r>
+                    </a:p>
+                  </a:txBody>
+                  <a:tcPr>
+                    <a:solidFill>
+                      <a:srgbClr val="E8EAED"/>
+                    </a:solidFill>
+                  </a:tcPr>
+                </a:tc>
+                <a:tc>
+                  <a:txBody>
+                    <a:bodyPr/>
+                    <a:lstStyle/>
+                    <a:p>
+                      <a:r>
+                        <a:rPr sz="1100">
+                          <a:solidFill>
+                            <a:srgbClr val="3D424E"/>
+                          </a:solidFill>
+                        </a:rPr>
+                        <a:t>ConvNeXt-T + FiLM linear</a:t>
+                      </a:r>
+                    </a:p>
+                  </a:txBody>
+                  <a:tcPr>
+                    <a:solidFill>
+                      <a:srgbClr val="E8EAED"/>
+                    </a:solidFill>
+                  </a:tcPr>
+                </a:tc>
+                <a:tc>
+                  <a:txBody>
+                    <a:bodyPr/>
+                    <a:lstStyle/>
+                    <a:p>
+                      <a:r>
+                        <a:rPr sz="1100">
+                          <a:solidFill>
+                            <a:srgbClr val="3D424E"/>
+                          </a:solidFill>
+                        </a:rPr>
+                        <a:t>MST 10-dim</a:t>
+                      </a:r>
+                    </a:p>
+                  </a:txBody>
+                  <a:tcPr>
+                    <a:solidFill>
+                      <a:srgbClr val="E8EAED"/>
+                    </a:solidFill>
+                  </a:tcPr>
+                </a:tc>
+                <a:tc>
+                  <a:txBody>
+                    <a:bodyPr/>
+                    <a:lstStyle/>
+                    <a:p>
+                      <a:r>
+                        <a:rPr sz="1100">
+                          <a:solidFill>
+                            <a:srgbClr val="3D424E"/>
+                          </a:solidFill>
+                        </a:rPr>
+                        <a:t>Proposta principal — hipótese central</a:t>
+                      </a:r>
+                    </a:p>
+                  </a:txBody>
+                  <a:tcPr>
+                    <a:solidFill>
+                      <a:srgbClr val="E8EAED"/>
+                    </a:solidFill>
+                  </a:tcPr>
+                </a:tc>
+              </a:tr>
+              <a:tr h="950976">
+                <a:tc>
+                  <a:txBody>
+                    <a:bodyPr/>
+                    <a:lstStyle/>
+                    <a:p>
+                      <a:r>
+                        <a:rPr sz="1100">
+                          <a:solidFill>
+                            <a:srgbClr val="3D424E"/>
+                          </a:solidFill>
+                        </a:rPr>
+                        <a:t>C</a:t>
+                      </a:r>
+                    </a:p>
+                  </a:txBody>
+                  <a:tcPr/>
+                </a:tc>
+                <a:tc>
+                  <a:txBody>
+                    <a:bodyPr/>
+                    <a:lstStyle/>
+                    <a:p>
+                      <a:r>
+                        <a:rPr sz="1100">
+                          <a:solidFill>
+                            <a:srgbClr val="3D424E"/>
+                          </a:solidFill>
+                        </a:rPr>
+                        <a:t>ConvNeXt-T + Gated FiLM</a:t>
+                      </a:r>
+                    </a:p>
+                  </a:txBody>
+                  <a:tcPr/>
+                </a:tc>
+                <a:tc>
+                  <a:txBody>
+                    <a:bodyPr/>
+                    <a:lstStyle/>
+                    <a:p>
+                      <a:r>
+                        <a:rPr sz="1100">
+                          <a:solidFill>
+                            <a:srgbClr val="3D424E"/>
+                          </a:solidFill>
+                        </a:rPr>
+                        <a:t>MST 10-dim (não-linear)</a:t>
+                      </a:r>
+                    </a:p>
+                  </a:txBody>
+                  <a:tcPr/>
+                </a:tc>
+                <a:tc>
+                  <a:txBody>
+                    <a:bodyPr/>
+                    <a:lstStyle/>
+                    <a:p>
+                      <a:r>
+                        <a:rPr sz="1100">
+                          <a:solidFill>
+                            <a:srgbClr val="3D424E"/>
+                          </a:solidFill>
+                        </a:rPr>
+                        <a:t>Ablação: linear vs não-linear importa?</a:t>
+                      </a:r>
+                    </a:p>
+                  </a:txBody>
+                  <a:tcPr/>
+                </a:tc>
+              </a:tr>
+              <a:tr h="950976">
+                <a:tc>
+                  <a:txBody>
+                    <a:bodyPr/>
+                    <a:lstStyle/>
+                    <a:p>
+                      <a:r>
+                        <a:rPr sz="1100">
+                          <a:solidFill>
+                            <a:srgbClr val="3D424E"/>
+                          </a:solidFill>
+                        </a:rPr>
+                        <a:t>D</a:t>
+                      </a:r>
+                    </a:p>
+                  </a:txBody>
+                  <a:tcPr/>
+                </a:tc>
+                <a:tc>
+                  <a:txBody>
+                    <a:bodyPr/>
+                    <a:lstStyle/>
+                    <a:p>
+                      <a:r>
+                        <a:rPr sz="1100">
+                          <a:solidFill>
+                            <a:srgbClr val="3D424E"/>
+                          </a:solidFill>
+                        </a:rPr>
+                        <a:t>ConvNeXt-T + FiLM</a:t>
+                      </a:r>
+                    </a:p>
+                  </a:txBody>
+                  <a:tcPr/>
+                </a:tc>
+                <a:tc>
+                  <a:txBody>
+                    <a:bodyPr/>
+                    <a:lstStyle/>
+                    <a:p>
+                      <a:r>
+                        <a:rPr sz="1100">
+                          <a:solidFill>
+                            <a:srgbClr val="3D424E"/>
+                          </a:solidFill>
+                        </a:rPr>
+                        <a:t>Embedding CLIP-text 512-dim</a:t>
+                      </a:r>
+                    </a:p>
+                  </a:txBody>
+                  <a:tcPr/>
+                </a:tc>
+                <a:tc>
+                  <a:txBody>
+                    <a:bodyPr/>
+                    <a:lstStyle/>
+                    <a:p>
+                      <a:r>
+                        <a:rPr sz="1100">
+                          <a:solidFill>
+                            <a:srgbClr val="3D424E"/>
+                          </a:solidFill>
+                        </a:rPr>
+                        <a:t>Recomendação da reunião 15/jun — CLIP como alternativa moderna</a:t>
+                      </a:r>
+                    </a:p>
+                  </a:txBody>
+                  <a:tcPr/>
+                </a:tc>
+              </a:tr>
+            </a:tbl>
+          </a:graphicData>
+        </a:graphic>
+      </p:graphicFrame>
+      <p:sp>
+        <p:nvSpPr>
+          <p:cNvPr id="5" name="TextBox 4"/>
+          <p:cNvSpPr txBox="1"/>
+          <p:nvPr/>
+        </p:nvSpPr>
+        <p:spPr>
+          <a:xfrm>
+            <a:off x="457200" y="6446520"/>
+            <a:ext cx="11430000" cy="365760"/>
+          </a:xfrm>
+          <a:prstGeom prst="rect">
+            <a:avLst/>
+          </a:prstGeom>
+          <a:noFill/>
+        </p:spPr>
+        <p:txBody>
+          <a:bodyPr wrap="none">
+            <a:spAutoFit/>
+          </a:bodyPr>
+          <a:lstStyle/>
+          <a:p>
+            <a:pPr>
+              <a:defRPr sz="1000" i="1">
+                <a:solidFill>
+                  <a:srgbClr val="707682"/>
+                </a:solidFill>
+              </a:defRPr>
+            </a:pPr>
+            <a:r>
+              <a:t>B é a proposta central. C isola a não-linearidade. D compara com sinal semântico rico via CLIP.</a:t>
+            </a:r>
+          </a:p>
+        </p:txBody>
+      </p:sp>
+    </p:spTree>
+  </p:cSld>
+  <p:clrMapOvr>
+    <a:masterClrMapping/>
+  </p:clrMapOvr>
+</p:sld>
+</file>
+
+<file path=ppt/slides/slide14.xml><?xml version="1.0" encoding="utf-8"?>
+<p:sld xmlns:a="http://schemas.openxmlformats.org/drawingml/2006/main" xmlns:p="http://schemas.openxmlformats.org/presentationml/2006/main" xmlns:r="http://schemas.openxmlformats.org/officeDocument/2006/relationships">
+  <p:cSld>
+    <p:spTree>
+      <p:nvGrpSpPr>
+        <p:cNvPr id="1" name=""/>
+        <p:cNvGrpSpPr/>
+        <p:nvPr/>
+      </p:nvGrpSpPr>
+      <p:grpSpPr/>
+      <p:sp>
+        <p:nvSpPr>
+          <p:cNvPr id="2" name="TextBox 1"/>
+          <p:cNvSpPr txBox="1"/>
+          <p:nvPr/>
+        </p:nvSpPr>
+        <p:spPr>
+          <a:xfrm>
+            <a:off x="457200" y="365760"/>
+            <a:ext cx="11430000" cy="822960"/>
+          </a:xfrm>
+          <a:prstGeom prst="rect">
+            <a:avLst/>
+          </a:prstGeom>
+          <a:noFill/>
+        </p:spPr>
+        <p:txBody>
+          <a:bodyPr wrap="square">
+            <a:spAutoFit/>
+          </a:bodyPr>
+          <a:lstStyle/>
+          <a:p>
+            <a:pPr>
+              <a:defRPr sz="2600" b="1">
+                <a:solidFill>
+                  <a:srgbClr val="1F2A4E"/>
+                </a:solidFill>
+              </a:defRPr>
+            </a:pPr>
+            <a:r>
+              <a:t>O achado que ancora a tese (Rodada 8, junho)</a:t>
+            </a:r>
+          </a:p>
+        </p:txBody>
+      </p:sp>
+      <p:sp>
+        <p:nvSpPr>
+          <p:cNvPr id="3" name="Rectangle 2"/>
+          <p:cNvSpPr/>
+          <p:nvPr/>
+        </p:nvSpPr>
+        <p:spPr>
+          <a:xfrm>
+            <a:off x="457200" y="1143000"/>
+            <a:ext cx="11430000" cy="36576"/>
+          </a:xfrm>
+          <a:prstGeom prst="rect">
+            <a:avLst/>
+          </a:prstGeom>
+          <a:solidFill>
+            <a:srgbClr val="1F2A4E"/>
+          </a:solidFill>
+          <a:ln>
+            <a:noFill/>
+          </a:ln>
+        </p:spPr>
+        <p:style>
+          <a:lnRef idx="1">
+            <a:schemeClr val="accent1"/>
+          </a:lnRef>
+          <a:fillRef idx="3">
+            <a:schemeClr val="accent1"/>
+          </a:fillRef>
+          <a:effectRef idx="2">
+            <a:schemeClr val="accent1"/>
+          </a:effectRef>
+          <a:fontRef idx="minor">
+            <a:schemeClr val="lt1"/>
+          </a:fontRef>
+        </p:style>
+        <p:txBody>
+          <a:bodyPr rtlCol="0" anchor="ctr"/>
+          <a:lstStyle/>
+          <a:p>
+            <a:pPr algn="ctr"/>
+          </a:p>
+        </p:txBody>
+      </p:sp>
       <p:sp>
         <p:nvSpPr>
           <p:cNvPr id="4" name="TextBox 3"/>
@@ -4245,7 +5128,7 @@
                   <a:srgbClr val="1F2A4E"/>
                 </a:solidFill>
               </a:rPr>
-              <a:t>1.  </a:t>
+              <a:t>Problema conhecido:  </a:t>
             </a:r>
             <a:r>
               <a:rPr sz="1600">
@@ -4253,7 +5136,7 @@
                   <a:srgbClr val="3D424E"/>
                 </a:solidFill>
               </a:rPr>
-              <a:t>Confirmar hoje quem é o(a) Chefe do Departamento (3ª assinatura obrigatória)</a:t>
+              <a:t>modelos SOTA reportam F1 Latinx próximo de 60 % há três anos — persiste mesmo em modelos multimodais recentes (AlDahoul 2024)</a:t>
             </a:r>
           </a:p>
           <a:p>
@@ -4268,7 +5151,7 @@
                   <a:srgbClr val="1F2A4E"/>
                 </a:solidFill>
               </a:rPr>
-              <a:t>2.  </a:t>
+              <a:t>  </a:t>
             </a:r>
             <a:r>
               <a:rPr sz="1600">
@@ -4276,7 +5159,7 @@
                   <a:srgbClr val="3D424E"/>
                 </a:solidFill>
               </a:rPr>
-              <a:t>Baixar modelo de Declaração em http://www.cep.unifesp.br/cep</a:t>
+              <a:t/>
             </a:r>
           </a:p>
           <a:p>
@@ -4291,7 +5174,7 @@
                   <a:srgbClr val="1F2A4E"/>
                 </a:solidFill>
               </a:rPr>
-              <a:t>3.  </a:t>
+              <a:t>Diagnóstico novo:  </a:t>
             </a:r>
             <a:r>
               <a:rPr sz="1600">
@@ -4299,7 +5182,7 @@
                   <a:srgbClr val="3D424E"/>
                 </a:solidFill>
               </a:rPr>
-              <a:t>Preencher com dados do projeto</a:t>
+              <a:t>não é só bias algorítmico. É heterogeneidade fenotípica intra-categoria que a rotulagem monolítica de FairFace apaga.</a:t>
             </a:r>
           </a:p>
           <a:p>
@@ -4314,7 +5197,7 @@
                   <a:srgbClr val="1F2A4E"/>
                 </a:solidFill>
               </a:rPr>
-              <a:t>4.  </a:t>
+              <a:t>  </a:t>
             </a:r>
             <a:r>
               <a:rPr sz="1600">
@@ -4322,7 +5205,7 @@
                   <a:srgbClr val="3D424E"/>
                 </a:solidFill>
               </a:rPr>
-              <a:t>Coletar 3 assinaturas via SEI Unifesp — Mestrando + Orientador + Chefe do Departamento</a:t>
+              <a:t/>
             </a:r>
           </a:p>
           <a:p>
@@ -4330,22 +5213,14 @@
               <a:spcAft>
                 <a:spcPts val="800"/>
               </a:spcAft>
-            </a:pPr>
-            <a:r>
-              <a:rPr sz="1600" b="1">
-                <a:solidFill>
-                  <a:srgbClr val="1F2A4E"/>
-                </a:solidFill>
-              </a:rPr>
-              <a:t>5.  </a:t>
-            </a:r>
-            <a:r>
-              <a:rPr sz="1600">
+              <a:defRPr sz="1600">
                 <a:solidFill>
                   <a:srgbClr val="3D424E"/>
                 </a:solidFill>
-              </a:rPr>
-              <a:t>Anexar Declaração assinada à entrega da qualificação</a:t>
+              </a:defRPr>
+            </a:pPr>
+            <a:r>
+              <a:t>— Fundamentação empírica agora tripla:</a:t>
             </a:r>
           </a:p>
           <a:p>
@@ -4360,7 +5235,7 @@
                   <a:srgbClr val="1F2A4E"/>
                 </a:solidFill>
               </a:rPr>
-              <a:t>6.  </a:t>
+              <a:t>Antropologia:  </a:t>
             </a:r>
             <a:r>
               <a:rPr sz="1600">
@@ -4368,7 +5243,88 @@
                   <a:srgbClr val="3D424E"/>
                 </a:solidFill>
               </a:rPr>
-              <a:t>Incluir parágrafo metodológico no Cap 4 sobre dispensa CEP (Art. 8º)</a:t>
+              <a:t>Telles 2014 (PERLA, 4 países latino-americanos) documenta pigmentocracia — tom de pele varia mais dentro da categoria do que entre elas</a:t>
+            </a:r>
+          </a:p>
+          <a:p>
+            <a:pPr>
+              <a:spcAft>
+                <a:spcPts val="800"/>
+              </a:spcAft>
+            </a:pPr>
+            <a:r>
+              <a:rPr sz="1600" b="1">
+                <a:solidFill>
+                  <a:srgbClr val="1F2A4E"/>
+                </a:solidFill>
+              </a:rPr>
+              <a:t>Genética:  </a:t>
+            </a:r>
+            <a:r>
+              <a:rPr sz="1600">
+                <a:solidFill>
+                  <a:srgbClr val="3D424E"/>
+                </a:solidFill>
+              </a:rPr>
+              <a:t>Bryc 2015 (AJHG, 162 mil indivíduos) — ancestralidade Native + European + African altamente variável em Latinos</a:t>
+            </a:r>
+          </a:p>
+          <a:p>
+            <a:pPr>
+              <a:spcAft>
+                <a:spcPts val="800"/>
+              </a:spcAft>
+            </a:pPr>
+            <a:r>
+              <a:rPr sz="1600" b="1">
+                <a:solidFill>
+                  <a:srgbClr val="1F2A4E"/>
+                </a:solidFill>
+              </a:rPr>
+              <a:t>Sociologia:  </a:t>
+            </a:r>
+            <a:r>
+              <a:rPr sz="1600">
+                <a:solidFill>
+                  <a:srgbClr val="3D424E"/>
+                </a:solidFill>
+              </a:rPr>
+              <a:t>Pew 2017 — identidade Hispanic cai de 97 % para 50 % em quatro gerações nos EUA. Categoria é sociopolítica, não fenotípica.</a:t>
+            </a:r>
+          </a:p>
+        </p:txBody>
+      </p:sp>
+      <p:sp>
+        <p:nvSpPr>
+          <p:cNvPr id="5" name="TextBox 4"/>
+          <p:cNvSpPr txBox="1"/>
+          <p:nvPr/>
+        </p:nvSpPr>
+        <p:spPr>
+          <a:xfrm>
+            <a:off x="457200" y="6446520"/>
+            <a:ext cx="11430000" cy="365760"/>
+          </a:xfrm>
+          <a:prstGeom prst="rect">
+            <a:avLst/>
+          </a:prstGeom>
+          <a:noFill/>
+        </p:spPr>
+        <p:txBody>
+          <a:bodyPr wrap="none">
+            <a:spAutoFit/>
+          </a:bodyPr>
+          <a:lstStyle/>
+          <a:p>
+            <a:pPr>
+              <a:defRPr sz="1000" i="1">
+                <a:solidFill>
+                  <a:srgbClr val="707682"/>
+                </a:solidFill>
+              </a:defRPr>
+            </a:pPr>
+            <a:r>
+              <a:t>Esse é o argumento pelo qual C6 (decomposição fenotípico × algorítmico) vira contribuição central.</a:t>
             </a:r>
           </a:p>
         </p:txBody>
@@ -4381,7 +5337,231 @@
 </p:sld>
 </file>
 
-<file path=ppt/slides/slide13.xml><?xml version="1.0" encoding="utf-8"?>
+<file path=ppt/slides/slide15.xml><?xml version="1.0" encoding="utf-8"?>
+<p:sld xmlns:a="http://schemas.openxmlformats.org/drawingml/2006/main" xmlns:p="http://schemas.openxmlformats.org/presentationml/2006/main" xmlns:r="http://schemas.openxmlformats.org/officeDocument/2006/relationships">
+  <p:cSld>
+    <p:spTree>
+      <p:nvGrpSpPr>
+        <p:cNvPr id="1" name=""/>
+        <p:cNvGrpSpPr/>
+        <p:nvPr/>
+      </p:nvGrpSpPr>
+      <p:grpSpPr/>
+      <p:sp>
+        <p:nvSpPr>
+          <p:cNvPr id="2" name="TextBox 1"/>
+          <p:cNvSpPr txBox="1"/>
+          <p:nvPr/>
+        </p:nvSpPr>
+        <p:spPr>
+          <a:xfrm>
+            <a:off x="457200" y="365760"/>
+            <a:ext cx="11430000" cy="822960"/>
+          </a:xfrm>
+          <a:prstGeom prst="rect">
+            <a:avLst/>
+          </a:prstGeom>
+          <a:noFill/>
+        </p:spPr>
+        <p:txBody>
+          <a:bodyPr wrap="square">
+            <a:spAutoFit/>
+          </a:bodyPr>
+          <a:lstStyle/>
+          <a:p>
+            <a:pPr>
+              <a:defRPr sz="2600" b="1">
+                <a:solidFill>
+                  <a:srgbClr val="1F2A4E"/>
+                </a:solidFill>
+              </a:defRPr>
+            </a:pPr>
+            <a:r>
+              <a:t>Postura sobre uso de LLM — como quero deixar explícito na defesa</a:t>
+            </a:r>
+          </a:p>
+        </p:txBody>
+      </p:sp>
+      <p:sp>
+        <p:nvSpPr>
+          <p:cNvPr id="3" name="Rectangle 2"/>
+          <p:cNvSpPr/>
+          <p:nvPr/>
+        </p:nvSpPr>
+        <p:spPr>
+          <a:xfrm>
+            <a:off x="457200" y="1143000"/>
+            <a:ext cx="11430000" cy="36576"/>
+          </a:xfrm>
+          <a:prstGeom prst="rect">
+            <a:avLst/>
+          </a:prstGeom>
+          <a:solidFill>
+            <a:srgbClr val="1F2A4E"/>
+          </a:solidFill>
+          <a:ln>
+            <a:noFill/>
+          </a:ln>
+        </p:spPr>
+        <p:style>
+          <a:lnRef idx="1">
+            <a:schemeClr val="accent1"/>
+          </a:lnRef>
+          <a:fillRef idx="3">
+            <a:schemeClr val="accent1"/>
+          </a:fillRef>
+          <a:effectRef idx="2">
+            <a:schemeClr val="accent1"/>
+          </a:effectRef>
+          <a:fontRef idx="minor">
+            <a:schemeClr val="lt1"/>
+          </a:fontRef>
+        </p:style>
+        <p:txBody>
+          <a:bodyPr rtlCol="0" anchor="ctr"/>
+          <a:lstStyle/>
+          <a:p>
+            <a:pPr algn="ctr"/>
+          </a:p>
+        </p:txBody>
+      </p:sp>
+      <p:sp>
+        <p:nvSpPr>
+          <p:cNvPr id="4" name="Rectangle 3"/>
+          <p:cNvSpPr/>
+          <p:nvPr/>
+        </p:nvSpPr>
+        <p:spPr>
+          <a:xfrm>
+            <a:off x="1371600" y="2011680"/>
+            <a:ext cx="73152" cy="3200400"/>
+          </a:xfrm>
+          <a:prstGeom prst="rect">
+            <a:avLst/>
+          </a:prstGeom>
+          <a:solidFill>
+            <a:srgbClr val="1F2A4E"/>
+          </a:solidFill>
+          <a:ln>
+            <a:noFill/>
+          </a:ln>
+        </p:spPr>
+        <p:style>
+          <a:lnRef idx="1">
+            <a:schemeClr val="accent1"/>
+          </a:lnRef>
+          <a:fillRef idx="3">
+            <a:schemeClr val="accent1"/>
+          </a:fillRef>
+          <a:effectRef idx="2">
+            <a:schemeClr val="accent1"/>
+          </a:effectRef>
+          <a:fontRef idx="minor">
+            <a:schemeClr val="lt1"/>
+          </a:fontRef>
+        </p:style>
+        <p:txBody>
+          <a:bodyPr rtlCol="0" anchor="ctr"/>
+          <a:lstStyle/>
+          <a:p>
+            <a:pPr algn="ctr"/>
+          </a:p>
+        </p:txBody>
+      </p:sp>
+      <p:sp>
+        <p:nvSpPr>
+          <p:cNvPr id="5" name="TextBox 4"/>
+          <p:cNvSpPr txBox="1"/>
+          <p:nvPr/>
+        </p:nvSpPr>
+        <p:spPr>
+          <a:xfrm>
+            <a:off x="1645920" y="2011680"/>
+            <a:ext cx="9601200" cy="3474720"/>
+          </a:xfrm>
+          <a:prstGeom prst="rect">
+            <a:avLst/>
+          </a:prstGeom>
+          <a:noFill/>
+        </p:spPr>
+        <p:txBody>
+          <a:bodyPr wrap="square">
+            <a:spAutoFit/>
+          </a:bodyPr>
+          <a:lstStyle/>
+          <a:p>
+            <a:pPr>
+              <a:spcAft>
+                <a:spcPts val="2000"/>
+              </a:spcAft>
+              <a:defRPr sz="2000" i="1">
+                <a:solidFill>
+                  <a:srgbClr val="3D424E"/>
+                </a:solidFill>
+              </a:defRPr>
+            </a:pPr>
+            <a:r>
+              <a:t>A LLM me poupou tempo em bibliotecas de referência, formatação de fichas e revisão de coerência entre capítulos. Mas cada afirmação central da tese — a pergunta de pesquisa, a escolha do backbone, o mecanismo FiLM, o ajuste ético do OE-1, o argumento de heterogeneidade intra-Latinx — nasceu de leitura minha e de conversas nesta sala. A transposição para o Overleaf é manual, linha a linha, exatamente para forçar essa apropriação.</a:t>
+            </a:r>
+          </a:p>
+          <a:p>
+            <a:pPr>
+              <a:defRPr sz="1400">
+                <a:solidFill>
+                  <a:srgbClr val="707682"/>
+                </a:solidFill>
+              </a:defRPr>
+            </a:pPr>
+            <a:r>
+              <a:t>— posição que vou defender se questionado na banca</a:t>
+            </a:r>
+          </a:p>
+        </p:txBody>
+      </p:sp>
+      <p:sp>
+        <p:nvSpPr>
+          <p:cNvPr id="6" name="TextBox 5"/>
+          <p:cNvSpPr txBox="1"/>
+          <p:nvPr/>
+        </p:nvSpPr>
+        <p:spPr>
+          <a:xfrm>
+            <a:off x="457200" y="6446520"/>
+            <a:ext cx="11430000" cy="365760"/>
+          </a:xfrm>
+          <a:prstGeom prst="rect">
+            <a:avLst/>
+          </a:prstGeom>
+          <a:noFill/>
+        </p:spPr>
+        <p:txBody>
+          <a:bodyPr wrap="none">
+            <a:spAutoFit/>
+          </a:bodyPr>
+          <a:lstStyle/>
+          <a:p>
+            <a:pPr>
+              <a:defRPr sz="1000" i="1">
+                <a:solidFill>
+                  <a:srgbClr val="707682"/>
+                </a:solidFill>
+              </a:defRPr>
+            </a:pPr>
+            <a:r>
+              <a:t>Preferi trazer isso já, para o senhor calibrar comigo o quanto explicitar em texto vs quanto só demonstrar em resposta.</a:t>
+            </a:r>
+          </a:p>
+        </p:txBody>
+      </p:sp>
+    </p:spTree>
+  </p:cSld>
+  <p:clrMapOvr>
+    <a:masterClrMapping/>
+  </p:clrMapOvr>
+</p:sld>
+</file>
+
+<file path=ppt/slides/slide16.xml><?xml version="1.0" encoding="utf-8"?>
 <p:sld xmlns:a="http://schemas.openxmlformats.org/drawingml/2006/main" xmlns:p="http://schemas.openxmlformats.org/presentationml/2006/main" xmlns:r="http://schemas.openxmlformats.org/officeDocument/2006/relationships">
   <p:cSld>
     <p:spTree>
@@ -4464,7 +5644,7 @@
               </a:defRPr>
             </a:pPr>
             <a:r>
-              <a:t>4</a:t>
+              <a:t>3</a:t>
             </a:r>
           </a:p>
         </p:txBody>
@@ -4499,7 +5679,7 @@
               </a:defRPr>
             </a:pPr>
             <a:r>
-              <a:t>Solicitação pessoal — extensão de 2 meses</a:t>
+              <a:t>Decisão ética que tomei sozinho</a:t>
             </a:r>
           </a:p>
           <a:p>
@@ -4511,7 +5691,7 @@
               </a:defRPr>
             </a:pPr>
             <a:r>
-              <a:t>Cuidado parental e reprogramação do prazo da defesa</a:t>
+              <a:t>Preciso validar o enquadramento no Art. 8º</a:t>
             </a:r>
           </a:p>
         </p:txBody>
@@ -4524,7 +5704,7 @@
 </p:sld>
 </file>
 
-<file path=ppt/slides/slide14.xml><?xml version="1.0" encoding="utf-8"?>
+<file path=ppt/slides/slide17.xml><?xml version="1.0" encoding="utf-8"?>
 <p:sld xmlns:a="http://schemas.openxmlformats.org/drawingml/2006/main" xmlns:p="http://schemas.openxmlformats.org/presentationml/2006/main" xmlns:r="http://schemas.openxmlformats.org/officeDocument/2006/relationships">
   <p:cSld>
     <p:spTree>
@@ -4564,7 +5744,7 @@
               </a:defRPr>
             </a:pPr>
             <a:r>
-              <a:t>Solicitação formal de extensão</a:t>
+              <a:t>O contexto</a:t>
             </a:r>
           </a:p>
         </p:txBody>
@@ -4645,7 +5825,7 @@
                   <a:srgbClr val="1F2A4E"/>
                 </a:solidFill>
               </a:rPr>
-              <a:t>Motivo:  </a:t>
+              <a:t>O que investiguei:  </a:t>
             </a:r>
             <a:r>
               <a:rPr sz="1600">
@@ -4653,7 +5833,7 @@
                   <a:srgbClr val="3D424E"/>
                 </a:solidFill>
               </a:rPr>
-              <a:t>nascimento de minha filha em 28/março/2026</a:t>
+              <a:t>Resolução 200/2021 do Conselho Universitário — dispõe sobre projetos que devem passar pelo CEP</a:t>
             </a:r>
           </a:p>
           <a:p>
@@ -4676,7 +5856,7 @@
                   <a:srgbClr val="3D424E"/>
                 </a:solidFill>
               </a:rPr>
-              <a:t>Período de afastamento das atividades acadêmicas nas semanas subsequentes para cuidado parental</a:t>
+              <a:t/>
             </a:r>
           </a:p>
           <a:p>
@@ -4691,7 +5871,7 @@
                   <a:srgbClr val="1F2A4E"/>
                 </a:solidFill>
               </a:rPr>
-              <a:t>  </a:t>
+              <a:t>Por que fui atrás disso:  </a:t>
             </a:r>
             <a:r>
               <a:rPr sz="1600">
@@ -4699,7 +5879,7 @@
                   <a:srgbClr val="3D424E"/>
                 </a:solidFill>
               </a:rPr>
-              <a:t/>
+              <a:t>no OE-1 original eu previa validar a classificação MST em ~700 imagens usando três anotadores externos via Prolific. Isso é crowdsourcing pago — margem cinzenta.</a:t>
             </a:r>
           </a:p>
           <a:p>
@@ -4714,7 +5894,7 @@
                   <a:srgbClr val="1F2A4E"/>
                 </a:solidFill>
               </a:rPr>
-              <a:t>Solicitação:  </a:t>
+              <a:t>  </a:t>
             </a:r>
             <a:r>
               <a:rPr sz="1600">
@@ -4722,7 +5902,7 @@
                   <a:srgbClr val="3D424E"/>
                 </a:solidFill>
               </a:rPr>
-              <a:t>extensão de 2 meses no prazo da defesa da qualificação</a:t>
+              <a:t/>
             </a:r>
           </a:p>
           <a:p>
@@ -4737,7 +5917,7 @@
                   <a:srgbClr val="1F2A4E"/>
                 </a:solidFill>
               </a:rPr>
-              <a:t>Prazo anterior:  </a:t>
+              <a:t>O que a resolução diz:  </a:t>
             </a:r>
             <a:r>
               <a:rPr sz="1600">
@@ -4745,7 +5925,7 @@
                   <a:srgbClr val="3D424E"/>
                 </a:solidFill>
               </a:rPr>
-              <a:t>agosto/2026</a:t>
+              <a:t>Art. 1º — todo projeto que envolve seres humanos direta ou indiretamente precisa passar pelo CEP antes de começar. Não pode retroagir.</a:t>
             </a:r>
           </a:p>
           <a:p>
@@ -4760,7 +5940,7 @@
                   <a:srgbClr val="1F2A4E"/>
                 </a:solidFill>
               </a:rPr>
-              <a:t>Prazo solicitado:  </a:t>
+              <a:t>Art. 8º:  </a:t>
             </a:r>
             <a:r>
               <a:rPr sz="1600">
@@ -4768,76 +5948,7 @@
                   <a:srgbClr val="3D424E"/>
                 </a:solidFill>
               </a:rPr>
-              <a:t>outubro/2026</a:t>
-            </a:r>
-          </a:p>
-          <a:p>
-            <a:pPr>
-              <a:spcAft>
-                <a:spcPts val="800"/>
-              </a:spcAft>
-            </a:pPr>
-            <a:r>
-              <a:rPr sz="1600" b="1">
-                <a:solidFill>
-                  <a:srgbClr val="1F2A4E"/>
-                </a:solidFill>
-              </a:rPr>
-              <a:t>  </a:t>
-            </a:r>
-            <a:r>
-              <a:rPr sz="1600">
-                <a:solidFill>
-                  <a:srgbClr val="3D424E"/>
-                </a:solidFill>
-              </a:rPr>
-              <a:t/>
-            </a:r>
-          </a:p>
-          <a:p>
-            <a:pPr>
-              <a:spcAft>
-                <a:spcPts val="800"/>
-              </a:spcAft>
-            </a:pPr>
-            <a:r>
-              <a:rPr sz="1600" b="1">
-                <a:solidFill>
-                  <a:srgbClr val="1F2A4E"/>
-                </a:solidFill>
-              </a:rPr>
-              <a:t>Marcos preservados:  </a:t>
-            </a:r>
-            <a:r>
-              <a:rPr sz="1600">
-                <a:solidFill>
-                  <a:srgbClr val="3D424E"/>
-                </a:solidFill>
-              </a:rPr>
-              <a:t>1ª revisão em 15/jul e pedido formal em 30/jul mantidos — a extensão afeta apenas o prazo final</a:t>
-            </a:r>
-          </a:p>
-          <a:p>
-            <a:pPr>
-              <a:spcAft>
-                <a:spcPts val="800"/>
-              </a:spcAft>
-            </a:pPr>
-            <a:r>
-              <a:rPr sz="1600" b="1">
-                <a:solidFill>
-                  <a:srgbClr val="1F2A4E"/>
-                </a:solidFill>
-              </a:rPr>
-              <a:t>Documento:  </a:t>
-            </a:r>
-            <a:r>
-              <a:rPr sz="1600">
-                <a:solidFill>
-                  <a:srgbClr val="3D424E"/>
-                </a:solidFill>
-              </a:rPr>
-              <a:t>carta formal em 2 parágrafos redigida, pronta para envio via SEI ou conforme trâmite indicado</a:t>
+              <a:t>pesquisas que não envolvem seres humanos ficam dispensadas do cadastro, mas exigem Declaração de Responsabilidade assinada por estudante, orientador e chefe de departamento.</a:t>
             </a:r>
           </a:p>
         </p:txBody>
@@ -4850,7 +5961,1179 @@
 </p:sld>
 </file>
 
-<file path=ppt/slides/slide15.xml><?xml version="1.0" encoding="utf-8"?>
+<file path=ppt/slides/slide18.xml><?xml version="1.0" encoding="utf-8"?>
+<p:sld xmlns:a="http://schemas.openxmlformats.org/drawingml/2006/main" xmlns:p="http://schemas.openxmlformats.org/presentationml/2006/main" xmlns:r="http://schemas.openxmlformats.org/officeDocument/2006/relationships">
+  <p:cSld>
+    <p:spTree>
+      <p:nvGrpSpPr>
+        <p:cNvPr id="1" name=""/>
+        <p:cNvGrpSpPr/>
+        <p:nvPr/>
+      </p:nvGrpSpPr>
+      <p:grpSpPr/>
+      <p:sp>
+        <p:nvSpPr>
+          <p:cNvPr id="2" name="TextBox 1"/>
+          <p:cNvSpPr txBox="1"/>
+          <p:nvPr/>
+        </p:nvSpPr>
+        <p:spPr>
+          <a:xfrm>
+            <a:off x="457200" y="365760"/>
+            <a:ext cx="11430000" cy="822960"/>
+          </a:xfrm>
+          <a:prstGeom prst="rect">
+            <a:avLst/>
+          </a:prstGeom>
+          <a:noFill/>
+        </p:spPr>
+        <p:txBody>
+          <a:bodyPr wrap="square">
+            <a:spAutoFit/>
+          </a:bodyPr>
+          <a:lstStyle/>
+          <a:p>
+            <a:pPr>
+              <a:defRPr sz="2600" b="1">
+                <a:solidFill>
+                  <a:srgbClr val="1F2A4E"/>
+                </a:solidFill>
+              </a:defRPr>
+            </a:pPr>
+            <a:r>
+              <a:t>O trade-off que enfrentei</a:t>
+            </a:r>
+          </a:p>
+        </p:txBody>
+      </p:sp>
+      <p:sp>
+        <p:nvSpPr>
+          <p:cNvPr id="3" name="Rectangle 2"/>
+          <p:cNvSpPr/>
+          <p:nvPr/>
+        </p:nvSpPr>
+        <p:spPr>
+          <a:xfrm>
+            <a:off x="457200" y="1143000"/>
+            <a:ext cx="11430000" cy="36576"/>
+          </a:xfrm>
+          <a:prstGeom prst="rect">
+            <a:avLst/>
+          </a:prstGeom>
+          <a:solidFill>
+            <a:srgbClr val="1F2A4E"/>
+          </a:solidFill>
+          <a:ln>
+            <a:noFill/>
+          </a:ln>
+        </p:spPr>
+        <p:style>
+          <a:lnRef idx="1">
+            <a:schemeClr val="accent1"/>
+          </a:lnRef>
+          <a:fillRef idx="3">
+            <a:schemeClr val="accent1"/>
+          </a:fillRef>
+          <a:effectRef idx="2">
+            <a:schemeClr val="accent1"/>
+          </a:effectRef>
+          <a:fontRef idx="minor">
+            <a:schemeClr val="lt1"/>
+          </a:fontRef>
+        </p:style>
+        <p:txBody>
+          <a:bodyPr rtlCol="0" anchor="ctr"/>
+          <a:lstStyle/>
+          <a:p>
+            <a:pPr algn="ctr"/>
+          </a:p>
+        </p:txBody>
+      </p:sp>
+      <p:sp>
+        <p:nvSpPr>
+          <p:cNvPr id="4" name="TextBox 3"/>
+          <p:cNvSpPr txBox="1"/>
+          <p:nvPr/>
+        </p:nvSpPr>
+        <p:spPr>
+          <a:xfrm>
+            <a:off x="457200" y="1371600"/>
+            <a:ext cx="11430000" cy="4937760"/>
+          </a:xfrm>
+          <a:prstGeom prst="rect">
+            <a:avLst/>
+          </a:prstGeom>
+          <a:noFill/>
+        </p:spPr>
+        <p:txBody>
+          <a:bodyPr wrap="square">
+            <a:spAutoFit/>
+          </a:bodyPr>
+          <a:lstStyle/>
+          <a:p>
+            <a:pPr>
+              <a:spcAft>
+                <a:spcPts val="800"/>
+              </a:spcAft>
+            </a:pPr>
+            <a:r>
+              <a:rPr sz="1600" b="1">
+                <a:solidFill>
+                  <a:srgbClr val="1F2A4E"/>
+                </a:solidFill>
+              </a:rPr>
+              <a:t>Opção A — manter Prolific:  </a:t>
+            </a:r>
+            <a:r>
+              <a:rPr sz="1600">
+                <a:solidFill>
+                  <a:srgbClr val="3D424E"/>
+                </a:solidFill>
+              </a:rPr>
+              <a:t>amostra maior (700 × 3 = 2.100 anotações), diversidade de anotadores, mas exige submissão ao CEP com prazo estimado de 2-3 meses</a:t>
+            </a:r>
+          </a:p>
+          <a:p>
+            <a:pPr>
+              <a:spcAft>
+                <a:spcPts val="800"/>
+              </a:spcAft>
+            </a:pPr>
+            <a:r>
+              <a:rPr sz="1600" b="1">
+                <a:solidFill>
+                  <a:srgbClr val="1F2A4E"/>
+                </a:solidFill>
+              </a:rPr>
+              <a:t>Opção B — abandonar validação humana:  </a:t>
+            </a:r>
+            <a:r>
+              <a:rPr sz="1600">
+                <a:solidFill>
+                  <a:srgbClr val="3D424E"/>
+                </a:solidFill>
+              </a:rPr>
+              <a:t>confiaria só no SkinToneNet (Pereira 2026), mas isso vira ponto único de falha — foi exatamente a crítica do NotebookLM</a:t>
+            </a:r>
+          </a:p>
+          <a:p>
+            <a:pPr>
+              <a:spcAft>
+                <a:spcPts val="800"/>
+              </a:spcAft>
+            </a:pPr>
+            <a:r>
+              <a:rPr sz="1600" b="1">
+                <a:solidFill>
+                  <a:srgbClr val="1F2A4E"/>
+                </a:solidFill>
+              </a:rPr>
+              <a:t>Opção C — validação interna reduzida:  </a:t>
+            </a:r>
+            <a:r>
+              <a:rPr sz="1600">
+                <a:solidFill>
+                  <a:srgbClr val="3D424E"/>
+                </a:solidFill>
+              </a:rPr>
+              <a:t>eu + o senhor anotamos ~200-300 imagens estratificadas por raça e MST. Menor escala, mas suficiente estatisticamente para inter-annotator agreement + concordância com SkinToneNet</a:t>
+            </a:r>
+          </a:p>
+          <a:p>
+            <a:pPr>
+              <a:spcAft>
+                <a:spcPts val="800"/>
+              </a:spcAft>
+            </a:pPr>
+            <a:r>
+              <a:rPr sz="1600" b="1">
+                <a:solidFill>
+                  <a:srgbClr val="1F2A4E"/>
+                </a:solidFill>
+              </a:rPr>
+              <a:t>  </a:t>
+            </a:r>
+            <a:r>
+              <a:rPr sz="1600">
+                <a:solidFill>
+                  <a:srgbClr val="3D424E"/>
+                </a:solidFill>
+              </a:rPr>
+              <a:t/>
+            </a:r>
+          </a:p>
+          <a:p>
+            <a:pPr>
+              <a:spcAft>
+                <a:spcPts val="800"/>
+              </a:spcAft>
+            </a:pPr>
+            <a:r>
+              <a:rPr sz="1600" b="1">
+                <a:solidFill>
+                  <a:srgbClr val="1F2A4E"/>
+                </a:solidFill>
+              </a:rPr>
+              <a:t>Decisão que tomei:  </a:t>
+            </a:r>
+            <a:r>
+              <a:rPr sz="1600">
+                <a:solidFill>
+                  <a:srgbClr val="3D424E"/>
+                </a:solidFill>
+              </a:rPr>
+              <a:t>Opção C — preserva rigor metodológico via estratificação, elimina risco regulatório, não bloqueia o cronograma</a:t>
+            </a:r>
+          </a:p>
+          <a:p>
+            <a:pPr>
+              <a:spcAft>
+                <a:spcPts val="800"/>
+              </a:spcAft>
+            </a:pPr>
+            <a:r>
+              <a:rPr sz="1600" b="1">
+                <a:solidFill>
+                  <a:srgbClr val="1F2A4E"/>
+                </a:solidFill>
+              </a:rPr>
+              <a:t>  </a:t>
+            </a:r>
+            <a:r>
+              <a:rPr sz="1600">
+                <a:solidFill>
+                  <a:srgbClr val="3D424E"/>
+                </a:solidFill>
+              </a:rPr>
+              <a:t/>
+            </a:r>
+          </a:p>
+          <a:p>
+            <a:pPr>
+              <a:spcAft>
+                <a:spcPts val="800"/>
+              </a:spcAft>
+            </a:pPr>
+            <a:r>
+              <a:rPr sz="1600" b="1">
+                <a:solidFill>
+                  <a:srgbClr val="1F2A4E"/>
+                </a:solidFill>
+              </a:rPr>
+              <a:t>O que preciso do senhor hoje:  </a:t>
+            </a:r>
+            <a:r>
+              <a:rPr sz="1600">
+                <a:solidFill>
+                  <a:srgbClr val="3D424E"/>
+                </a:solidFill>
+              </a:rPr>
+              <a:t>1) validar a decisão; 2) me dizer quem é o chefe do departamento que assina a Declaração</a:t>
+            </a:r>
+          </a:p>
+        </p:txBody>
+      </p:sp>
+      <p:sp>
+        <p:nvSpPr>
+          <p:cNvPr id="5" name="TextBox 4"/>
+          <p:cNvSpPr txBox="1"/>
+          <p:nvPr/>
+        </p:nvSpPr>
+        <p:spPr>
+          <a:xfrm>
+            <a:off x="457200" y="6446520"/>
+            <a:ext cx="11430000" cy="365760"/>
+          </a:xfrm>
+          <a:prstGeom prst="rect">
+            <a:avLst/>
+          </a:prstGeom>
+          <a:noFill/>
+        </p:spPr>
+        <p:txBody>
+          <a:bodyPr wrap="none">
+            <a:spAutoFit/>
+          </a:bodyPr>
+          <a:lstStyle/>
+          <a:p>
+            <a:pPr>
+              <a:defRPr sz="1000" i="1">
+                <a:solidFill>
+                  <a:srgbClr val="707682"/>
+                </a:solidFill>
+              </a:defRPr>
+            </a:pPr>
+            <a:r>
+              <a:t>Se preferir voltar para Prolific, eu topo — mas aí a defesa em outubro fica em risco por causa do prazo CEP.</a:t>
+            </a:r>
+          </a:p>
+        </p:txBody>
+      </p:sp>
+    </p:spTree>
+  </p:cSld>
+  <p:clrMapOvr>
+    <a:masterClrMapping/>
+  </p:clrMapOvr>
+</p:sld>
+</file>
+
+<file path=ppt/slides/slide19.xml><?xml version="1.0" encoding="utf-8"?>
+<p:sld xmlns:a="http://schemas.openxmlformats.org/drawingml/2006/main" xmlns:p="http://schemas.openxmlformats.org/presentationml/2006/main" xmlns:r="http://schemas.openxmlformats.org/officeDocument/2006/relationships">
+  <p:cSld>
+    <p:spTree>
+      <p:nvGrpSpPr>
+        <p:cNvPr id="1" name=""/>
+        <p:cNvGrpSpPr/>
+        <p:nvPr/>
+      </p:nvGrpSpPr>
+      <p:grpSpPr/>
+      <p:sp>
+        <p:nvSpPr>
+          <p:cNvPr id="2" name="TextBox 1"/>
+          <p:cNvSpPr txBox="1"/>
+          <p:nvPr/>
+        </p:nvSpPr>
+        <p:spPr>
+          <a:xfrm>
+            <a:off x="457200" y="365760"/>
+            <a:ext cx="11430000" cy="822960"/>
+          </a:xfrm>
+          <a:prstGeom prst="rect">
+            <a:avLst/>
+          </a:prstGeom>
+          <a:noFill/>
+        </p:spPr>
+        <p:txBody>
+          <a:bodyPr wrap="square">
+            <a:spAutoFit/>
+          </a:bodyPr>
+          <a:lstStyle/>
+          <a:p>
+            <a:pPr>
+              <a:defRPr sz="2600" b="1">
+                <a:solidFill>
+                  <a:srgbClr val="1F2A4E"/>
+                </a:solidFill>
+              </a:defRPr>
+            </a:pPr>
+            <a:r>
+              <a:t>O que muda tecnicamente entre v3.5 e v3.6 do OE-1</a:t>
+            </a:r>
+          </a:p>
+        </p:txBody>
+      </p:sp>
+      <p:sp>
+        <p:nvSpPr>
+          <p:cNvPr id="3" name="Rectangle 2"/>
+          <p:cNvSpPr/>
+          <p:nvPr/>
+        </p:nvSpPr>
+        <p:spPr>
+          <a:xfrm>
+            <a:off x="457200" y="1143000"/>
+            <a:ext cx="11430000" cy="36576"/>
+          </a:xfrm>
+          <a:prstGeom prst="rect">
+            <a:avLst/>
+          </a:prstGeom>
+          <a:solidFill>
+            <a:srgbClr val="1F2A4E"/>
+          </a:solidFill>
+          <a:ln>
+            <a:noFill/>
+          </a:ln>
+        </p:spPr>
+        <p:style>
+          <a:lnRef idx="1">
+            <a:schemeClr val="accent1"/>
+          </a:lnRef>
+          <a:fillRef idx="3">
+            <a:schemeClr val="accent1"/>
+          </a:fillRef>
+          <a:effectRef idx="2">
+            <a:schemeClr val="accent1"/>
+          </a:effectRef>
+          <a:fontRef idx="minor">
+            <a:schemeClr val="lt1"/>
+          </a:fontRef>
+        </p:style>
+        <p:txBody>
+          <a:bodyPr rtlCol="0" anchor="ctr"/>
+          <a:lstStyle/>
+          <a:p>
+            <a:pPr algn="ctr"/>
+          </a:p>
+        </p:txBody>
+      </p:sp>
+      <p:graphicFrame>
+        <p:nvGraphicFramePr>
+          <p:cNvPr id="4" name="Table 3"/>
+          <p:cNvGraphicFramePr>
+            <a:graphicFrameLocks noGrp="1"/>
+          </p:cNvGraphicFramePr>
+          <p:nvPr/>
+        </p:nvGraphicFramePr>
+        <p:xfrm>
+          <a:off x="457200" y="1371600"/>
+          <a:ext cx="11430000" cy="4754880"/>
+        </p:xfrm>
+        <a:graphic>
+          <a:graphicData uri="http://schemas.openxmlformats.org/drawingml/2006/table">
+            <a:tbl>
+              <a:tblPr firstRow="1" bandRow="1">
+                <a:tableStyleId>{5C22544A-7EE6-4342-B048-85BDC9FD1C3A}</a:tableStyleId>
+              </a:tblPr>
+              <a:tblGrid>
+                <a:gridCol w="2743200"/>
+                <a:gridCol w="4114800"/>
+                <a:gridCol w="4572000"/>
+              </a:tblGrid>
+              <a:tr h="679268">
+                <a:tc>
+                  <a:txBody>
+                    <a:bodyPr/>
+                    <a:lstStyle/>
+                    <a:p>
+                      <a:r>
+                        <a:rPr sz="1300" b="1">
+                          <a:solidFill>
+                            <a:srgbClr val="FFFFFF"/>
+                          </a:solidFill>
+                        </a:rPr>
+                        <a:t>Aspecto</a:t>
+                      </a:r>
+                    </a:p>
+                  </a:txBody>
+                  <a:tcPr>
+                    <a:solidFill>
+                      <a:srgbClr val="1F2A4E"/>
+                    </a:solidFill>
+                  </a:tcPr>
+                </a:tc>
+                <a:tc>
+                  <a:txBody>
+                    <a:bodyPr/>
+                    <a:lstStyle/>
+                    <a:p>
+                      <a:r>
+                        <a:rPr sz="1300" b="1">
+                          <a:solidFill>
+                            <a:srgbClr val="FFFFFF"/>
+                          </a:solidFill>
+                        </a:rPr>
+                        <a:t>v3.5 (com Prolific)</a:t>
+                      </a:r>
+                    </a:p>
+                  </a:txBody>
+                  <a:tcPr>
+                    <a:solidFill>
+                      <a:srgbClr val="1F2A4E"/>
+                    </a:solidFill>
+                  </a:tcPr>
+                </a:tc>
+                <a:tc>
+                  <a:txBody>
+                    <a:bodyPr/>
+                    <a:lstStyle/>
+                    <a:p>
+                      <a:r>
+                        <a:rPr sz="1300" b="1">
+                          <a:solidFill>
+                            <a:srgbClr val="FFFFFF"/>
+                          </a:solidFill>
+                        </a:rPr>
+                        <a:t>v3.6 (interno)</a:t>
+                      </a:r>
+                    </a:p>
+                  </a:txBody>
+                  <a:tcPr>
+                    <a:solidFill>
+                      <a:srgbClr val="1F2A4E"/>
+                    </a:solidFill>
+                  </a:tcPr>
+                </a:tc>
+              </a:tr>
+              <a:tr h="679268">
+                <a:tc>
+                  <a:txBody>
+                    <a:bodyPr/>
+                    <a:lstStyle/>
+                    <a:p>
+                      <a:r>
+                        <a:rPr sz="1100">
+                          <a:solidFill>
+                            <a:srgbClr val="3D424E"/>
+                          </a:solidFill>
+                        </a:rPr>
+                        <a:t>Escala da validação</a:t>
+                      </a:r>
+                    </a:p>
+                  </a:txBody>
+                  <a:tcPr/>
+                </a:tc>
+                <a:tc>
+                  <a:txBody>
+                    <a:bodyPr/>
+                    <a:lstStyle/>
+                    <a:p>
+                      <a:r>
+                        <a:rPr sz="1100">
+                          <a:solidFill>
+                            <a:srgbClr val="3D424E"/>
+                          </a:solidFill>
+                        </a:rPr>
+                        <a:t>~700 imagens × 3 anotadores externos</a:t>
+                      </a:r>
+                    </a:p>
+                  </a:txBody>
+                  <a:tcPr/>
+                </a:tc>
+                <a:tc>
+                  <a:txBody>
+                    <a:bodyPr/>
+                    <a:lstStyle/>
+                    <a:p>
+                      <a:r>
+                        <a:rPr sz="1100">
+                          <a:solidFill>
+                            <a:srgbClr val="3D424E"/>
+                          </a:solidFill>
+                        </a:rPr>
+                        <a:t>~200-300 imagens × 2-3 anotadores internos</a:t>
+                      </a:r>
+                    </a:p>
+                  </a:txBody>
+                  <a:tcPr/>
+                </a:tc>
+              </a:tr>
+              <a:tr h="679268">
+                <a:tc>
+                  <a:txBody>
+                    <a:bodyPr/>
+                    <a:lstStyle/>
+                    <a:p>
+                      <a:r>
+                        <a:rPr sz="1100">
+                          <a:solidFill>
+                            <a:srgbClr val="3D424E"/>
+                          </a:solidFill>
+                        </a:rPr>
+                        <a:t>Diversidade dos anotadores</a:t>
+                      </a:r>
+                    </a:p>
+                  </a:txBody>
+                  <a:tcPr/>
+                </a:tc>
+                <a:tc>
+                  <a:txBody>
+                    <a:bodyPr/>
+                    <a:lstStyle/>
+                    <a:p>
+                      <a:r>
+                        <a:rPr sz="1100">
+                          <a:solidFill>
+                            <a:srgbClr val="3D424E"/>
+                          </a:solidFill>
+                        </a:rPr>
+                        <a:t>Crowdworkers com perfil variado</a:t>
+                      </a:r>
+                    </a:p>
+                  </a:txBody>
+                  <a:tcPr/>
+                </a:tc>
+                <a:tc>
+                  <a:txBody>
+                    <a:bodyPr/>
+                    <a:lstStyle/>
+                    <a:p>
+                      <a:r>
+                        <a:rPr sz="1100">
+                          <a:solidFill>
+                            <a:srgbClr val="3D424E"/>
+                          </a:solidFill>
+                        </a:rPr>
+                        <a:t>Mestrando + orientador (potencial viés declarado)</a:t>
+                      </a:r>
+                    </a:p>
+                  </a:txBody>
+                  <a:tcPr/>
+                </a:tc>
+              </a:tr>
+              <a:tr h="679268">
+                <a:tc>
+                  <a:txBody>
+                    <a:bodyPr/>
+                    <a:lstStyle/>
+                    <a:p>
+                      <a:r>
+                        <a:rPr sz="1100">
+                          <a:solidFill>
+                            <a:srgbClr val="3D424E"/>
+                          </a:solidFill>
+                        </a:rPr>
+                        <a:t>Métrica de concordância</a:t>
+                      </a:r>
+                    </a:p>
+                  </a:txBody>
+                  <a:tcPr/>
+                </a:tc>
+                <a:tc>
+                  <a:txBody>
+                    <a:bodyPr/>
+                    <a:lstStyle/>
+                    <a:p>
+                      <a:r>
+                        <a:rPr sz="1100">
+                          <a:solidFill>
+                            <a:srgbClr val="3D424E"/>
+                          </a:solidFill>
+                        </a:rPr>
+                        <a:t>Fleiss' kappa (múltiplos anotadores)</a:t>
+                      </a:r>
+                    </a:p>
+                  </a:txBody>
+                  <a:tcPr/>
+                </a:tc>
+                <a:tc>
+                  <a:txBody>
+                    <a:bodyPr/>
+                    <a:lstStyle/>
+                    <a:p>
+                      <a:r>
+                        <a:rPr sz="1100">
+                          <a:solidFill>
+                            <a:srgbClr val="3D424E"/>
+                          </a:solidFill>
+                        </a:rPr>
+                        <a:t>Cohen's kappa (par a par)</a:t>
+                      </a:r>
+                    </a:p>
+                  </a:txBody>
+                  <a:tcPr/>
+                </a:tc>
+              </a:tr>
+              <a:tr h="679268">
+                <a:tc>
+                  <a:txBody>
+                    <a:bodyPr/>
+                    <a:lstStyle/>
+                    <a:p>
+                      <a:r>
+                        <a:rPr sz="1100">
+                          <a:solidFill>
+                            <a:srgbClr val="3D424E"/>
+                          </a:solidFill>
+                        </a:rPr>
+                        <a:t>Poder estatístico</a:t>
+                      </a:r>
+                    </a:p>
+                  </a:txBody>
+                  <a:tcPr/>
+                </a:tc>
+                <a:tc>
+                  <a:txBody>
+                    <a:bodyPr/>
+                    <a:lstStyle/>
+                    <a:p>
+                      <a:r>
+                        <a:rPr sz="1100">
+                          <a:solidFill>
+                            <a:srgbClr val="3D424E"/>
+                          </a:solidFill>
+                        </a:rPr>
+                        <a:t>IC 95 % com margem menor</a:t>
+                      </a:r>
+                    </a:p>
+                  </a:txBody>
+                  <a:tcPr/>
+                </a:tc>
+                <a:tc>
+                  <a:txBody>
+                    <a:bodyPr/>
+                    <a:lstStyle/>
+                    <a:p>
+                      <a:r>
+                        <a:rPr sz="1100">
+                          <a:solidFill>
+                            <a:srgbClr val="3D424E"/>
+                          </a:solidFill>
+                        </a:rPr>
+                        <a:t>IC 95 % com margem maior — declarado como limitação</a:t>
+                      </a:r>
+                    </a:p>
+                  </a:txBody>
+                  <a:tcPr/>
+                </a:tc>
+              </a:tr>
+              <a:tr h="679268">
+                <a:tc>
+                  <a:txBody>
+                    <a:bodyPr/>
+                    <a:lstStyle/>
+                    <a:p>
+                      <a:r>
+                        <a:rPr sz="1100">
+                          <a:solidFill>
+                            <a:srgbClr val="3D424E"/>
+                          </a:solidFill>
+                        </a:rPr>
+                        <a:t>Risco regulatório</a:t>
+                      </a:r>
+                    </a:p>
+                  </a:txBody>
+                  <a:tcPr>
+                    <a:solidFill>
+                      <a:srgbClr val="E8EAED"/>
+                    </a:solidFill>
+                  </a:tcPr>
+                </a:tc>
+                <a:tc>
+                  <a:txBody>
+                    <a:bodyPr/>
+                    <a:lstStyle/>
+                    <a:p>
+                      <a:r>
+                        <a:rPr sz="1100">
+                          <a:solidFill>
+                            <a:srgbClr val="3D424E"/>
+                          </a:solidFill>
+                        </a:rPr>
+                        <a:t>Requer CEP (2-3 meses)</a:t>
+                      </a:r>
+                    </a:p>
+                  </a:txBody>
+                  <a:tcPr>
+                    <a:solidFill>
+                      <a:srgbClr val="E8EAED"/>
+                    </a:solidFill>
+                  </a:tcPr>
+                </a:tc>
+                <a:tc>
+                  <a:txBody>
+                    <a:bodyPr/>
+                    <a:lstStyle/>
+                    <a:p>
+                      <a:r>
+                        <a:rPr sz="1100">
+                          <a:solidFill>
+                            <a:srgbClr val="3D424E"/>
+                          </a:solidFill>
+                        </a:rPr>
+                        <a:t>Art. 8º — apenas Declaração</a:t>
+                      </a:r>
+                    </a:p>
+                  </a:txBody>
+                  <a:tcPr>
+                    <a:solidFill>
+                      <a:srgbClr val="E8EAED"/>
+                    </a:solidFill>
+                  </a:tcPr>
+                </a:tc>
+              </a:tr>
+              <a:tr h="679272">
+                <a:tc>
+                  <a:txBody>
+                    <a:bodyPr/>
+                    <a:lstStyle/>
+                    <a:p>
+                      <a:r>
+                        <a:rPr sz="1100">
+                          <a:solidFill>
+                            <a:srgbClr val="3D424E"/>
+                          </a:solidFill>
+                        </a:rPr>
+                        <a:t>Cronograma</a:t>
+                      </a:r>
+                    </a:p>
+                  </a:txBody>
+                  <a:tcPr>
+                    <a:solidFill>
+                      <a:srgbClr val="E8EAED"/>
+                    </a:solidFill>
+                  </a:tcPr>
+                </a:tc>
+                <a:tc>
+                  <a:txBody>
+                    <a:bodyPr/>
+                    <a:lstStyle/>
+                    <a:p>
+                      <a:r>
+                        <a:rPr sz="1100">
+                          <a:solidFill>
+                            <a:srgbClr val="3D424E"/>
+                          </a:solidFill>
+                        </a:rPr>
+                        <a:t>Bloqueia defesa em outubro</a:t>
+                      </a:r>
+                    </a:p>
+                  </a:txBody>
+                  <a:tcPr>
+                    <a:solidFill>
+                      <a:srgbClr val="E8EAED"/>
+                    </a:solidFill>
+                  </a:tcPr>
+                </a:tc>
+                <a:tc>
+                  <a:txBody>
+                    <a:bodyPr/>
+                    <a:lstStyle/>
+                    <a:p>
+                      <a:r>
+                        <a:rPr sz="1100">
+                          <a:solidFill>
+                            <a:srgbClr val="3D424E"/>
+                          </a:solidFill>
+                        </a:rPr>
+                        <a:t>Compatível com outubro</a:t>
+                      </a:r>
+                    </a:p>
+                  </a:txBody>
+                  <a:tcPr>
+                    <a:solidFill>
+                      <a:srgbClr val="E8EAED"/>
+                    </a:solidFill>
+                  </a:tcPr>
+                </a:tc>
+              </a:tr>
+            </a:tbl>
+          </a:graphicData>
+        </a:graphic>
+      </p:graphicFrame>
+      <p:sp>
+        <p:nvSpPr>
+          <p:cNvPr id="5" name="TextBox 4"/>
+          <p:cNvSpPr txBox="1"/>
+          <p:nvPr/>
+        </p:nvSpPr>
+        <p:spPr>
+          <a:xfrm>
+            <a:off x="457200" y="6446520"/>
+            <a:ext cx="11430000" cy="365760"/>
+          </a:xfrm>
+          <a:prstGeom prst="rect">
+            <a:avLst/>
+          </a:prstGeom>
+          <a:noFill/>
+        </p:spPr>
+        <p:txBody>
+          <a:bodyPr wrap="none">
+            <a:spAutoFit/>
+          </a:bodyPr>
+          <a:lstStyle/>
+          <a:p>
+            <a:pPr>
+              <a:defRPr sz="1000" i="1">
+                <a:solidFill>
+                  <a:srgbClr val="707682"/>
+                </a:solidFill>
+              </a:defRPr>
+            </a:pPr>
+            <a:r>
+              <a:t>A perda de escala é real. Vou declarar explicitamente como limitação metodológica no Cap 4.</a:t>
+            </a:r>
+          </a:p>
+        </p:txBody>
+      </p:sp>
+    </p:spTree>
+  </p:cSld>
+  <p:clrMapOvr>
+    <a:masterClrMapping/>
+  </p:clrMapOvr>
+</p:sld>
+</file>
+
+<file path=ppt/slides/slide2.xml><?xml version="1.0" encoding="utf-8"?>
+<p:sld xmlns:a="http://schemas.openxmlformats.org/drawingml/2006/main" xmlns:p="http://schemas.openxmlformats.org/presentationml/2006/main" xmlns:r="http://schemas.openxmlformats.org/officeDocument/2006/relationships">
+  <p:cSld>
+    <p:spTree>
+      <p:nvGrpSpPr>
+        <p:cNvPr id="1" name=""/>
+        <p:cNvGrpSpPr/>
+        <p:nvPr/>
+      </p:nvGrpSpPr>
+      <p:grpSpPr/>
+      <p:sp>
+        <p:nvSpPr>
+          <p:cNvPr id="2" name="TextBox 1"/>
+          <p:cNvSpPr txBox="1"/>
+          <p:nvPr/>
+        </p:nvSpPr>
+        <p:spPr>
+          <a:xfrm>
+            <a:off x="457200" y="365760"/>
+            <a:ext cx="11430000" cy="822960"/>
+          </a:xfrm>
+          <a:prstGeom prst="rect">
+            <a:avLst/>
+          </a:prstGeom>
+          <a:noFill/>
+        </p:spPr>
+        <p:txBody>
+          <a:bodyPr wrap="square">
+            <a:spAutoFit/>
+          </a:bodyPr>
+          <a:lstStyle/>
+          <a:p>
+            <a:pPr>
+              <a:defRPr sz="2600" b="1">
+                <a:solidFill>
+                  <a:srgbClr val="1F2A4E"/>
+                </a:solidFill>
+              </a:defRPr>
+            </a:pPr>
+            <a:r>
+              <a:t>Objetivo desta reunião</a:t>
+            </a:r>
+          </a:p>
+        </p:txBody>
+      </p:sp>
+      <p:sp>
+        <p:nvSpPr>
+          <p:cNvPr id="3" name="Rectangle 2"/>
+          <p:cNvSpPr/>
+          <p:nvPr/>
+        </p:nvSpPr>
+        <p:spPr>
+          <a:xfrm>
+            <a:off x="457200" y="1143000"/>
+            <a:ext cx="11430000" cy="36576"/>
+          </a:xfrm>
+          <a:prstGeom prst="rect">
+            <a:avLst/>
+          </a:prstGeom>
+          <a:solidFill>
+            <a:srgbClr val="1F2A4E"/>
+          </a:solidFill>
+          <a:ln>
+            <a:noFill/>
+          </a:ln>
+        </p:spPr>
+        <p:style>
+          <a:lnRef idx="1">
+            <a:schemeClr val="accent1"/>
+          </a:lnRef>
+          <a:fillRef idx="3">
+            <a:schemeClr val="accent1"/>
+          </a:fillRef>
+          <a:effectRef idx="2">
+            <a:schemeClr val="accent1"/>
+          </a:effectRef>
+          <a:fontRef idx="minor">
+            <a:schemeClr val="lt1"/>
+          </a:fontRef>
+        </p:style>
+        <p:txBody>
+          <a:bodyPr rtlCol="0" anchor="ctr"/>
+          <a:lstStyle/>
+          <a:p>
+            <a:pPr algn="ctr"/>
+          </a:p>
+        </p:txBody>
+      </p:sp>
+      <p:sp>
+        <p:nvSpPr>
+          <p:cNvPr id="4" name="TextBox 3"/>
+          <p:cNvSpPr txBox="1"/>
+          <p:nvPr/>
+        </p:nvSpPr>
+        <p:spPr>
+          <a:xfrm>
+            <a:off x="457200" y="1371600"/>
+            <a:ext cx="11430000" cy="4937760"/>
+          </a:xfrm>
+          <a:prstGeom prst="rect">
+            <a:avLst/>
+          </a:prstGeom>
+          <a:noFill/>
+        </p:spPr>
+        <p:txBody>
+          <a:bodyPr wrap="square">
+            <a:spAutoFit/>
+          </a:bodyPr>
+          <a:lstStyle/>
+          <a:p>
+            <a:pPr>
+              <a:spcAft>
+                <a:spcPts val="800"/>
+              </a:spcAft>
+            </a:pPr>
+            <a:r>
+              <a:rPr sz="1600" b="1">
+                <a:solidFill>
+                  <a:srgbClr val="1F2A4E"/>
+                </a:solidFill>
+              </a:rPr>
+              <a:t>  </a:t>
+            </a:r>
+            <a:r>
+              <a:rPr sz="1600">
+                <a:solidFill>
+                  <a:srgbClr val="3D424E"/>
+                </a:solidFill>
+              </a:rPr>
+              <a:t/>
+            </a:r>
+          </a:p>
+          <a:p>
+            <a:pPr>
+              <a:spcAft>
+                <a:spcPts val="800"/>
+              </a:spcAft>
+            </a:pPr>
+            <a:r>
+              <a:rPr sz="1600" b="1">
+                <a:solidFill>
+                  <a:srgbClr val="1F2A4E"/>
+                </a:solidFill>
+              </a:rPr>
+              <a:t>1.  </a:t>
+            </a:r>
+            <a:r>
+              <a:rPr sz="1600">
+                <a:solidFill>
+                  <a:srgbClr val="3D424E"/>
+                </a:solidFill>
+              </a:rPr>
+              <a:t>Plano até a defesa</a:t>
+            </a:r>
+          </a:p>
+          <a:p>
+            <a:pPr>
+              <a:spcAft>
+                <a:spcPts val="800"/>
+              </a:spcAft>
+            </a:pPr>
+            <a:r>
+              <a:rPr sz="1600" b="1">
+                <a:solidFill>
+                  <a:srgbClr val="1F2A4E"/>
+                </a:solidFill>
+              </a:rPr>
+              <a:t>  </a:t>
+            </a:r>
+            <a:r>
+              <a:rPr sz="1600">
+                <a:solidFill>
+                  <a:srgbClr val="3D424E"/>
+                </a:solidFill>
+              </a:rPr>
+              <a:t/>
+            </a:r>
+          </a:p>
+          <a:p>
+            <a:pPr>
+              <a:spcAft>
+                <a:spcPts val="800"/>
+              </a:spcAft>
+            </a:pPr>
+            <a:r>
+              <a:rPr sz="1600" b="1">
+                <a:solidFill>
+                  <a:srgbClr val="1F2A4E"/>
+                </a:solidFill>
+              </a:rPr>
+              <a:t>2.  </a:t>
+            </a:r>
+            <a:r>
+              <a:rPr sz="1600">
+                <a:solidFill>
+                  <a:srgbClr val="3D424E"/>
+                </a:solidFill>
+              </a:rPr>
+              <a:t>Estado real da escrita</a:t>
+            </a:r>
+          </a:p>
+          <a:p>
+            <a:pPr>
+              <a:spcAft>
+                <a:spcPts val="800"/>
+              </a:spcAft>
+            </a:pPr>
+            <a:r>
+              <a:rPr sz="1600" b="1">
+                <a:solidFill>
+                  <a:srgbClr val="1F2A4E"/>
+                </a:solidFill>
+              </a:rPr>
+              <a:t>  </a:t>
+            </a:r>
+            <a:r>
+              <a:rPr sz="1600">
+                <a:solidFill>
+                  <a:srgbClr val="3D424E"/>
+                </a:solidFill>
+              </a:rPr>
+              <a:t/>
+            </a:r>
+          </a:p>
+          <a:p>
+            <a:pPr>
+              <a:spcAft>
+                <a:spcPts val="800"/>
+              </a:spcAft>
+            </a:pPr>
+            <a:r>
+              <a:rPr sz="1600" b="1">
+                <a:solidFill>
+                  <a:srgbClr val="1F2A4E"/>
+                </a:solidFill>
+              </a:rPr>
+              <a:t>3.  </a:t>
+            </a:r>
+            <a:r>
+              <a:rPr sz="1600">
+                <a:solidFill>
+                  <a:srgbClr val="3D424E"/>
+                </a:solidFill>
+              </a:rPr>
+              <a:t>Decisão de pesquisa ética</a:t>
+            </a:r>
+          </a:p>
+        </p:txBody>
+      </p:sp>
+      <p:sp>
+        <p:nvSpPr>
+          <p:cNvPr id="5" name="TextBox 4"/>
+          <p:cNvSpPr txBox="1"/>
+          <p:nvPr/>
+        </p:nvSpPr>
+        <p:spPr>
+          <a:xfrm>
+            <a:off x="457200" y="6446520"/>
+            <a:ext cx="11430000" cy="365760"/>
+          </a:xfrm>
+          <a:prstGeom prst="rect">
+            <a:avLst/>
+          </a:prstGeom>
+          <a:noFill/>
+        </p:spPr>
+        <p:txBody>
+          <a:bodyPr wrap="none">
+            <a:spAutoFit/>
+          </a:bodyPr>
+          <a:lstStyle/>
+          <a:p>
+            <a:pPr>
+              <a:defRPr sz="1000" i="1">
+                <a:solidFill>
+                  <a:srgbClr val="707682"/>
+                </a:solidFill>
+              </a:defRPr>
+            </a:pPr>
+            <a:r>
+              <a:t>Solicitação pessoal e debate técnico fecham a reunião como pontos complementares.</a:t>
+            </a:r>
+          </a:p>
+        </p:txBody>
+      </p:sp>
+    </p:spTree>
+  </p:cSld>
+  <p:clrMapOvr>
+    <a:masterClrMapping/>
+  </p:clrMapOvr>
+</p:sld>
+</file>
+
+<file path=ppt/slides/slide20.xml><?xml version="1.0" encoding="utf-8"?>
 <p:sld xmlns:a="http://schemas.openxmlformats.org/drawingml/2006/main" xmlns:p="http://schemas.openxmlformats.org/presentationml/2006/main" xmlns:r="http://schemas.openxmlformats.org/officeDocument/2006/relationships">
   <p:cSld>
     <p:spTree>
@@ -4933,7 +7216,7 @@
               </a:defRPr>
             </a:pPr>
             <a:r>
-              <a:t>5</a:t>
+              <a:t>4</a:t>
             </a:r>
           </a:p>
         </p:txBody>
@@ -4968,7 +7251,7 @@
               </a:defRPr>
             </a:pPr>
             <a:r>
-              <a:t>Perguntas e próximos passos</a:t>
+              <a:t>Solicitação pessoal — extensão de dois meses</a:t>
             </a:r>
           </a:p>
           <a:p>
@@ -4980,7 +7263,7 @@
               </a:defRPr>
             </a:pPr>
             <a:r>
-              <a:t>Alinhamento objetivo — 6 perguntas + plano de 7 dias</a:t>
+              <a:t>Nascimento da minha filha em 28/março e afastamento subsequente</a:t>
             </a:r>
           </a:p>
         </p:txBody>
@@ -4993,7 +7276,7 @@
 </p:sld>
 </file>
 
-<file path=ppt/slides/slide16.xml><?xml version="1.0" encoding="utf-8"?>
+<file path=ppt/slides/slide21.xml><?xml version="1.0" encoding="utf-8"?>
 <p:sld xmlns:a="http://schemas.openxmlformats.org/drawingml/2006/main" xmlns:p="http://schemas.openxmlformats.org/presentationml/2006/main" xmlns:r="http://schemas.openxmlformats.org/officeDocument/2006/relationships">
   <p:cSld>
     <p:spTree>
@@ -5033,7 +7316,7 @@
               </a:defRPr>
             </a:pPr>
             <a:r>
-              <a:t>Perguntas objetivas ao orientador</a:t>
+              <a:t>O contexto e o que estou pedindo</a:t>
             </a:r>
           </a:p>
         </p:txBody>
@@ -5114,7 +7397,7 @@
                   <a:srgbClr val="1F2A4E"/>
                 </a:solidFill>
               </a:rPr>
-              <a:t>1.  </a:t>
+              <a:t>O que aconteceu:  </a:t>
             </a:r>
             <a:r>
               <a:rPr sz="1600">
@@ -5122,7 +7405,7 @@
                   <a:srgbClr val="3D424E"/>
                 </a:solidFill>
               </a:rPr>
-              <a:t>Estrutura dos capítulos apresentada está adequada? Sugestões?</a:t>
+              <a:t>minha filha nasceu em 28 de março. Fiquei afastado das atividades acadêmicas nas semanas seguintes para dar o cuidado que ela e a mãe precisaram.</a:t>
             </a:r>
           </a:p>
           <a:p>
@@ -5137,7 +7420,7 @@
                   <a:srgbClr val="1F2A4E"/>
                 </a:solidFill>
               </a:rPr>
-              <a:t>2.  </a:t>
+              <a:t>  </a:t>
             </a:r>
             <a:r>
               <a:rPr sz="1600">
@@ -5145,7 +7428,7 @@
                   <a:srgbClr val="3D424E"/>
                 </a:solidFill>
               </a:rPr>
-              <a:t>Chefe do Departamento — quem assina a Declaração de Responsabilidade do CEP?</a:t>
+              <a:t/>
             </a:r>
           </a:p>
           <a:p>
@@ -5160,7 +7443,7 @@
                   <a:srgbClr val="1F2A4E"/>
                 </a:solidFill>
               </a:rPr>
-              <a:t>3.  </a:t>
+              <a:t>O que preservei:  </a:t>
             </a:r>
             <a:r>
               <a:rPr sz="1600">
@@ -5168,7 +7451,7 @@
                   <a:srgbClr val="3D424E"/>
                 </a:solidFill>
               </a:rPr>
-              <a:t>Trâmite formal da extensão de 2 meses — carta, requerimento SEI, processo?</a:t>
+              <a:t>os marcos de 15/jul e 30/jul continuam de pé. Não estou pedindo prazo para a primeira revisão nem para o pedido formal.</a:t>
             </a:r>
           </a:p>
           <a:p>
@@ -5183,7 +7466,7 @@
                   <a:srgbClr val="1F2A4E"/>
                 </a:solidFill>
               </a:rPr>
-              <a:t>4.  </a:t>
+              <a:t>  </a:t>
             </a:r>
             <a:r>
               <a:rPr sz="1600">
@@ -5191,7 +7474,7 @@
                   <a:srgbClr val="3D424E"/>
                 </a:solidFill>
               </a:rPr>
-              <a:t>Template Overleaf institucional Unifesp / ICT ou padrão ABNT genérico?</a:t>
+              <a:t/>
             </a:r>
           </a:p>
           <a:p>
@@ -5206,7 +7489,7 @@
                   <a:srgbClr val="1F2A4E"/>
                 </a:solidFill>
               </a:rPr>
-              <a:t>5.  </a:t>
+              <a:t>O que estou pedindo:  </a:t>
             </a:r>
             <a:r>
               <a:rPr sz="1600">
@@ -5214,7 +7497,7 @@
                   <a:srgbClr val="3D424E"/>
                 </a:solidFill>
               </a:rPr>
-              <a:t>Co-orientador — alguma definição?</a:t>
+              <a:t>extensão de dois meses no prazo da defesa da qualificação — de agosto para outubro. Isso me dá margem para escrever a versão final com o rigor que o trabalho merece.</a:t>
             </a:r>
           </a:p>
           <a:p>
@@ -5229,7 +7512,7 @@
                   <a:srgbClr val="1F2A4E"/>
                 </a:solidFill>
               </a:rPr>
-              <a:t>6.  </a:t>
+              <a:t>  </a:t>
             </a:r>
             <a:r>
               <a:rPr sz="1600">
@@ -5237,7 +7520,30 @@
                   <a:srgbClr val="3D424E"/>
                 </a:solidFill>
               </a:rPr>
-              <a:t>Composição da banca preliminar — alguma sugestão?</a:t>
+              <a:t/>
+            </a:r>
+          </a:p>
+          <a:p>
+            <a:pPr>
+              <a:spcAft>
+                <a:spcPts val="800"/>
+              </a:spcAft>
+            </a:pPr>
+            <a:r>
+              <a:rPr sz="1600" b="1">
+                <a:solidFill>
+                  <a:srgbClr val="1F2A4E"/>
+                </a:solidFill>
+              </a:rPr>
+              <a:t>Documento:  </a:t>
+            </a:r>
+            <a:r>
+              <a:rPr sz="1600">
+                <a:solidFill>
+                  <a:srgbClr val="3D424E"/>
+                </a:solidFill>
+              </a:rPr>
+              <a:t>carta em dois parágrafos redigida, pronta para envio. Preciso só do senhor me confirmar o trâmite — se é carta direta, requerimento via SEI ou processo formal com anexos.</a:t>
             </a:r>
           </a:p>
         </p:txBody>
@@ -5250,7 +7556,150 @@
 </p:sld>
 </file>
 
-<file path=ppt/slides/slide17.xml><?xml version="1.0" encoding="utf-8"?>
+<file path=ppt/slides/slide22.xml><?xml version="1.0" encoding="utf-8"?>
+<p:sld xmlns:a="http://schemas.openxmlformats.org/drawingml/2006/main" xmlns:p="http://schemas.openxmlformats.org/presentationml/2006/main" xmlns:r="http://schemas.openxmlformats.org/officeDocument/2006/relationships">
+  <p:cSld>
+    <p:spTree>
+      <p:nvGrpSpPr>
+        <p:cNvPr id="1" name=""/>
+        <p:cNvGrpSpPr/>
+        <p:nvPr/>
+      </p:nvGrpSpPr>
+      <p:grpSpPr/>
+      <p:sp>
+        <p:nvSpPr>
+          <p:cNvPr id="2" name="Rectangle 1"/>
+          <p:cNvSpPr/>
+          <p:nvPr/>
+        </p:nvSpPr>
+        <p:spPr>
+          <a:xfrm>
+            <a:off x="0" y="0"/>
+            <a:ext cx="12188952" cy="6858000"/>
+          </a:xfrm>
+          <a:prstGeom prst="rect">
+            <a:avLst/>
+          </a:prstGeom>
+          <a:solidFill>
+            <a:srgbClr val="1F2A4E"/>
+          </a:solidFill>
+          <a:ln>
+            <a:noFill/>
+          </a:ln>
+        </p:spPr>
+        <p:style>
+          <a:lnRef idx="1">
+            <a:schemeClr val="accent1"/>
+          </a:lnRef>
+          <a:fillRef idx="3">
+            <a:schemeClr val="accent1"/>
+          </a:fillRef>
+          <a:effectRef idx="2">
+            <a:schemeClr val="accent1"/>
+          </a:effectRef>
+          <a:fontRef idx="minor">
+            <a:schemeClr val="lt1"/>
+          </a:fontRef>
+        </p:style>
+        <p:txBody>
+          <a:bodyPr rtlCol="0" anchor="ctr"/>
+          <a:lstStyle/>
+          <a:p>
+            <a:pPr algn="ctr"/>
+          </a:p>
+        </p:txBody>
+      </p:sp>
+      <p:sp>
+        <p:nvSpPr>
+          <p:cNvPr id="3" name="TextBox 2"/>
+          <p:cNvSpPr txBox="1"/>
+          <p:nvPr/>
+        </p:nvSpPr>
+        <p:spPr>
+          <a:xfrm>
+            <a:off x="731520" y="1371600"/>
+            <a:ext cx="2743200" cy="2743200"/>
+          </a:xfrm>
+          <a:prstGeom prst="rect">
+            <a:avLst/>
+          </a:prstGeom>
+          <a:noFill/>
+        </p:spPr>
+        <p:txBody>
+          <a:bodyPr wrap="none">
+            <a:spAutoFit/>
+          </a:bodyPr>
+          <a:lstStyle/>
+          <a:p>
+            <a:pPr>
+              <a:defRPr sz="14000" b="1">
+                <a:solidFill>
+                  <a:srgbClr val="FFFFFF"/>
+                </a:solidFill>
+              </a:defRPr>
+            </a:pPr>
+            <a:r>
+              <a:t>5</a:t>
+            </a:r>
+          </a:p>
+        </p:txBody>
+      </p:sp>
+      <p:sp>
+        <p:nvSpPr>
+          <p:cNvPr id="4" name="TextBox 3"/>
+          <p:cNvSpPr txBox="1"/>
+          <p:nvPr/>
+        </p:nvSpPr>
+        <p:spPr>
+          <a:xfrm>
+            <a:off x="3931920" y="2286000"/>
+            <a:ext cx="7772400" cy="1828800"/>
+          </a:xfrm>
+          <a:prstGeom prst="rect">
+            <a:avLst/>
+          </a:prstGeom>
+          <a:noFill/>
+        </p:spPr>
+        <p:txBody>
+          <a:bodyPr wrap="square">
+            <a:spAutoFit/>
+          </a:bodyPr>
+          <a:lstStyle/>
+          <a:p>
+            <a:pPr>
+              <a:defRPr sz="3600" b="1">
+                <a:solidFill>
+                  <a:srgbClr val="FFFFFF"/>
+                </a:solidFill>
+              </a:defRPr>
+            </a:pPr>
+            <a:r>
+              <a:t>Debate aberto</a:t>
+            </a:r>
+          </a:p>
+          <a:p>
+            <a:pPr>
+              <a:defRPr sz="1800">
+                <a:solidFill>
+                  <a:srgbClr val="E8EAED"/>
+                </a:solidFill>
+              </a:defRPr>
+            </a:pPr>
+            <a:r>
+              <a:t>Seis perguntas onde preciso da opinião do orientador</a:t>
+            </a:r>
+          </a:p>
+        </p:txBody>
+      </p:sp>
+    </p:spTree>
+  </p:cSld>
+  <p:clrMapOvr>
+    <a:masterClrMapping/>
+  </p:clrMapOvr>
+</p:sld>
+</file>
+
+<file path=ppt/slides/slide23.xml><?xml version="1.0" encoding="utf-8"?>
 <p:sld xmlns:a="http://schemas.openxmlformats.org/drawingml/2006/main" xmlns:p="http://schemas.openxmlformats.org/presentationml/2006/main" xmlns:r="http://schemas.openxmlformats.org/officeDocument/2006/relationships">
   <p:cSld>
     <p:spTree>
@@ -5290,7 +7739,7 @@
               </a:defRPr>
             </a:pPr>
             <a:r>
-              <a:t>Próximos 7 dias — plano até 15/jul</a:t>
+              <a:t>Perguntas técnicas</a:t>
             </a:r>
           </a:p>
         </p:txBody>
@@ -5338,385 +7787,16 @@
           </a:p>
         </p:txBody>
       </p:sp>
-      <p:graphicFrame>
-        <p:nvGraphicFramePr>
-          <p:cNvPr id="4" name="Table 3"/>
-          <p:cNvGraphicFramePr>
-            <a:graphicFrameLocks noGrp="1"/>
-          </p:cNvGraphicFramePr>
-          <p:nvPr/>
-        </p:nvGraphicFramePr>
-        <p:xfrm>
-          <a:off x="457200" y="1371600"/>
-          <a:ext cx="11430000" cy="4754880"/>
-        </p:xfrm>
-        <a:graphic>
-          <a:graphicData uri="http://schemas.openxmlformats.org/drawingml/2006/table">
-            <a:tbl>
-              <a:tblPr firstRow="1" bandRow="1">
-                <a:tableStyleId>{5C22544A-7EE6-4342-B048-85BDC9FD1C3A}</a:tableStyleId>
-              </a:tblPr>
-              <a:tblGrid>
-                <a:gridCol w="1828800"/>
-                <a:gridCol w="5486400"/>
-                <a:gridCol w="4114800"/>
-              </a:tblGrid>
-              <a:tr h="792480">
-                <a:tc>
-                  <a:txBody>
-                    <a:bodyPr/>
-                    <a:lstStyle/>
-                    <a:p>
-                      <a:r>
-                        <a:rPr sz="1300" b="1">
-                          <a:solidFill>
-                            <a:srgbClr val="FFFFFF"/>
-                          </a:solidFill>
-                        </a:rPr>
-                        <a:t>Data</a:t>
-                      </a:r>
-                    </a:p>
-                  </a:txBody>
-                  <a:tcPr>
-                    <a:solidFill>
-                      <a:srgbClr val="1F2A4E"/>
-                    </a:solidFill>
-                  </a:tcPr>
-                </a:tc>
-                <a:tc>
-                  <a:txBody>
-                    <a:bodyPr/>
-                    <a:lstStyle/>
-                    <a:p>
-                      <a:r>
-                        <a:rPr sz="1300" b="1">
-                          <a:solidFill>
-                            <a:srgbClr val="FFFFFF"/>
-                          </a:solidFill>
-                        </a:rPr>
-                        <a:t>Atividade</a:t>
-                      </a:r>
-                    </a:p>
-                  </a:txBody>
-                  <a:tcPr>
-                    <a:solidFill>
-                      <a:srgbClr val="1F2A4E"/>
-                    </a:solidFill>
-                  </a:tcPr>
-                </a:tc>
-                <a:tc>
-                  <a:txBody>
-                    <a:bodyPr/>
-                    <a:lstStyle/>
-                    <a:p>
-                      <a:r>
-                        <a:rPr sz="1300" b="1">
-                          <a:solidFill>
-                            <a:srgbClr val="FFFFFF"/>
-                          </a:solidFill>
-                        </a:rPr>
-                        <a:t>Entregável</a:t>
-                      </a:r>
-                    </a:p>
-                  </a:txBody>
-                  <a:tcPr>
-                    <a:solidFill>
-                      <a:srgbClr val="1F2A4E"/>
-                    </a:solidFill>
-                  </a:tcPr>
-                </a:tc>
-              </a:tr>
-              <a:tr h="792480">
-                <a:tc>
-                  <a:txBody>
-                    <a:bodyPr/>
-                    <a:lstStyle/>
-                    <a:p>
-                      <a:r>
-                        <a:rPr sz="1100">
-                          <a:solidFill>
-                            <a:srgbClr val="3D424E"/>
-                          </a:solidFill>
-                        </a:rPr>
-                        <a:t>08-09/jul</a:t>
-                      </a:r>
-                    </a:p>
-                  </a:txBody>
-                  <a:tcPr/>
-                </a:tc>
-                <a:tc>
-                  <a:txBody>
-                    <a:bodyPr/>
-                    <a:lstStyle/>
-                    <a:p>
-                      <a:r>
-                        <a:rPr sz="1100">
-                          <a:solidFill>
-                            <a:srgbClr val="3D424E"/>
-                          </a:solidFill>
-                        </a:rPr>
-                        <a:t>Transferência do Cap 1 (Markdown → Overleaf)</a:t>
-                      </a:r>
-                    </a:p>
-                  </a:txBody>
-                  <a:tcPr/>
-                </a:tc>
-                <a:tc>
-                  <a:txBody>
-                    <a:bodyPr/>
-                    <a:lstStyle/>
-                    <a:p>
-                      <a:r>
-                        <a:rPr sz="1100">
-                          <a:solidFill>
-                            <a:srgbClr val="3D424E"/>
-                          </a:solidFill>
-                        </a:rPr>
-                        <a:t>Cap 1 em LaTeX</a:t>
-                      </a:r>
-                    </a:p>
-                  </a:txBody>
-                  <a:tcPr/>
-                </a:tc>
-              </a:tr>
-              <a:tr h="792480">
-                <a:tc>
-                  <a:txBody>
-                    <a:bodyPr/>
-                    <a:lstStyle/>
-                    <a:p>
-                      <a:r>
-                        <a:rPr sz="1100">
-                          <a:solidFill>
-                            <a:srgbClr val="3D424E"/>
-                          </a:solidFill>
-                        </a:rPr>
-                        <a:t>10-11/jul</a:t>
-                      </a:r>
-                    </a:p>
-                  </a:txBody>
-                  <a:tcPr/>
-                </a:tc>
-                <a:tc>
-                  <a:txBody>
-                    <a:bodyPr/>
-                    <a:lstStyle/>
-                    <a:p>
-                      <a:r>
-                        <a:rPr sz="1100">
-                          <a:solidFill>
-                            <a:srgbClr val="3D424E"/>
-                          </a:solidFill>
-                        </a:rPr>
-                        <a:t>Transferência do Cap 2 (Revisão bibliográfica)</a:t>
-                      </a:r>
-                    </a:p>
-                  </a:txBody>
-                  <a:tcPr/>
-                </a:tc>
-                <a:tc>
-                  <a:txBody>
-                    <a:bodyPr/>
-                    <a:lstStyle/>
-                    <a:p>
-                      <a:r>
-                        <a:rPr sz="1100">
-                          <a:solidFill>
-                            <a:srgbClr val="3D424E"/>
-                          </a:solidFill>
-                        </a:rPr>
-                        <a:t>Cap 2 em LaTeX</a:t>
-                      </a:r>
-                    </a:p>
-                  </a:txBody>
-                  <a:tcPr/>
-                </a:tc>
-              </a:tr>
-              <a:tr h="792480">
-                <a:tc>
-                  <a:txBody>
-                    <a:bodyPr/>
-                    <a:lstStyle/>
-                    <a:p>
-                      <a:r>
-                        <a:rPr sz="1100">
-                          <a:solidFill>
-                            <a:srgbClr val="3D424E"/>
-                          </a:solidFill>
-                        </a:rPr>
-                        <a:t>12-13/jul</a:t>
-                      </a:r>
-                    </a:p>
-                  </a:txBody>
-                  <a:tcPr/>
-                </a:tc>
-                <a:tc>
-                  <a:txBody>
-                    <a:bodyPr/>
-                    <a:lstStyle/>
-                    <a:p>
-                      <a:r>
-                        <a:rPr sz="1100">
-                          <a:solidFill>
-                            <a:srgbClr val="3D424E"/>
-                          </a:solidFill>
-                        </a:rPr>
-                        <a:t>Transferência dos Caps 3, 4 e 5</a:t>
-                      </a:r>
-                    </a:p>
-                  </a:txBody>
-                  <a:tcPr/>
-                </a:tc>
-                <a:tc>
-                  <a:txBody>
-                    <a:bodyPr/>
-                    <a:lstStyle/>
-                    <a:p>
-                      <a:r>
-                        <a:rPr sz="1100">
-                          <a:solidFill>
-                            <a:srgbClr val="3D424E"/>
-                          </a:solidFill>
-                        </a:rPr>
-                        <a:t>Caps 3-5 em LaTeX</a:t>
-                      </a:r>
-                    </a:p>
-                  </a:txBody>
-                  <a:tcPr/>
-                </a:tc>
-              </a:tr>
-              <a:tr h="792480">
-                <a:tc>
-                  <a:txBody>
-                    <a:bodyPr/>
-                    <a:lstStyle/>
-                    <a:p>
-                      <a:r>
-                        <a:rPr sz="1100">
-                          <a:solidFill>
-                            <a:srgbClr val="3D424E"/>
-                          </a:solidFill>
-                        </a:rPr>
-                        <a:t>14/jul</a:t>
-                      </a:r>
-                    </a:p>
-                  </a:txBody>
-                  <a:tcPr/>
-                </a:tc>
-                <a:tc>
-                  <a:txBody>
-                    <a:bodyPr/>
-                    <a:lstStyle/>
-                    <a:p>
-                      <a:r>
-                        <a:rPr sz="1100">
-                          <a:solidFill>
-                            <a:srgbClr val="3D424E"/>
-                          </a:solidFill>
-                        </a:rPr>
-                        <a:t>Revisão final integrada + ajustes desta reunião</a:t>
-                      </a:r>
-                    </a:p>
-                  </a:txBody>
-                  <a:tcPr/>
-                </a:tc>
-                <a:tc>
-                  <a:txBody>
-                    <a:bodyPr/>
-                    <a:lstStyle/>
-                    <a:p>
-                      <a:r>
-                        <a:rPr sz="1100">
-                          <a:solidFill>
-                            <a:srgbClr val="3D424E"/>
-                          </a:solidFill>
-                        </a:rPr>
-                        <a:t>Documento consolidado</a:t>
-                      </a:r>
-                    </a:p>
-                  </a:txBody>
-                  <a:tcPr/>
-                </a:tc>
-              </a:tr>
-              <a:tr h="792480">
-                <a:tc>
-                  <a:txBody>
-                    <a:bodyPr/>
-                    <a:lstStyle/>
-                    <a:p>
-                      <a:r>
-                        <a:rPr sz="1100">
-                          <a:solidFill>
-                            <a:srgbClr val="3D424E"/>
-                          </a:solidFill>
-                        </a:rPr>
-                        <a:t>15/jul</a:t>
-                      </a:r>
-                    </a:p>
-                  </a:txBody>
-                  <a:tcPr>
-                    <a:solidFill>
-                      <a:srgbClr val="E8EAED"/>
-                    </a:solidFill>
-                  </a:tcPr>
-                </a:tc>
-                <a:tc>
-                  <a:txBody>
-                    <a:bodyPr/>
-                    <a:lstStyle/>
-                    <a:p>
-                      <a:r>
-                        <a:rPr sz="1100">
-                          <a:solidFill>
-                            <a:srgbClr val="3D424E"/>
-                          </a:solidFill>
-                        </a:rPr>
-                        <a:t>Entrega da 1ª revisão da qualificação</a:t>
-                      </a:r>
-                    </a:p>
-                  </a:txBody>
-                  <a:tcPr>
-                    <a:solidFill>
-                      <a:srgbClr val="E8EAED"/>
-                    </a:solidFill>
-                  </a:tcPr>
-                </a:tc>
-                <a:tc>
-                  <a:txBody>
-                    <a:bodyPr/>
-                    <a:lstStyle/>
-                    <a:p>
-                      <a:r>
-                        <a:rPr sz="1100">
-                          <a:solidFill>
-                            <a:srgbClr val="3D424E"/>
-                          </a:solidFill>
-                        </a:rPr>
-                        <a:t>Marco 1 atingido</a:t>
-                      </a:r>
-                    </a:p>
-                  </a:txBody>
-                  <a:tcPr>
-                    <a:solidFill>
-                      <a:srgbClr val="E8EAED"/>
-                    </a:solidFill>
-                  </a:tcPr>
-                </a:tc>
-              </a:tr>
-            </a:tbl>
-          </a:graphicData>
-        </a:graphic>
-      </p:graphicFrame>
-      <p:sp>
-        <p:nvSpPr>
-          <p:cNvPr id="5" name="TextBox 4"/>
+      <p:sp>
+        <p:nvSpPr>
+          <p:cNvPr id="4" name="TextBox 3"/>
           <p:cNvSpPr txBox="1"/>
           <p:nvPr/>
         </p:nvSpPr>
         <p:spPr>
           <a:xfrm>
-            <a:off x="457200" y="6446520"/>
-            <a:ext cx="11430000" cy="365760"/>
+            <a:off x="457200" y="1371600"/>
+            <a:ext cx="11430000" cy="4937760"/>
           </a:xfrm>
           <a:prstGeom prst="rect">
             <a:avLst/>
@@ -5724,20 +7804,77 @@
           <a:noFill/>
         </p:spPr>
         <p:txBody>
-          <a:bodyPr wrap="none">
+          <a:bodyPr wrap="square">
             <a:spAutoFit/>
           </a:bodyPr>
           <a:lstStyle/>
           <a:p>
             <a:pPr>
-              <a:defRPr sz="1000" i="1">
-                <a:solidFill>
-                  <a:srgbClr val="707682"/>
-                </a:solidFill>
-              </a:defRPr>
-            </a:pPr>
-            <a:r>
-              <a:t>Tramitação da Declaração CEP e carta de extensão em paralelo.</a:t>
+              <a:spcAft>
+                <a:spcPts val="800"/>
+              </a:spcAft>
+            </a:pPr>
+            <a:r>
+              <a:rPr sz="1600" b="1">
+                <a:solidFill>
+                  <a:srgbClr val="1F2A4E"/>
+                </a:solidFill>
+              </a:rPr>
+              <a:t>1.  </a:t>
+            </a:r>
+            <a:r>
+              <a:rPr sz="1600">
+                <a:solidFill>
+                  <a:srgbClr val="3D424E"/>
+                </a:solidFill>
+              </a:rPr>
+              <a:t>A quantidade de configurações comparativas (A, B, C, D) é suficiente ou o senhor recomenda incluir uma quinta variante — por exemplo, FiLM com skin tone contínuo (ITA/L*) em vez de MST discreto?</a:t>
+            </a:r>
+          </a:p>
+          <a:p>
+            <a:pPr>
+              <a:spcAft>
+                <a:spcPts val="800"/>
+              </a:spcAft>
+            </a:pPr>
+            <a:r>
+              <a:rPr sz="1600" b="1">
+                <a:solidFill>
+                  <a:srgbClr val="1F2A4E"/>
+                </a:solidFill>
+              </a:rPr>
+              <a:t>2.  </a:t>
+            </a:r>
+            <a:r>
+              <a:rPr sz="1600">
+                <a:solidFill>
+                  <a:srgbClr val="3D424E"/>
+                </a:solidFill>
+              </a:rPr>
+              <a:t>No Cap 2, faz sentido eu incluir uma subseção de meia página comparando FiLM com CBN, cross-attention e AdaIN — ou deixo isso para a defesa oral?</a:t>
+            </a:r>
+          </a:p>
+          <a:p>
+            <a:pPr>
+              <a:spcAft>
+                <a:spcPts val="800"/>
+              </a:spcAft>
+            </a:pPr>
+            <a:r>
+              <a:rPr sz="1600" b="1">
+                <a:solidFill>
+                  <a:srgbClr val="1F2A4E"/>
+                </a:solidFill>
+              </a:rPr>
+              <a:t>3.  </a:t>
+            </a:r>
+            <a:r>
+              <a:rPr sz="1600">
+                <a:solidFill>
+                  <a:srgbClr val="3D424E"/>
+                </a:solidFill>
+              </a:rPr>
+              <a:t>Sobre a extensão para face recognition (OE-4) — o senhor concorda que a métrica principal deva ser TPR@FAR=1e-4 estratificada por raça, ou prefere DR agregado?</a:t>
             </a:r>
           </a:p>
         </p:txBody>
@@ -5750,7 +7887,544 @@
 </p:sld>
 </file>
 
-<file path=ppt/slides/slide18.xml><?xml version="1.0" encoding="utf-8"?>
+<file path=ppt/slides/slide24.xml><?xml version="1.0" encoding="utf-8"?>
+<p:sld xmlns:a="http://schemas.openxmlformats.org/drawingml/2006/main" xmlns:p="http://schemas.openxmlformats.org/presentationml/2006/main" xmlns:r="http://schemas.openxmlformats.org/officeDocument/2006/relationships">
+  <p:cSld>
+    <p:spTree>
+      <p:nvGrpSpPr>
+        <p:cNvPr id="1" name=""/>
+        <p:cNvGrpSpPr/>
+        <p:nvPr/>
+      </p:nvGrpSpPr>
+      <p:grpSpPr/>
+      <p:sp>
+        <p:nvSpPr>
+          <p:cNvPr id="2" name="TextBox 1"/>
+          <p:cNvSpPr txBox="1"/>
+          <p:nvPr/>
+        </p:nvSpPr>
+        <p:spPr>
+          <a:xfrm>
+            <a:off x="457200" y="365760"/>
+            <a:ext cx="11430000" cy="822960"/>
+          </a:xfrm>
+          <a:prstGeom prst="rect">
+            <a:avLst/>
+          </a:prstGeom>
+          <a:noFill/>
+        </p:spPr>
+        <p:txBody>
+          <a:bodyPr wrap="square">
+            <a:spAutoFit/>
+          </a:bodyPr>
+          <a:lstStyle/>
+          <a:p>
+            <a:pPr>
+              <a:defRPr sz="2600" b="1">
+                <a:solidFill>
+                  <a:srgbClr val="1F2A4E"/>
+                </a:solidFill>
+              </a:defRPr>
+            </a:pPr>
+            <a:r>
+              <a:t>Perguntas administrativas</a:t>
+            </a:r>
+          </a:p>
+        </p:txBody>
+      </p:sp>
+      <p:sp>
+        <p:nvSpPr>
+          <p:cNvPr id="3" name="Rectangle 2"/>
+          <p:cNvSpPr/>
+          <p:nvPr/>
+        </p:nvSpPr>
+        <p:spPr>
+          <a:xfrm>
+            <a:off x="457200" y="1143000"/>
+            <a:ext cx="11430000" cy="36576"/>
+          </a:xfrm>
+          <a:prstGeom prst="rect">
+            <a:avLst/>
+          </a:prstGeom>
+          <a:solidFill>
+            <a:srgbClr val="1F2A4E"/>
+          </a:solidFill>
+          <a:ln>
+            <a:noFill/>
+          </a:ln>
+        </p:spPr>
+        <p:style>
+          <a:lnRef idx="1">
+            <a:schemeClr val="accent1"/>
+          </a:lnRef>
+          <a:fillRef idx="3">
+            <a:schemeClr val="accent1"/>
+          </a:fillRef>
+          <a:effectRef idx="2">
+            <a:schemeClr val="accent1"/>
+          </a:effectRef>
+          <a:fontRef idx="minor">
+            <a:schemeClr val="lt1"/>
+          </a:fontRef>
+        </p:style>
+        <p:txBody>
+          <a:bodyPr rtlCol="0" anchor="ctr"/>
+          <a:lstStyle/>
+          <a:p>
+            <a:pPr algn="ctr"/>
+          </a:p>
+        </p:txBody>
+      </p:sp>
+      <p:sp>
+        <p:nvSpPr>
+          <p:cNvPr id="4" name="TextBox 3"/>
+          <p:cNvSpPr txBox="1"/>
+          <p:nvPr/>
+        </p:nvSpPr>
+        <p:spPr>
+          <a:xfrm>
+            <a:off x="457200" y="1371600"/>
+            <a:ext cx="11430000" cy="4937760"/>
+          </a:xfrm>
+          <a:prstGeom prst="rect">
+            <a:avLst/>
+          </a:prstGeom>
+          <a:noFill/>
+        </p:spPr>
+        <p:txBody>
+          <a:bodyPr wrap="square">
+            <a:spAutoFit/>
+          </a:bodyPr>
+          <a:lstStyle/>
+          <a:p>
+            <a:pPr>
+              <a:spcAft>
+                <a:spcPts val="800"/>
+              </a:spcAft>
+            </a:pPr>
+            <a:r>
+              <a:rPr sz="1600" b="1">
+                <a:solidFill>
+                  <a:srgbClr val="1F2A4E"/>
+                </a:solidFill>
+              </a:rPr>
+              <a:t>4.  </a:t>
+            </a:r>
+            <a:r>
+              <a:rPr sz="1600">
+                <a:solidFill>
+                  <a:srgbClr val="3D424E"/>
+                </a:solidFill>
+              </a:rPr>
+              <a:t>Quem é o chefe do departamento que deve assinar a Declaração de Responsabilidade do CEP?</a:t>
+            </a:r>
+          </a:p>
+          <a:p>
+            <a:pPr>
+              <a:spcAft>
+                <a:spcPts val="800"/>
+              </a:spcAft>
+            </a:pPr>
+            <a:r>
+              <a:rPr sz="1600" b="1">
+                <a:solidFill>
+                  <a:srgbClr val="1F2A4E"/>
+                </a:solidFill>
+              </a:rPr>
+              <a:t>5.  </a:t>
+            </a:r>
+            <a:r>
+              <a:rPr sz="1600">
+                <a:solidFill>
+                  <a:srgbClr val="3D424E"/>
+                </a:solidFill>
+              </a:rPr>
+              <a:t>Qual o trâmite correto para a solicitação de extensão de dois meses — carta direta, requerimento SEI ao PPG ou processo formal com anexos?</a:t>
+            </a:r>
+          </a:p>
+          <a:p>
+            <a:pPr>
+              <a:spcAft>
+                <a:spcPts val="800"/>
+              </a:spcAft>
+            </a:pPr>
+            <a:r>
+              <a:rPr sz="1600" b="1">
+                <a:solidFill>
+                  <a:srgbClr val="1F2A4E"/>
+                </a:solidFill>
+              </a:rPr>
+              <a:t>6.  </a:t>
+            </a:r>
+            <a:r>
+              <a:rPr sz="1600">
+                <a:solidFill>
+                  <a:srgbClr val="3D424E"/>
+                </a:solidFill>
+              </a:rPr>
+              <a:t>O senhor tem preferência sobre template Overleaf (padrão institucional Unifesp / ICT vs template ABNT genérico do abnTeX2)?</a:t>
+            </a:r>
+          </a:p>
+          <a:p>
+            <a:pPr>
+              <a:spcAft>
+                <a:spcPts val="800"/>
+              </a:spcAft>
+            </a:pPr>
+            <a:r>
+              <a:rPr sz="1600" b="1">
+                <a:solidFill>
+                  <a:srgbClr val="1F2A4E"/>
+                </a:solidFill>
+              </a:rPr>
+              <a:t>  </a:t>
+            </a:r>
+            <a:r>
+              <a:rPr sz="1600">
+                <a:solidFill>
+                  <a:srgbClr val="3D424E"/>
+                </a:solidFill>
+              </a:rPr>
+              <a:t/>
+            </a:r>
+          </a:p>
+          <a:p>
+            <a:pPr>
+              <a:spcAft>
+                <a:spcPts val="800"/>
+              </a:spcAft>
+            </a:pPr>
+            <a:r>
+              <a:rPr sz="1600" b="1">
+                <a:solidFill>
+                  <a:srgbClr val="1F2A4E"/>
+                </a:solidFill>
+              </a:rPr>
+              <a:t>Bônus (se der tempo):  </a:t>
+            </a:r>
+            <a:r>
+              <a:rPr sz="1600">
+                <a:solidFill>
+                  <a:srgbClr val="3D424E"/>
+                </a:solidFill>
+              </a:rPr>
+              <a:t>alguma sugestão sobre composição da banca preliminar? Estou pensando em alguém de fairness (pode ser externo) + alguém de visão computacional aplicada.</a:t>
+            </a:r>
+          </a:p>
+        </p:txBody>
+      </p:sp>
+    </p:spTree>
+  </p:cSld>
+  <p:clrMapOvr>
+    <a:masterClrMapping/>
+  </p:clrMapOvr>
+</p:sld>
+</file>
+
+<file path=ppt/slides/slide25.xml><?xml version="1.0" encoding="utf-8"?>
+<p:sld xmlns:a="http://schemas.openxmlformats.org/drawingml/2006/main" xmlns:p="http://schemas.openxmlformats.org/presentationml/2006/main" xmlns:r="http://schemas.openxmlformats.org/officeDocument/2006/relationships">
+  <p:cSld>
+    <p:spTree>
+      <p:nvGrpSpPr>
+        <p:cNvPr id="1" name=""/>
+        <p:cNvGrpSpPr/>
+        <p:nvPr/>
+      </p:nvGrpSpPr>
+      <p:grpSpPr/>
+      <p:sp>
+        <p:nvSpPr>
+          <p:cNvPr id="2" name="TextBox 1"/>
+          <p:cNvSpPr txBox="1"/>
+          <p:nvPr/>
+        </p:nvSpPr>
+        <p:spPr>
+          <a:xfrm>
+            <a:off x="457200" y="365760"/>
+            <a:ext cx="11430000" cy="822960"/>
+          </a:xfrm>
+          <a:prstGeom prst="rect">
+            <a:avLst/>
+          </a:prstGeom>
+          <a:noFill/>
+        </p:spPr>
+        <p:txBody>
+          <a:bodyPr wrap="square">
+            <a:spAutoFit/>
+          </a:bodyPr>
+          <a:lstStyle/>
+          <a:p>
+            <a:pPr>
+              <a:defRPr sz="2600" b="1">
+                <a:solidFill>
+                  <a:srgbClr val="1F2A4E"/>
+                </a:solidFill>
+              </a:defRPr>
+            </a:pPr>
+            <a:r>
+              <a:t>Próximos sete dias — como vou organizar a semana</a:t>
+            </a:r>
+          </a:p>
+        </p:txBody>
+      </p:sp>
+      <p:sp>
+        <p:nvSpPr>
+          <p:cNvPr id="3" name="Rectangle 2"/>
+          <p:cNvSpPr/>
+          <p:nvPr/>
+        </p:nvSpPr>
+        <p:spPr>
+          <a:xfrm>
+            <a:off x="457200" y="1143000"/>
+            <a:ext cx="11430000" cy="36576"/>
+          </a:xfrm>
+          <a:prstGeom prst="rect">
+            <a:avLst/>
+          </a:prstGeom>
+          <a:solidFill>
+            <a:srgbClr val="1F2A4E"/>
+          </a:solidFill>
+          <a:ln>
+            <a:noFill/>
+          </a:ln>
+        </p:spPr>
+        <p:style>
+          <a:lnRef idx="1">
+            <a:schemeClr val="accent1"/>
+          </a:lnRef>
+          <a:fillRef idx="3">
+            <a:schemeClr val="accent1"/>
+          </a:fillRef>
+          <a:effectRef idx="2">
+            <a:schemeClr val="accent1"/>
+          </a:effectRef>
+          <a:fontRef idx="minor">
+            <a:schemeClr val="lt1"/>
+          </a:fontRef>
+        </p:style>
+        <p:txBody>
+          <a:bodyPr rtlCol="0" anchor="ctr"/>
+          <a:lstStyle/>
+          <a:p>
+            <a:pPr algn="ctr"/>
+          </a:p>
+        </p:txBody>
+      </p:sp>
+      <p:sp>
+        <p:nvSpPr>
+          <p:cNvPr id="4" name="TextBox 3"/>
+          <p:cNvSpPr txBox="1"/>
+          <p:nvPr/>
+        </p:nvSpPr>
+        <p:spPr>
+          <a:xfrm>
+            <a:off x="457200" y="1371600"/>
+            <a:ext cx="11430000" cy="4937760"/>
+          </a:xfrm>
+          <a:prstGeom prst="rect">
+            <a:avLst/>
+          </a:prstGeom>
+          <a:noFill/>
+        </p:spPr>
+        <p:txBody>
+          <a:bodyPr wrap="square">
+            <a:spAutoFit/>
+          </a:bodyPr>
+          <a:lstStyle/>
+          <a:p>
+            <a:pPr>
+              <a:spcAft>
+                <a:spcPts val="800"/>
+              </a:spcAft>
+            </a:pPr>
+            <a:r>
+              <a:rPr sz="1600" b="1">
+                <a:solidFill>
+                  <a:srgbClr val="1F2A4E"/>
+                </a:solidFill>
+              </a:rPr>
+              <a:t>Hoje (08/jul):  </a:t>
+            </a:r>
+            <a:r>
+              <a:rPr sz="1600">
+                <a:solidFill>
+                  <a:srgbClr val="3D424E"/>
+                </a:solidFill>
+              </a:rPr>
+              <a:t>aplicar o que sair desta reunião; setar Overleaf; iniciar transposição do Cap 1</a:t>
+            </a:r>
+          </a:p>
+          <a:p>
+            <a:pPr>
+              <a:spcAft>
+                <a:spcPts val="800"/>
+              </a:spcAft>
+            </a:pPr>
+            <a:r>
+              <a:rPr sz="1600" b="1">
+                <a:solidFill>
+                  <a:srgbClr val="1F2A4E"/>
+                </a:solidFill>
+              </a:rPr>
+              <a:t>09-10/jul:  </a:t>
+            </a:r>
+            <a:r>
+              <a:rPr sz="1600">
+                <a:solidFill>
+                  <a:srgbClr val="3D424E"/>
+                </a:solidFill>
+              </a:rPr>
+              <a:t>finalizar Cap 1 no Overleaf; transpor Cap 2 (Revisão bibliográfica — o mais denso)</a:t>
+            </a:r>
+          </a:p>
+          <a:p>
+            <a:pPr>
+              <a:spcAft>
+                <a:spcPts val="800"/>
+              </a:spcAft>
+            </a:pPr>
+            <a:r>
+              <a:rPr sz="1600" b="1">
+                <a:solidFill>
+                  <a:srgbClr val="1F2A4E"/>
+                </a:solidFill>
+              </a:rPr>
+              <a:t>11-12/jul:  </a:t>
+            </a:r>
+            <a:r>
+              <a:rPr sz="1600">
+                <a:solidFill>
+                  <a:srgbClr val="3D424E"/>
+                </a:solidFill>
+              </a:rPr>
+              <a:t>transpor Cap 3 (Objetivos) e Cap 4 (Metodologia)</a:t>
+            </a:r>
+          </a:p>
+          <a:p>
+            <a:pPr>
+              <a:spcAft>
+                <a:spcPts val="800"/>
+              </a:spcAft>
+            </a:pPr>
+            <a:r>
+              <a:rPr sz="1600" b="1">
+                <a:solidFill>
+                  <a:srgbClr val="1F2A4E"/>
+                </a:solidFill>
+              </a:rPr>
+              <a:t>13/jul:  </a:t>
+            </a:r>
+            <a:r>
+              <a:rPr sz="1600">
+                <a:solidFill>
+                  <a:srgbClr val="3D424E"/>
+                </a:solidFill>
+              </a:rPr>
+              <a:t>fechar Cap 5 (Cronograma) com marcos ajustados hoje; revisão final integrada</a:t>
+            </a:r>
+          </a:p>
+          <a:p>
+            <a:pPr>
+              <a:spcAft>
+                <a:spcPts val="800"/>
+              </a:spcAft>
+            </a:pPr>
+            <a:r>
+              <a:rPr sz="1600" b="1">
+                <a:solidFill>
+                  <a:srgbClr val="1F2A4E"/>
+                </a:solidFill>
+              </a:rPr>
+              <a:t>14/jul:  </a:t>
+            </a:r>
+            <a:r>
+              <a:rPr sz="1600">
+                <a:solidFill>
+                  <a:srgbClr val="3D424E"/>
+                </a:solidFill>
+              </a:rPr>
+              <a:t>leitura completa de ponta a ponta; ajustes de coerência e ABNT</a:t>
+            </a:r>
+          </a:p>
+          <a:p>
+            <a:pPr>
+              <a:spcAft>
+                <a:spcPts val="800"/>
+              </a:spcAft>
+            </a:pPr>
+            <a:r>
+              <a:rPr sz="1600" b="1">
+                <a:solidFill>
+                  <a:srgbClr val="1F2A4E"/>
+                </a:solidFill>
+              </a:rPr>
+              <a:t>15/jul:  </a:t>
+            </a:r>
+            <a:r>
+              <a:rPr sz="1600">
+                <a:solidFill>
+                  <a:srgbClr val="3D424E"/>
+                </a:solidFill>
+              </a:rPr>
+              <a:t>entrega da primeira revisão ao senhor via Overleaf compartilhado</a:t>
+            </a:r>
+          </a:p>
+          <a:p>
+            <a:pPr>
+              <a:spcAft>
+                <a:spcPts val="800"/>
+              </a:spcAft>
+            </a:pPr>
+            <a:r>
+              <a:rPr sz="1600" b="1">
+                <a:solidFill>
+                  <a:srgbClr val="1F2A4E"/>
+                </a:solidFill>
+              </a:rPr>
+              <a:t>  </a:t>
+            </a:r>
+            <a:r>
+              <a:rPr sz="1600">
+                <a:solidFill>
+                  <a:srgbClr val="3D424E"/>
+                </a:solidFill>
+              </a:rPr>
+              <a:t/>
+            </a:r>
+          </a:p>
+          <a:p>
+            <a:pPr>
+              <a:spcAft>
+                <a:spcPts val="800"/>
+              </a:spcAft>
+            </a:pPr>
+            <a:r>
+              <a:rPr sz="1600" b="1">
+                <a:solidFill>
+                  <a:srgbClr val="1F2A4E"/>
+                </a:solidFill>
+              </a:rPr>
+              <a:t>Em paralelo:  </a:t>
+            </a:r>
+            <a:r>
+              <a:rPr sz="1600">
+                <a:solidFill>
+                  <a:srgbClr val="3D424E"/>
+                </a:solidFill>
+              </a:rPr>
+              <a:t>iniciar tramitação da Declaração de Responsabilidade + protocolar carta de extensão</a:t>
+            </a:r>
+          </a:p>
+        </p:txBody>
+      </p:sp>
+    </p:spTree>
+  </p:cSld>
+  <p:clrMapOvr>
+    <a:masterClrMapping/>
+  </p:clrMapOvr>
+</p:sld>
+</file>
+
+<file path=ppt/slides/slide26.xml><?xml version="1.0" encoding="utf-8"?>
 <p:sld xmlns:a="http://schemas.openxmlformats.org/drawingml/2006/main" xmlns:p="http://schemas.openxmlformats.org/presentationml/2006/main" xmlns:r="http://schemas.openxmlformats.org/officeDocument/2006/relationships">
   <p:cSld>
     <p:spTree>
@@ -5877,7 +8551,7 @@
               </a:defRPr>
             </a:pPr>
             <a:r>
-              <a:t>Discussão livre — dúvidas e alinhamento</a:t>
+              <a:t>Aberto para o debate</a:t>
             </a:r>
           </a:p>
         </p:txBody>
@@ -5890,7 +8564,7 @@
 </p:sld>
 </file>
 
-<file path=ppt/slides/slide2.xml><?xml version="1.0" encoding="utf-8"?>
+<file path=ppt/slides/slide3.xml><?xml version="1.0" encoding="utf-8"?>
 <p:sld xmlns:a="http://schemas.openxmlformats.org/drawingml/2006/main" xmlns:p="http://schemas.openxmlformats.org/presentationml/2006/main" xmlns:r="http://schemas.openxmlformats.org/officeDocument/2006/relationships">
   <p:cSld>
     <p:spTree>
@@ -5930,7 +8604,7 @@
               </a:defRPr>
             </a:pPr>
             <a:r>
-              <a:t>Agenda da reunião</a:t>
+              <a:t>Recapitulando o objetivo da tese</a:t>
             </a:r>
           </a:p>
         </p:txBody>
@@ -6011,7 +8685,7 @@
                   <a:srgbClr val="1F2A4E"/>
                 </a:solidFill>
               </a:rPr>
-              <a:t>1.  </a:t>
+              <a:t>Objetivo geral:  </a:t>
             </a:r>
             <a:r>
               <a:rPr sz="1600">
@@ -6019,7 +8693,7 @@
                   <a:srgbClr val="3D424E"/>
                 </a:solidFill>
               </a:rPr>
-              <a:t>Plano de trabalho consolidado — 3 marcos formais</a:t>
+              <a:t>desenvolver e avaliar um pipeline de classificação racial em imagens faciais que incorpora tom de pele (escala Monk Skin Tone) como sinal auxiliar condicionante via mecanismo arquitetural</a:t>
             </a:r>
           </a:p>
           <a:p>
@@ -6034,7 +8708,7 @@
                   <a:srgbClr val="1F2A4E"/>
                 </a:solidFill>
               </a:rPr>
-              <a:t>2.  </a:t>
+              <a:t>  </a:t>
             </a:r>
             <a:r>
               <a:rPr sz="1600">
@@ -6042,7 +8716,7 @@
                   <a:srgbClr val="3D424E"/>
                 </a:solidFill>
               </a:rPr>
-              <a:t>Pendência 1 — Escrita da qualificação e postura sobre uso de LLM</a:t>
+              <a:t/>
             </a:r>
           </a:p>
           <a:p>
@@ -6057,7 +8731,7 @@
                   <a:srgbClr val="1F2A4E"/>
                 </a:solidFill>
               </a:rPr>
-              <a:t>3.  </a:t>
+              <a:t>Problema empírico atacado:  </a:t>
             </a:r>
             <a:r>
               <a:rPr sz="1600">
@@ -6065,7 +8739,7 @@
                   <a:srgbClr val="3D424E"/>
                 </a:solidFill>
               </a:rPr>
-              <a:t>Pendência 2 — Adequação ética CEP/Unifesp (Res. 200/2021)</a:t>
+              <a:t>disparidade severa entre Black F1 ≈ 90 % e Latinx F1 ≈ 60 % em SOTA sobre FairFace (FaceScanPaliGemma, AlDahoul 2024)</a:t>
             </a:r>
           </a:p>
           <a:p>
@@ -6080,7 +8754,7 @@
                   <a:srgbClr val="1F2A4E"/>
                 </a:solidFill>
               </a:rPr>
-              <a:t>4.  </a:t>
+              <a:t>  </a:t>
             </a:r>
             <a:r>
               <a:rPr sz="1600">
@@ -6088,7 +8762,7 @@
                   <a:srgbClr val="3D424E"/>
                 </a:solidFill>
               </a:rPr>
-              <a:t>Solicitação pessoal — extensão de 2 meses no prazo da defesa</a:t>
+              <a:t/>
             </a:r>
           </a:p>
           <a:p>
@@ -6103,7 +8777,7 @@
                   <a:srgbClr val="1F2A4E"/>
                 </a:solidFill>
               </a:rPr>
-              <a:t>5.  </a:t>
+              <a:t>Contribuição principal esperada:  </a:t>
             </a:r>
             <a:r>
               <a:rPr sz="1600">
@@ -6111,7 +8785,53 @@
                   <a:srgbClr val="3D424E"/>
                 </a:solidFill>
               </a:rPr>
-              <a:t>Perguntas objetivas e próximos passos</a:t>
+              <a:t>primeira instância empírica documentada do uso de tom de pele explícito como contexto arquitetural para race classification multi-classe</a:t>
+            </a:r>
+          </a:p>
+          <a:p>
+            <a:pPr>
+              <a:spcAft>
+                <a:spcPts val="800"/>
+              </a:spcAft>
+            </a:pPr>
+            <a:r>
+              <a:rPr sz="1600" b="1">
+                <a:solidFill>
+                  <a:srgbClr val="1F2A4E"/>
+                </a:solidFill>
+              </a:rPr>
+              <a:t>  </a:t>
+            </a:r>
+            <a:r>
+              <a:rPr sz="1600">
+                <a:solidFill>
+                  <a:srgbClr val="3D424E"/>
+                </a:solidFill>
+              </a:rPr>
+              <a:t/>
+            </a:r>
+          </a:p>
+          <a:p>
+            <a:pPr>
+              <a:spcAft>
+                <a:spcPts val="800"/>
+              </a:spcAft>
+            </a:pPr>
+            <a:r>
+              <a:rPr sz="1600" b="1">
+                <a:solidFill>
+                  <a:srgbClr val="1F2A4E"/>
+                </a:solidFill>
+              </a:rPr>
+              <a:t>Diagnóstico central da tese:  </a:t>
+            </a:r>
+            <a:r>
+              <a:rPr sz="1600">
+                <a:solidFill>
+                  <a:srgbClr val="3D424E"/>
+                </a:solidFill>
+              </a:rPr>
+              <a:t>o erro Latinx tem componente fenotípico irredutível (heterogeneidade MST intra-categoria) + componente algorítmico — a decomposição desses dois é o principal diferencial</a:t>
             </a:r>
           </a:p>
         </p:txBody>
@@ -6146,7 +8866,7 @@
               </a:defRPr>
             </a:pPr>
             <a:r>
-              <a:t>Reunião enxuta, foco em alinhamento e desbloqueio.</a:t>
+              <a:t>Base para tudo que vem a seguir — pipeline, quatro configurações, sete contribuições, seis hipóteses.</a:t>
             </a:r>
           </a:p>
         </p:txBody>
@@ -6159,7 +8879,1773 @@
 </p:sld>
 </file>
 
-<file path=ppt/slides/slide3.xml><?xml version="1.0" encoding="utf-8"?>
+<file path=ppt/slides/slide4.xml><?xml version="1.0" encoding="utf-8"?>
+<p:sld xmlns:a="http://schemas.openxmlformats.org/drawingml/2006/main" xmlns:p="http://schemas.openxmlformats.org/presentationml/2006/main" xmlns:r="http://schemas.openxmlformats.org/officeDocument/2006/relationships">
+  <p:cSld>
+    <p:spTree>
+      <p:nvGrpSpPr>
+        <p:cNvPr id="1" name=""/>
+        <p:cNvGrpSpPr/>
+        <p:nvPr/>
+      </p:nvGrpSpPr>
+      <p:grpSpPr/>
+      <p:sp>
+        <p:nvSpPr>
+          <p:cNvPr id="2" name="TextBox 1"/>
+          <p:cNvSpPr txBox="1"/>
+          <p:nvPr/>
+        </p:nvSpPr>
+        <p:spPr>
+          <a:xfrm>
+            <a:off x="457200" y="365760"/>
+            <a:ext cx="11430000" cy="822960"/>
+          </a:xfrm>
+          <a:prstGeom prst="rect">
+            <a:avLst/>
+          </a:prstGeom>
+          <a:noFill/>
+        </p:spPr>
+        <p:txBody>
+          <a:bodyPr wrap="square">
+            <a:spAutoFit/>
+          </a:bodyPr>
+          <a:lstStyle/>
+          <a:p>
+            <a:pPr>
+              <a:defRPr sz="2600" b="1">
+                <a:solidFill>
+                  <a:srgbClr val="1F2A4E"/>
+                </a:solidFill>
+              </a:defRPr>
+            </a:pPr>
+            <a:r>
+              <a:t>Corpus consolidado — 104 fichas em 11 linhas de pesquisa</a:t>
+            </a:r>
+          </a:p>
+        </p:txBody>
+      </p:sp>
+      <p:sp>
+        <p:nvSpPr>
+          <p:cNvPr id="3" name="Rectangle 2"/>
+          <p:cNvSpPr/>
+          <p:nvPr/>
+        </p:nvSpPr>
+        <p:spPr>
+          <a:xfrm>
+            <a:off x="457200" y="1143000"/>
+            <a:ext cx="11430000" cy="36576"/>
+          </a:xfrm>
+          <a:prstGeom prst="rect">
+            <a:avLst/>
+          </a:prstGeom>
+          <a:solidFill>
+            <a:srgbClr val="1F2A4E"/>
+          </a:solidFill>
+          <a:ln>
+            <a:noFill/>
+          </a:ln>
+        </p:spPr>
+        <p:style>
+          <a:lnRef idx="1">
+            <a:schemeClr val="accent1"/>
+          </a:lnRef>
+          <a:fillRef idx="3">
+            <a:schemeClr val="accent1"/>
+          </a:fillRef>
+          <a:effectRef idx="2">
+            <a:schemeClr val="accent1"/>
+          </a:effectRef>
+          <a:fontRef idx="minor">
+            <a:schemeClr val="lt1"/>
+          </a:fontRef>
+        </p:style>
+        <p:txBody>
+          <a:bodyPr rtlCol="0" anchor="ctr"/>
+          <a:lstStyle/>
+          <a:p>
+            <a:pPr algn="ctr"/>
+          </a:p>
+        </p:txBody>
+      </p:sp>
+      <p:graphicFrame>
+        <p:nvGraphicFramePr>
+          <p:cNvPr id="4" name="Table 3"/>
+          <p:cNvGraphicFramePr>
+            <a:graphicFrameLocks noGrp="1"/>
+          </p:cNvGraphicFramePr>
+          <p:nvPr/>
+        </p:nvGraphicFramePr>
+        <p:xfrm>
+          <a:off x="457200" y="1371600"/>
+          <a:ext cx="11430000" cy="4754880"/>
+        </p:xfrm>
+        <a:graphic>
+          <a:graphicData uri="http://schemas.openxmlformats.org/drawingml/2006/table">
+            <a:tbl>
+              <a:tblPr firstRow="1" bandRow="1">
+                <a:tableStyleId>{5C22544A-7EE6-4342-B048-85BDC9FD1C3A}</a:tableStyleId>
+              </a:tblPr>
+              <a:tblGrid>
+                <a:gridCol w="4389120"/>
+                <a:gridCol w="640080"/>
+                <a:gridCol w="1097280"/>
+                <a:gridCol w="5303520"/>
+              </a:tblGrid>
+              <a:tr h="365760">
+                <a:tc>
+                  <a:txBody>
+                    <a:bodyPr/>
+                    <a:lstStyle/>
+                    <a:p>
+                      <a:r>
+                        <a:rPr sz="1300" b="1">
+                          <a:solidFill>
+                            <a:srgbClr val="FFFFFF"/>
+                          </a:solidFill>
+                        </a:rPr>
+                        <a:t>Linha de pesquisa</a:t>
+                      </a:r>
+                    </a:p>
+                  </a:txBody>
+                  <a:tcPr>
+                    <a:solidFill>
+                      <a:srgbClr val="1F2A4E"/>
+                    </a:solidFill>
+                  </a:tcPr>
+                </a:tc>
+                <a:tc>
+                  <a:txBody>
+                    <a:bodyPr/>
+                    <a:lstStyle/>
+                    <a:p>
+                      <a:r>
+                        <a:rPr sz="1300" b="1">
+                          <a:solidFill>
+                            <a:srgbClr val="FFFFFF"/>
+                          </a:solidFill>
+                        </a:rPr>
+                        <a:t>N</a:t>
+                      </a:r>
+                    </a:p>
+                  </a:txBody>
+                  <a:tcPr>
+                    <a:solidFill>
+                      <a:srgbClr val="1F2A4E"/>
+                    </a:solidFill>
+                  </a:tcPr>
+                </a:tc>
+                <a:tc>
+                  <a:txBody>
+                    <a:bodyPr/>
+                    <a:lstStyle/>
+                    <a:p>
+                      <a:r>
+                        <a:rPr sz="1300" b="1">
+                          <a:solidFill>
+                            <a:srgbClr val="FFFFFF"/>
+                          </a:solidFill>
+                        </a:rPr>
+                        <a:t>% corpus</a:t>
+                      </a:r>
+                    </a:p>
+                  </a:txBody>
+                  <a:tcPr>
+                    <a:solidFill>
+                      <a:srgbClr val="1F2A4E"/>
+                    </a:solidFill>
+                  </a:tcPr>
+                </a:tc>
+                <a:tc>
+                  <a:txBody>
+                    <a:bodyPr/>
+                    <a:lstStyle/>
+                    <a:p>
+                      <a:r>
+                        <a:rPr sz="1300" b="1">
+                          <a:solidFill>
+                            <a:srgbClr val="FFFFFF"/>
+                          </a:solidFill>
+                        </a:rPr>
+                        <a:t>Papers-âncora</a:t>
+                      </a:r>
+                    </a:p>
+                  </a:txBody>
+                  <a:tcPr>
+                    <a:solidFill>
+                      <a:srgbClr val="1F2A4E"/>
+                    </a:solidFill>
+                  </a:tcPr>
+                </a:tc>
+              </a:tr>
+              <a:tr h="365760">
+                <a:tc>
+                  <a:txBody>
+                    <a:bodyPr/>
+                    <a:lstStyle/>
+                    <a:p>
+                      <a:r>
+                        <a:rPr sz="1100">
+                          <a:solidFill>
+                            <a:srgbClr val="3D424E"/>
+                          </a:solidFill>
+                        </a:rPr>
+                        <a:t>A — Race classification multi-classe</a:t>
+                      </a:r>
+                    </a:p>
+                  </a:txBody>
+                  <a:tcPr/>
+                </a:tc>
+                <a:tc>
+                  <a:txBody>
+                    <a:bodyPr/>
+                    <a:lstStyle/>
+                    <a:p>
+                      <a:r>
+                        <a:rPr sz="1100">
+                          <a:solidFill>
+                            <a:srgbClr val="3D424E"/>
+                          </a:solidFill>
+                        </a:rPr>
+                        <a:t>4</a:t>
+                      </a:r>
+                    </a:p>
+                  </a:txBody>
+                  <a:tcPr/>
+                </a:tc>
+                <a:tc>
+                  <a:txBody>
+                    <a:bodyPr/>
+                    <a:lstStyle/>
+                    <a:p>
+                      <a:r>
+                        <a:rPr sz="1100">
+                          <a:solidFill>
+                            <a:srgbClr val="3D424E"/>
+                          </a:solidFill>
+                        </a:rPr>
+                        <a:t>3,8 %</a:t>
+                      </a:r>
+                    </a:p>
+                  </a:txBody>
+                  <a:tcPr/>
+                </a:tc>
+                <a:tc>
+                  <a:txBody>
+                    <a:bodyPr/>
+                    <a:lstStyle/>
+                    <a:p>
+                      <a:r>
+                        <a:rPr sz="1100">
+                          <a:solidFill>
+                            <a:srgbClr val="3D424E"/>
+                          </a:solidFill>
+                        </a:rPr>
+                        <a:t>Kärkkäinen 2021 (FairFace), AlDahoul 2024</a:t>
+                      </a:r>
+                    </a:p>
+                  </a:txBody>
+                  <a:tcPr/>
+                </a:tc>
+              </a:tr>
+              <a:tr h="365760">
+                <a:tc>
+                  <a:txBody>
+                    <a:bodyPr/>
+                    <a:lstStyle/>
+                    <a:p>
+                      <a:r>
+                        <a:rPr sz="1100">
+                          <a:solidFill>
+                            <a:srgbClr val="3D424E"/>
+                          </a:solidFill>
+                        </a:rPr>
+                        <a:t>B — Face recognition fairness</a:t>
+                      </a:r>
+                    </a:p>
+                  </a:txBody>
+                  <a:tcPr/>
+                </a:tc>
+                <a:tc>
+                  <a:txBody>
+                    <a:bodyPr/>
+                    <a:lstStyle/>
+                    <a:p>
+                      <a:r>
+                        <a:rPr sz="1100">
+                          <a:solidFill>
+                            <a:srgbClr val="3D424E"/>
+                          </a:solidFill>
+                        </a:rPr>
+                        <a:t>16</a:t>
+                      </a:r>
+                    </a:p>
+                  </a:txBody>
+                  <a:tcPr/>
+                </a:tc>
+                <a:tc>
+                  <a:txBody>
+                    <a:bodyPr/>
+                    <a:lstStyle/>
+                    <a:p>
+                      <a:r>
+                        <a:rPr sz="1100">
+                          <a:solidFill>
+                            <a:srgbClr val="3D424E"/>
+                          </a:solidFill>
+                        </a:rPr>
+                        <a:t>15,4 %</a:t>
+                      </a:r>
+                    </a:p>
+                  </a:txBody>
+                  <a:tcPr/>
+                </a:tc>
+                <a:tc>
+                  <a:txBody>
+                    <a:bodyPr/>
+                    <a:lstStyle/>
+                    <a:p>
+                      <a:r>
+                        <a:rPr sz="1100">
+                          <a:solidFill>
+                            <a:srgbClr val="3D424E"/>
+                          </a:solidFill>
+                        </a:rPr>
+                        <a:t>Wang RFW 2019, Robinson BFW 2020, Deng ArcFace</a:t>
+                      </a:r>
+                    </a:p>
+                  </a:txBody>
+                  <a:tcPr/>
+                </a:tc>
+              </a:tr>
+              <a:tr h="365760">
+                <a:tc>
+                  <a:txBody>
+                    <a:bodyPr/>
+                    <a:lstStyle/>
+                    <a:p>
+                      <a:r>
+                        <a:rPr sz="1100">
+                          <a:solidFill>
+                            <a:srgbClr val="3D424E"/>
+                          </a:solidFill>
+                        </a:rPr>
+                        <a:t>C — Skin tone alternativo (Fitzpatrick, MST, ITA)</a:t>
+                      </a:r>
+                    </a:p>
+                  </a:txBody>
+                  <a:tcPr/>
+                </a:tc>
+                <a:tc>
+                  <a:txBody>
+                    <a:bodyPr/>
+                    <a:lstStyle/>
+                    <a:p>
+                      <a:r>
+                        <a:rPr sz="1100">
+                          <a:solidFill>
+                            <a:srgbClr val="3D424E"/>
+                          </a:solidFill>
+                        </a:rPr>
+                        <a:t>7</a:t>
+                      </a:r>
+                    </a:p>
+                  </a:txBody>
+                  <a:tcPr/>
+                </a:tc>
+                <a:tc>
+                  <a:txBody>
+                    <a:bodyPr/>
+                    <a:lstStyle/>
+                    <a:p>
+                      <a:r>
+                        <a:rPr sz="1100">
+                          <a:solidFill>
+                            <a:srgbClr val="3D424E"/>
+                          </a:solidFill>
+                        </a:rPr>
+                        <a:t>6,7 %</a:t>
+                      </a:r>
+                    </a:p>
+                  </a:txBody>
+                  <a:tcPr/>
+                </a:tc>
+                <a:tc>
+                  <a:txBody>
+                    <a:bodyPr/>
+                    <a:lstStyle/>
+                    <a:p>
+                      <a:r>
+                        <a:rPr sz="1100">
+                          <a:solidFill>
+                            <a:srgbClr val="3D424E"/>
+                          </a:solidFill>
+                        </a:rPr>
+                        <a:t>Schumann 2023 (MST), Pereira 2026 (SkinToneNet)</a:t>
+                      </a:r>
+                    </a:p>
+                  </a:txBody>
+                  <a:tcPr/>
+                </a:tc>
+              </a:tr>
+              <a:tr h="365760">
+                <a:tc>
+                  <a:txBody>
+                    <a:bodyPr/>
+                    <a:lstStyle/>
+                    <a:p>
+                      <a:r>
+                        <a:rPr sz="1100">
+                          <a:solidFill>
+                            <a:srgbClr val="3D424E"/>
+                          </a:solidFill>
+                        </a:rPr>
+                        <a:t>D — Mitigação algorítmica</a:t>
+                      </a:r>
+                    </a:p>
+                  </a:txBody>
+                  <a:tcPr/>
+                </a:tc>
+                <a:tc>
+                  <a:txBody>
+                    <a:bodyPr/>
+                    <a:lstStyle/>
+                    <a:p>
+                      <a:r>
+                        <a:rPr sz="1100">
+                          <a:solidFill>
+                            <a:srgbClr val="3D424E"/>
+                          </a:solidFill>
+                        </a:rPr>
+                        <a:t>10</a:t>
+                      </a:r>
+                    </a:p>
+                  </a:txBody>
+                  <a:tcPr/>
+                </a:tc>
+                <a:tc>
+                  <a:txBody>
+                    <a:bodyPr/>
+                    <a:lstStyle/>
+                    <a:p>
+                      <a:r>
+                        <a:rPr sz="1100">
+                          <a:solidFill>
+                            <a:srgbClr val="3D424E"/>
+                          </a:solidFill>
+                        </a:rPr>
+                        <a:t>9,6 %</a:t>
+                      </a:r>
+                    </a:p>
+                  </a:txBody>
+                  <a:tcPr/>
+                </a:tc>
+                <a:tc>
+                  <a:txBody>
+                    <a:bodyPr/>
+                    <a:lstStyle/>
+                    <a:p>
+                      <a:r>
+                        <a:rPr sz="1100">
+                          <a:solidFill>
+                            <a:srgbClr val="3D424E"/>
+                          </a:solidFill>
+                        </a:rPr>
+                        <a:t>Madras LAFTR 2018, Sagawa Group DRO 2020</a:t>
+                      </a:r>
+                    </a:p>
+                  </a:txBody>
+                  <a:tcPr/>
+                </a:tc>
+              </a:tr>
+              <a:tr h="365760">
+                <a:tc>
+                  <a:txBody>
+                    <a:bodyPr/>
+                    <a:lstStyle/>
+                    <a:p>
+                      <a:r>
+                        <a:rPr sz="1100">
+                          <a:solidFill>
+                            <a:srgbClr val="3D424E"/>
+                          </a:solidFill>
+                        </a:rPr>
+                        <a:t>E — Auditoria e Surveys</a:t>
+                      </a:r>
+                    </a:p>
+                  </a:txBody>
+                  <a:tcPr/>
+                </a:tc>
+                <a:tc>
+                  <a:txBody>
+                    <a:bodyPr/>
+                    <a:lstStyle/>
+                    <a:p>
+                      <a:r>
+                        <a:rPr sz="1100">
+                          <a:solidFill>
+                            <a:srgbClr val="3D424E"/>
+                          </a:solidFill>
+                        </a:rPr>
+                        <a:t>14</a:t>
+                      </a:r>
+                    </a:p>
+                  </a:txBody>
+                  <a:tcPr/>
+                </a:tc>
+                <a:tc>
+                  <a:txBody>
+                    <a:bodyPr/>
+                    <a:lstStyle/>
+                    <a:p>
+                      <a:r>
+                        <a:rPr sz="1100">
+                          <a:solidFill>
+                            <a:srgbClr val="3D424E"/>
+                          </a:solidFill>
+                        </a:rPr>
+                        <a:t>13,5 %</a:t>
+                      </a:r>
+                    </a:p>
+                  </a:txBody>
+                  <a:tcPr/>
+                </a:tc>
+                <a:tc>
+                  <a:txBody>
+                    <a:bodyPr/>
+                    <a:lstStyle/>
+                    <a:p>
+                      <a:r>
+                        <a:rPr sz="1100">
+                          <a:solidFill>
+                            <a:srgbClr val="3D424E"/>
+                          </a:solidFill>
+                        </a:rPr>
+                        <a:t>Buolamwini 2018, Mehrabi 2021 survey</a:t>
+                      </a:r>
+                    </a:p>
+                  </a:txBody>
+                  <a:tcPr/>
+                </a:tc>
+              </a:tr>
+              <a:tr h="365760">
+                <a:tc>
+                  <a:txBody>
+                    <a:bodyPr/>
+                    <a:lstStyle/>
+                    <a:p>
+                      <a:r>
+                        <a:rPr sz="1100">
+                          <a:solidFill>
+                            <a:srgbClr val="3D424E"/>
+                          </a:solidFill>
+                        </a:rPr>
+                        <a:t>F — Fundamentação científica e ética</a:t>
+                      </a:r>
+                    </a:p>
+                  </a:txBody>
+                  <a:tcPr/>
+                </a:tc>
+                <a:tc>
+                  <a:txBody>
+                    <a:bodyPr/>
+                    <a:lstStyle/>
+                    <a:p>
+                      <a:r>
+                        <a:rPr sz="1100">
+                          <a:solidFill>
+                            <a:srgbClr val="3D424E"/>
+                          </a:solidFill>
+                        </a:rPr>
+                        <a:t>3</a:t>
+                      </a:r>
+                    </a:p>
+                  </a:txBody>
+                  <a:tcPr/>
+                </a:tc>
+                <a:tc>
+                  <a:txBody>
+                    <a:bodyPr/>
+                    <a:lstStyle/>
+                    <a:p>
+                      <a:r>
+                        <a:rPr sz="1100">
+                          <a:solidFill>
+                            <a:srgbClr val="3D424E"/>
+                          </a:solidFill>
+                        </a:rPr>
+                        <a:t>2,9 %</a:t>
+                      </a:r>
+                    </a:p>
+                  </a:txBody>
+                  <a:tcPr/>
+                </a:tc>
+                <a:tc>
+                  <a:txBody>
+                    <a:bodyPr/>
+                    <a:lstStyle/>
+                    <a:p>
+                      <a:r>
+                        <a:rPr sz="1100">
+                          <a:solidFill>
+                            <a:srgbClr val="3D424E"/>
+                          </a:solidFill>
+                        </a:rPr>
+                        <a:t>Fuentes AAPA 2019, Lewontin 1972</a:t>
+                      </a:r>
+                    </a:p>
+                  </a:txBody>
+                  <a:tcPr/>
+                </a:tc>
+              </a:tr>
+              <a:tr h="365760">
+                <a:tc>
+                  <a:txBody>
+                    <a:bodyPr/>
+                    <a:lstStyle/>
+                    <a:p>
+                      <a:r>
+                        <a:rPr sz="1100">
+                          <a:solidFill>
+                            <a:srgbClr val="3D424E"/>
+                          </a:solidFill>
+                        </a:rPr>
+                        <a:t>G — Mecanismos ML paradigmáticos</a:t>
+                      </a:r>
+                    </a:p>
+                  </a:txBody>
+                  <a:tcPr/>
+                </a:tc>
+                <a:tc>
+                  <a:txBody>
+                    <a:bodyPr/>
+                    <a:lstStyle/>
+                    <a:p>
+                      <a:r>
+                        <a:rPr sz="1100">
+                          <a:solidFill>
+                            <a:srgbClr val="3D424E"/>
+                          </a:solidFill>
+                        </a:rPr>
+                        <a:t>9</a:t>
+                      </a:r>
+                    </a:p>
+                  </a:txBody>
+                  <a:tcPr/>
+                </a:tc>
+                <a:tc>
+                  <a:txBody>
+                    <a:bodyPr/>
+                    <a:lstStyle/>
+                    <a:p>
+                      <a:r>
+                        <a:rPr sz="1100">
+                          <a:solidFill>
+                            <a:srgbClr val="3D424E"/>
+                          </a:solidFill>
+                        </a:rPr>
+                        <a:t>8,7 %</a:t>
+                      </a:r>
+                    </a:p>
+                  </a:txBody>
+                  <a:tcPr/>
+                </a:tc>
+                <a:tc>
+                  <a:txBody>
+                    <a:bodyPr/>
+                    <a:lstStyle/>
+                    <a:p>
+                      <a:r>
+                        <a:rPr sz="1100">
+                          <a:solidFill>
+                            <a:srgbClr val="3D424E"/>
+                          </a:solidFill>
+                        </a:rPr>
+                        <a:t>Perez FiLM 2018, Ba LayerNorm, He ResNet</a:t>
+                      </a:r>
+                    </a:p>
+                  </a:txBody>
+                  <a:tcPr/>
+                </a:tc>
+              </a:tr>
+              <a:tr h="365760">
+                <a:tc>
+                  <a:txBody>
+                    <a:bodyPr/>
+                    <a:lstStyle/>
+                    <a:p>
+                      <a:r>
+                        <a:rPr sz="1100">
+                          <a:solidFill>
+                            <a:srgbClr val="3D424E"/>
+                          </a:solidFill>
+                        </a:rPr>
+                        <a:t>I — VLM / CLIP em fairness</a:t>
+                      </a:r>
+                    </a:p>
+                  </a:txBody>
+                  <a:tcPr/>
+                </a:tc>
+                <a:tc>
+                  <a:txBody>
+                    <a:bodyPr/>
+                    <a:lstStyle/>
+                    <a:p>
+                      <a:r>
+                        <a:rPr sz="1100">
+                          <a:solidFill>
+                            <a:srgbClr val="3D424E"/>
+                          </a:solidFill>
+                        </a:rPr>
+                        <a:t>14</a:t>
+                      </a:r>
+                    </a:p>
+                  </a:txBody>
+                  <a:tcPr/>
+                </a:tc>
+                <a:tc>
+                  <a:txBody>
+                    <a:bodyPr/>
+                    <a:lstStyle/>
+                    <a:p>
+                      <a:r>
+                        <a:rPr sz="1100">
+                          <a:solidFill>
+                            <a:srgbClr val="3D424E"/>
+                          </a:solidFill>
+                        </a:rPr>
+                        <a:t>13,5 %</a:t>
+                      </a:r>
+                    </a:p>
+                  </a:txBody>
+                  <a:tcPr/>
+                </a:tc>
+                <a:tc>
+                  <a:txBody>
+                    <a:bodyPr/>
+                    <a:lstStyle/>
+                    <a:p>
+                      <a:r>
+                        <a:rPr sz="1100">
+                          <a:solidFill>
+                            <a:srgbClr val="3D424E"/>
+                          </a:solidFill>
+                        </a:rPr>
+                        <a:t>Radford CLIP 2021, Luo FairCLIP 2024</a:t>
+                      </a:r>
+                    </a:p>
+                  </a:txBody>
+                  <a:tcPr/>
+                </a:tc>
+              </a:tr>
+              <a:tr h="365760">
+                <a:tc>
+                  <a:txBody>
+                    <a:bodyPr/>
+                    <a:lstStyle/>
+                    <a:p>
+                      <a:r>
+                        <a:rPr sz="1100">
+                          <a:solidFill>
+                            <a:srgbClr val="3D424E"/>
+                          </a:solidFill>
+                        </a:rPr>
+                        <a:t>J — Conditioning moderno</a:t>
+                      </a:r>
+                    </a:p>
+                  </a:txBody>
+                  <a:tcPr/>
+                </a:tc>
+                <a:tc>
+                  <a:txBody>
+                    <a:bodyPr/>
+                    <a:lstStyle/>
+                    <a:p>
+                      <a:r>
+                        <a:rPr sz="1100">
+                          <a:solidFill>
+                            <a:srgbClr val="3D424E"/>
+                          </a:solidFill>
+                        </a:rPr>
+                        <a:t>5</a:t>
+                      </a:r>
+                    </a:p>
+                  </a:txBody>
+                  <a:tcPr/>
+                </a:tc>
+                <a:tc>
+                  <a:txBody>
+                    <a:bodyPr/>
+                    <a:lstStyle/>
+                    <a:p>
+                      <a:r>
+                        <a:rPr sz="1100">
+                          <a:solidFill>
+                            <a:srgbClr val="3D424E"/>
+                          </a:solidFill>
+                        </a:rPr>
+                        <a:t>4,8 %</a:t>
+                      </a:r>
+                    </a:p>
+                  </a:txBody>
+                  <a:tcPr/>
+                </a:tc>
+                <a:tc>
+                  <a:txBody>
+                    <a:bodyPr/>
+                    <a:lstStyle/>
+                    <a:p>
+                      <a:r>
+                        <a:rPr sz="1100">
+                          <a:solidFill>
+                            <a:srgbClr val="3D424E"/>
+                          </a:solidFill>
+                        </a:rPr>
+                        <a:t>Liu ConvNeXt 2022, Dhariwal ADM 2021</a:t>
+                      </a:r>
+                    </a:p>
+                  </a:txBody>
+                  <a:tcPr/>
+                </a:tc>
+              </a:tr>
+              <a:tr h="365760">
+                <a:tc>
+                  <a:txBody>
+                    <a:bodyPr/>
+                    <a:lstStyle/>
+                    <a:p>
+                      <a:r>
+                        <a:rPr sz="1100">
+                          <a:solidFill>
+                            <a:srgbClr val="3D424E"/>
+                          </a:solidFill>
+                        </a:rPr>
+                        <a:t>K — Fundadores de FR (DeepFace, ArcFace, CosFace)</a:t>
+                      </a:r>
+                    </a:p>
+                  </a:txBody>
+                  <a:tcPr/>
+                </a:tc>
+                <a:tc>
+                  <a:txBody>
+                    <a:bodyPr/>
+                    <a:lstStyle/>
+                    <a:p>
+                      <a:r>
+                        <a:rPr sz="1100">
+                          <a:solidFill>
+                            <a:srgbClr val="3D424E"/>
+                          </a:solidFill>
+                        </a:rPr>
+                        <a:t>6</a:t>
+                      </a:r>
+                    </a:p>
+                  </a:txBody>
+                  <a:tcPr/>
+                </a:tc>
+                <a:tc>
+                  <a:txBody>
+                    <a:bodyPr/>
+                    <a:lstStyle/>
+                    <a:p>
+                      <a:r>
+                        <a:rPr sz="1100">
+                          <a:solidFill>
+                            <a:srgbClr val="3D424E"/>
+                          </a:solidFill>
+                        </a:rPr>
+                        <a:t>5,8 %</a:t>
+                      </a:r>
+                    </a:p>
+                  </a:txBody>
+                  <a:tcPr/>
+                </a:tc>
+                <a:tc>
+                  <a:txBody>
+                    <a:bodyPr/>
+                    <a:lstStyle/>
+                    <a:p>
+                      <a:r>
+                        <a:rPr sz="1100">
+                          <a:solidFill>
+                            <a:srgbClr val="3D424E"/>
+                          </a:solidFill>
+                        </a:rPr>
+                        <a:t>Taigman DeepFace 2014, Wang CosFace 2018</a:t>
+                      </a:r>
+                    </a:p>
+                  </a:txBody>
+                  <a:tcPr/>
+                </a:tc>
+              </a:tr>
+              <a:tr h="365760">
+                <a:tc>
+                  <a:txBody>
+                    <a:bodyPr/>
+                    <a:lstStyle/>
+                    <a:p>
+                      <a:r>
+                        <a:rPr sz="1100">
+                          <a:solidFill>
+                            <a:srgbClr val="3D424E"/>
+                          </a:solidFill>
+                        </a:rPr>
+                        <a:t>L — Auxiliar / complementar</a:t>
+                      </a:r>
+                    </a:p>
+                  </a:txBody>
+                  <a:tcPr/>
+                </a:tc>
+                <a:tc>
+                  <a:txBody>
+                    <a:bodyPr/>
+                    <a:lstStyle/>
+                    <a:p>
+                      <a:r>
+                        <a:rPr sz="1100">
+                          <a:solidFill>
+                            <a:srgbClr val="3D424E"/>
+                          </a:solidFill>
+                        </a:rPr>
+                        <a:t>13</a:t>
+                      </a:r>
+                    </a:p>
+                  </a:txBody>
+                  <a:tcPr/>
+                </a:tc>
+                <a:tc>
+                  <a:txBody>
+                    <a:bodyPr/>
+                    <a:lstStyle/>
+                    <a:p>
+                      <a:r>
+                        <a:rPr sz="1100">
+                          <a:solidFill>
+                            <a:srgbClr val="3D424E"/>
+                          </a:solidFill>
+                        </a:rPr>
+                        <a:t>12,5 %</a:t>
+                      </a:r>
+                    </a:p>
+                  </a:txBody>
+                  <a:tcPr/>
+                </a:tc>
+                <a:tc>
+                  <a:txBody>
+                    <a:bodyPr/>
+                    <a:lstStyle/>
+                    <a:p>
+                      <a:r>
+                        <a:rPr sz="1100">
+                          <a:solidFill>
+                            <a:srgbClr val="3D424E"/>
+                          </a:solidFill>
+                        </a:rPr>
+                        <a:t>Karkkainen datasets, Hendrycks robustness</a:t>
+                      </a:r>
+                    </a:p>
+                  </a:txBody>
+                  <a:tcPr/>
+                </a:tc>
+              </a:tr>
+              <a:tr h="365760">
+                <a:tc>
+                  <a:txBody>
+                    <a:bodyPr/>
+                    <a:lstStyle/>
+                    <a:p>
+                      <a:r>
+                        <a:rPr sz="1100">
+                          <a:solidFill>
+                            <a:srgbClr val="3D424E"/>
+                          </a:solidFill>
+                        </a:rPr>
+                        <a:t>R8 — Diversidade Latinx (antropo + genética + socio)</a:t>
+                      </a:r>
+                    </a:p>
+                  </a:txBody>
+                  <a:tcPr/>
+                </a:tc>
+                <a:tc>
+                  <a:txBody>
+                    <a:bodyPr/>
+                    <a:lstStyle/>
+                    <a:p>
+                      <a:r>
+                        <a:rPr sz="1100">
+                          <a:solidFill>
+                            <a:srgbClr val="3D424E"/>
+                          </a:solidFill>
+                        </a:rPr>
+                        <a:t>3</a:t>
+                      </a:r>
+                    </a:p>
+                  </a:txBody>
+                  <a:tcPr/>
+                </a:tc>
+                <a:tc>
+                  <a:txBody>
+                    <a:bodyPr/>
+                    <a:lstStyle/>
+                    <a:p>
+                      <a:r>
+                        <a:rPr sz="1100">
+                          <a:solidFill>
+                            <a:srgbClr val="3D424E"/>
+                          </a:solidFill>
+                        </a:rPr>
+                        <a:t>2,9 %</a:t>
+                      </a:r>
+                    </a:p>
+                  </a:txBody>
+                  <a:tcPr/>
+                </a:tc>
+                <a:tc>
+                  <a:txBody>
+                    <a:bodyPr/>
+                    <a:lstStyle/>
+                    <a:p>
+                      <a:r>
+                        <a:rPr sz="1100">
+                          <a:solidFill>
+                            <a:srgbClr val="3D424E"/>
+                          </a:solidFill>
+                        </a:rPr>
+                        <a:t>Telles 2014, Bryc 2015, Pew 2017</a:t>
+                      </a:r>
+                    </a:p>
+                  </a:txBody>
+                  <a:tcPr/>
+                </a:tc>
+              </a:tr>
+            </a:tbl>
+          </a:graphicData>
+        </a:graphic>
+      </p:graphicFrame>
+      <p:sp>
+        <p:nvSpPr>
+          <p:cNvPr id="5" name="TextBox 4"/>
+          <p:cNvSpPr txBox="1"/>
+          <p:nvPr/>
+        </p:nvSpPr>
+        <p:spPr>
+          <a:xfrm>
+            <a:off x="457200" y="6446520"/>
+            <a:ext cx="11430000" cy="365760"/>
+          </a:xfrm>
+          <a:prstGeom prst="rect">
+            <a:avLst/>
+          </a:prstGeom>
+          <a:noFill/>
+        </p:spPr>
+        <p:txBody>
+          <a:bodyPr wrap="none">
+            <a:spAutoFit/>
+          </a:bodyPr>
+          <a:lstStyle/>
+          <a:p>
+            <a:pPr>
+              <a:defRPr sz="1000" i="1">
+                <a:solidFill>
+                  <a:srgbClr val="707682"/>
+                </a:solidFill>
+              </a:defRPr>
+            </a:pPr>
+            <a:r>
+              <a:t>Corpus preparado ao longo de 8 rodadas de expansão. 99 % das fichas verified via leitura direta do PDF.</a:t>
+            </a:r>
+          </a:p>
+        </p:txBody>
+      </p:sp>
+    </p:spTree>
+  </p:cSld>
+  <p:clrMapOvr>
+    <a:masterClrMapping/>
+  </p:clrMapOvr>
+</p:sld>
+</file>
+
+<file path=ppt/slides/slide5.xml><?xml version="1.0" encoding="utf-8"?>
+<p:sld xmlns:a="http://schemas.openxmlformats.org/drawingml/2006/main" xmlns:p="http://schemas.openxmlformats.org/presentationml/2006/main" xmlns:r="http://schemas.openxmlformats.org/officeDocument/2006/relationships">
+  <p:cSld>
+    <p:spTree>
+      <p:nvGrpSpPr>
+        <p:cNvPr id="1" name=""/>
+        <p:cNvGrpSpPr/>
+        <p:nvPr/>
+      </p:nvGrpSpPr>
+      <p:grpSpPr/>
+      <p:sp>
+        <p:nvSpPr>
+          <p:cNvPr id="2" name="TextBox 1"/>
+          <p:cNvSpPr txBox="1"/>
+          <p:nvPr/>
+        </p:nvSpPr>
+        <p:spPr>
+          <a:xfrm>
+            <a:off x="457200" y="365760"/>
+            <a:ext cx="11430000" cy="822960"/>
+          </a:xfrm>
+          <a:prstGeom prst="rect">
+            <a:avLst/>
+          </a:prstGeom>
+          <a:noFill/>
+        </p:spPr>
+        <p:txBody>
+          <a:bodyPr wrap="square">
+            <a:spAutoFit/>
+          </a:bodyPr>
+          <a:lstStyle/>
+          <a:p>
+            <a:pPr>
+              <a:defRPr sz="2600" b="1">
+                <a:solidFill>
+                  <a:srgbClr val="1F2A4E"/>
+                </a:solidFill>
+              </a:defRPr>
+            </a:pPr>
+            <a:r>
+              <a:t>Densidade do corpus — distribuição temporal</a:t>
+            </a:r>
+          </a:p>
+        </p:txBody>
+      </p:sp>
+      <p:sp>
+        <p:nvSpPr>
+          <p:cNvPr id="3" name="Rectangle 2"/>
+          <p:cNvSpPr/>
+          <p:nvPr/>
+        </p:nvSpPr>
+        <p:spPr>
+          <a:xfrm>
+            <a:off x="457200" y="1143000"/>
+            <a:ext cx="11430000" cy="36576"/>
+          </a:xfrm>
+          <a:prstGeom prst="rect">
+            <a:avLst/>
+          </a:prstGeom>
+          <a:solidFill>
+            <a:srgbClr val="1F2A4E"/>
+          </a:solidFill>
+          <a:ln>
+            <a:noFill/>
+          </a:ln>
+        </p:spPr>
+        <p:style>
+          <a:lnRef idx="1">
+            <a:schemeClr val="accent1"/>
+          </a:lnRef>
+          <a:fillRef idx="3">
+            <a:schemeClr val="accent1"/>
+          </a:fillRef>
+          <a:effectRef idx="2">
+            <a:schemeClr val="accent1"/>
+          </a:effectRef>
+          <a:fontRef idx="minor">
+            <a:schemeClr val="lt1"/>
+          </a:fontRef>
+        </p:style>
+        <p:txBody>
+          <a:bodyPr rtlCol="0" anchor="ctr"/>
+          <a:lstStyle/>
+          <a:p>
+            <a:pPr algn="ctr"/>
+          </a:p>
+        </p:txBody>
+      </p:sp>
+      <p:graphicFrame>
+        <p:nvGraphicFramePr>
+          <p:cNvPr id="4" name="Table 3"/>
+          <p:cNvGraphicFramePr>
+            <a:graphicFrameLocks noGrp="1"/>
+          </p:cNvGraphicFramePr>
+          <p:nvPr/>
+        </p:nvGraphicFramePr>
+        <p:xfrm>
+          <a:off x="457200" y="1371600"/>
+          <a:ext cx="11430000" cy="4754880"/>
+        </p:xfrm>
+        <a:graphic>
+          <a:graphicData uri="http://schemas.openxmlformats.org/drawingml/2006/table">
+            <a:tbl>
+              <a:tblPr firstRow="1" bandRow="1">
+                <a:tableStyleId>{5C22544A-7EE6-4342-B048-85BDC9FD1C3A}</a:tableStyleId>
+              </a:tblPr>
+              <a:tblGrid>
+                <a:gridCol w="3657600"/>
+                <a:gridCol w="1097280"/>
+                <a:gridCol w="1188720"/>
+                <a:gridCol w="5486400"/>
+              </a:tblGrid>
+              <a:tr h="679268">
+                <a:tc>
+                  <a:txBody>
+                    <a:bodyPr/>
+                    <a:lstStyle/>
+                    <a:p>
+                      <a:r>
+                        <a:rPr sz="1300" b="1">
+                          <a:solidFill>
+                            <a:srgbClr val="FFFFFF"/>
+                          </a:solidFill>
+                        </a:rPr>
+                        <a:t>Período</a:t>
+                      </a:r>
+                    </a:p>
+                  </a:txBody>
+                  <a:tcPr>
+                    <a:solidFill>
+                      <a:srgbClr val="1F2A4E"/>
+                    </a:solidFill>
+                  </a:tcPr>
+                </a:tc>
+                <a:tc>
+                  <a:txBody>
+                    <a:bodyPr/>
+                    <a:lstStyle/>
+                    <a:p>
+                      <a:r>
+                        <a:rPr sz="1300" b="1">
+                          <a:solidFill>
+                            <a:srgbClr val="FFFFFF"/>
+                          </a:solidFill>
+                        </a:rPr>
+                        <a:t>N fichas</a:t>
+                      </a:r>
+                    </a:p>
+                  </a:txBody>
+                  <a:tcPr>
+                    <a:solidFill>
+                      <a:srgbClr val="1F2A4E"/>
+                    </a:solidFill>
+                  </a:tcPr>
+                </a:tc>
+                <a:tc>
+                  <a:txBody>
+                    <a:bodyPr/>
+                    <a:lstStyle/>
+                    <a:p>
+                      <a:r>
+                        <a:rPr sz="1300" b="1">
+                          <a:solidFill>
+                            <a:srgbClr val="FFFFFF"/>
+                          </a:solidFill>
+                        </a:rPr>
+                        <a:t>% corpus</a:t>
+                      </a:r>
+                    </a:p>
+                  </a:txBody>
+                  <a:tcPr>
+                    <a:solidFill>
+                      <a:srgbClr val="1F2A4E"/>
+                    </a:solidFill>
+                  </a:tcPr>
+                </a:tc>
+                <a:tc>
+                  <a:txBody>
+                    <a:bodyPr/>
+                    <a:lstStyle/>
+                    <a:p>
+                      <a:r>
+                        <a:rPr sz="1300" b="1">
+                          <a:solidFill>
+                            <a:srgbClr val="FFFFFF"/>
+                          </a:solidFill>
+                        </a:rPr>
+                        <a:t>Papel na tese</a:t>
+                      </a:r>
+                    </a:p>
+                  </a:txBody>
+                  <a:tcPr>
+                    <a:solidFill>
+                      <a:srgbClr val="1F2A4E"/>
+                    </a:solidFill>
+                  </a:tcPr>
+                </a:tc>
+              </a:tr>
+              <a:tr h="679268">
+                <a:tc>
+                  <a:txBody>
+                    <a:bodyPr/>
+                    <a:lstStyle/>
+                    <a:p>
+                      <a:r>
+                        <a:rPr sz="1100">
+                          <a:solidFill>
+                            <a:srgbClr val="3D424E"/>
+                          </a:solidFill>
+                        </a:rPr>
+                        <a:t>Pré-2015 (fundações históricas)</a:t>
+                      </a:r>
+                    </a:p>
+                  </a:txBody>
+                  <a:tcPr/>
+                </a:tc>
+                <a:tc>
+                  <a:txBody>
+                    <a:bodyPr/>
+                    <a:lstStyle/>
+                    <a:p>
+                      <a:r>
+                        <a:rPr sz="1100">
+                          <a:solidFill>
+                            <a:srgbClr val="3D424E"/>
+                          </a:solidFill>
+                        </a:rPr>
+                        <a:t>5</a:t>
+                      </a:r>
+                    </a:p>
+                  </a:txBody>
+                  <a:tcPr/>
+                </a:tc>
+                <a:tc>
+                  <a:txBody>
+                    <a:bodyPr/>
+                    <a:lstStyle/>
+                    <a:p>
+                      <a:r>
+                        <a:rPr sz="1100">
+                          <a:solidFill>
+                            <a:srgbClr val="3D424E"/>
+                          </a:solidFill>
+                        </a:rPr>
+                        <a:t>4,8 %</a:t>
+                      </a:r>
+                    </a:p>
+                  </a:txBody>
+                  <a:tcPr/>
+                </a:tc>
+                <a:tc>
+                  <a:txBody>
+                    <a:bodyPr/>
+                    <a:lstStyle/>
+                    <a:p>
+                      <a:r>
+                        <a:rPr sz="1100">
+                          <a:solidFill>
+                            <a:srgbClr val="3D424E"/>
+                          </a:solidFill>
+                        </a:rPr>
+                        <a:t>Lewontin 1972, Taigman DeepFace 2014, Telles 2014 — fundamentam OG</a:t>
+                      </a:r>
+                    </a:p>
+                  </a:txBody>
+                  <a:tcPr/>
+                </a:tc>
+              </a:tr>
+              <a:tr h="679268">
+                <a:tc>
+                  <a:txBody>
+                    <a:bodyPr/>
+                    <a:lstStyle/>
+                    <a:p>
+                      <a:r>
+                        <a:rPr sz="1100">
+                          <a:solidFill>
+                            <a:srgbClr val="3D424E"/>
+                          </a:solidFill>
+                        </a:rPr>
+                        <a:t>2015-2017 (fairness formal)</a:t>
+                      </a:r>
+                    </a:p>
+                  </a:txBody>
+                  <a:tcPr/>
+                </a:tc>
+                <a:tc>
+                  <a:txBody>
+                    <a:bodyPr/>
+                    <a:lstStyle/>
+                    <a:p>
+                      <a:r>
+                        <a:rPr sz="1100">
+                          <a:solidFill>
+                            <a:srgbClr val="3D424E"/>
+                          </a:solidFill>
+                        </a:rPr>
+                        <a:t>6</a:t>
+                      </a:r>
+                    </a:p>
+                  </a:txBody>
+                  <a:tcPr/>
+                </a:tc>
+                <a:tc>
+                  <a:txBody>
+                    <a:bodyPr/>
+                    <a:lstStyle/>
+                    <a:p>
+                      <a:r>
+                        <a:rPr sz="1100">
+                          <a:solidFill>
+                            <a:srgbClr val="3D424E"/>
+                          </a:solidFill>
+                        </a:rPr>
+                        <a:t>5,8 %</a:t>
+                      </a:r>
+                    </a:p>
+                  </a:txBody>
+                  <a:tcPr/>
+                </a:tc>
+                <a:tc>
+                  <a:txBody>
+                    <a:bodyPr/>
+                    <a:lstStyle/>
+                    <a:p>
+                      <a:r>
+                        <a:rPr sz="1100">
+                          <a:solidFill>
+                            <a:srgbClr val="3D424E"/>
+                          </a:solidFill>
+                        </a:rPr>
+                        <a:t>Hardt 2016 (Equal Opportunity), Kleinberg 2017 (impossibility)</a:t>
+                      </a:r>
+                    </a:p>
+                  </a:txBody>
+                  <a:tcPr/>
+                </a:tc>
+              </a:tr>
+              <a:tr h="679268">
+                <a:tc>
+                  <a:txBody>
+                    <a:bodyPr/>
+                    <a:lstStyle/>
+                    <a:p>
+                      <a:r>
+                        <a:rPr sz="1100">
+                          <a:solidFill>
+                            <a:srgbClr val="3D424E"/>
+                          </a:solidFill>
+                        </a:rPr>
+                        <a:t>2018-2020 (marcos canônicos)</a:t>
+                      </a:r>
+                    </a:p>
+                  </a:txBody>
+                  <a:tcPr/>
+                </a:tc>
+                <a:tc>
+                  <a:txBody>
+                    <a:bodyPr/>
+                    <a:lstStyle/>
+                    <a:p>
+                      <a:r>
+                        <a:rPr sz="1100">
+                          <a:solidFill>
+                            <a:srgbClr val="3D424E"/>
+                          </a:solidFill>
+                        </a:rPr>
+                        <a:t>14</a:t>
+                      </a:r>
+                    </a:p>
+                  </a:txBody>
+                  <a:tcPr/>
+                </a:tc>
+                <a:tc>
+                  <a:txBody>
+                    <a:bodyPr/>
+                    <a:lstStyle/>
+                    <a:p>
+                      <a:r>
+                        <a:rPr sz="1100">
+                          <a:solidFill>
+                            <a:srgbClr val="3D424E"/>
+                          </a:solidFill>
+                        </a:rPr>
+                        <a:t>13,5 %</a:t>
+                      </a:r>
+                    </a:p>
+                  </a:txBody>
+                  <a:tcPr/>
+                </a:tc>
+                <a:tc>
+                  <a:txBody>
+                    <a:bodyPr/>
+                    <a:lstStyle/>
+                    <a:p>
+                      <a:r>
+                        <a:rPr sz="1100">
+                          <a:solidFill>
+                            <a:srgbClr val="3D424E"/>
+                          </a:solidFill>
+                        </a:rPr>
+                        <a:t>Perez FiLM 2018, Buolamwini 2018, Madras LAFTR 2018</a:t>
+                      </a:r>
+                    </a:p>
+                  </a:txBody>
+                  <a:tcPr/>
+                </a:tc>
+              </a:tr>
+              <a:tr h="679268">
+                <a:tc>
+                  <a:txBody>
+                    <a:bodyPr/>
+                    <a:lstStyle/>
+                    <a:p>
+                      <a:r>
+                        <a:rPr sz="1100">
+                          <a:solidFill>
+                            <a:srgbClr val="3D424E"/>
+                          </a:solidFill>
+                        </a:rPr>
+                        <a:t>2021-2022 (state of the art anterior)</a:t>
+                      </a:r>
+                    </a:p>
+                  </a:txBody>
+                  <a:tcPr/>
+                </a:tc>
+                <a:tc>
+                  <a:txBody>
+                    <a:bodyPr/>
+                    <a:lstStyle/>
+                    <a:p>
+                      <a:r>
+                        <a:rPr sz="1100">
+                          <a:solidFill>
+                            <a:srgbClr val="3D424E"/>
+                          </a:solidFill>
+                        </a:rPr>
+                        <a:t>17</a:t>
+                      </a:r>
+                    </a:p>
+                  </a:txBody>
+                  <a:tcPr/>
+                </a:tc>
+                <a:tc>
+                  <a:txBody>
+                    <a:bodyPr/>
+                    <a:lstStyle/>
+                    <a:p>
+                      <a:r>
+                        <a:rPr sz="1100">
+                          <a:solidFill>
+                            <a:srgbClr val="3D424E"/>
+                          </a:solidFill>
+                        </a:rPr>
+                        <a:t>16,3 %</a:t>
+                      </a:r>
+                    </a:p>
+                  </a:txBody>
+                  <a:tcPr/>
+                </a:tc>
+                <a:tc>
+                  <a:txBody>
+                    <a:bodyPr/>
+                    <a:lstStyle/>
+                    <a:p>
+                      <a:r>
+                        <a:rPr sz="1100">
+                          <a:solidFill>
+                            <a:srgbClr val="3D424E"/>
+                          </a:solidFill>
+                        </a:rPr>
+                        <a:t>Radford CLIP 2021, Kärkkäinen FairFace 2021, Liu ConvNeXt 2022</a:t>
+                      </a:r>
+                    </a:p>
+                  </a:txBody>
+                  <a:tcPr/>
+                </a:tc>
+              </a:tr>
+              <a:tr h="679268">
+                <a:tc>
+                  <a:txBody>
+                    <a:bodyPr/>
+                    <a:lstStyle/>
+                    <a:p>
+                      <a:r>
+                        <a:rPr sz="1100">
+                          <a:solidFill>
+                            <a:srgbClr val="3D424E"/>
+                          </a:solidFill>
+                        </a:rPr>
+                        <a:t>2023 (contexto imediato)</a:t>
+                      </a:r>
+                    </a:p>
+                  </a:txBody>
+                  <a:tcPr/>
+                </a:tc>
+                <a:tc>
+                  <a:txBody>
+                    <a:bodyPr/>
+                    <a:lstStyle/>
+                    <a:p>
+                      <a:r>
+                        <a:rPr sz="1100">
+                          <a:solidFill>
+                            <a:srgbClr val="3D424E"/>
+                          </a:solidFill>
+                        </a:rPr>
+                        <a:t>5</a:t>
+                      </a:r>
+                    </a:p>
+                  </a:txBody>
+                  <a:tcPr/>
+                </a:tc>
+                <a:tc>
+                  <a:txBody>
+                    <a:bodyPr/>
+                    <a:lstStyle/>
+                    <a:p>
+                      <a:r>
+                        <a:rPr sz="1100">
+                          <a:solidFill>
+                            <a:srgbClr val="3D424E"/>
+                          </a:solidFill>
+                        </a:rPr>
+                        <a:t>4,8 %</a:t>
+                      </a:r>
+                    </a:p>
+                  </a:txBody>
+                  <a:tcPr/>
+                </a:tc>
+                <a:tc>
+                  <a:txBody>
+                    <a:bodyPr/>
+                    <a:lstStyle/>
+                    <a:p>
+                      <a:r>
+                        <a:rPr sz="1100">
+                          <a:solidFill>
+                            <a:srgbClr val="3D424E"/>
+                          </a:solidFill>
+                        </a:rPr>
+                        <a:t>Schumann MST-E, Pangelinan (refutação central)</a:t>
+                      </a:r>
+                    </a:p>
+                  </a:txBody>
+                  <a:tcPr/>
+                </a:tc>
+              </a:tr>
+              <a:tr h="679272">
+                <a:tc>
+                  <a:txBody>
+                    <a:bodyPr/>
+                    <a:lstStyle/>
+                    <a:p>
+                      <a:r>
+                        <a:rPr sz="1100">
+                          <a:solidFill>
+                            <a:srgbClr val="3D424E"/>
+                          </a:solidFill>
+                        </a:rPr>
+                        <a:t>2024-2026 (fronteira)</a:t>
+                      </a:r>
+                    </a:p>
+                  </a:txBody>
+                  <a:tcPr>
+                    <a:solidFill>
+                      <a:srgbClr val="E8EAED"/>
+                    </a:solidFill>
+                  </a:tcPr>
+                </a:tc>
+                <a:tc>
+                  <a:txBody>
+                    <a:bodyPr/>
+                    <a:lstStyle/>
+                    <a:p>
+                      <a:r>
+                        <a:rPr sz="1100">
+                          <a:solidFill>
+                            <a:srgbClr val="3D424E"/>
+                          </a:solidFill>
+                        </a:rPr>
+                        <a:t>55</a:t>
+                      </a:r>
+                    </a:p>
+                  </a:txBody>
+                  <a:tcPr>
+                    <a:solidFill>
+                      <a:srgbClr val="E8EAED"/>
+                    </a:solidFill>
+                  </a:tcPr>
+                </a:tc>
+                <a:tc>
+                  <a:txBody>
+                    <a:bodyPr/>
+                    <a:lstStyle/>
+                    <a:p>
+                      <a:r>
+                        <a:rPr sz="1100">
+                          <a:solidFill>
+                            <a:srgbClr val="3D424E"/>
+                          </a:solidFill>
+                        </a:rPr>
+                        <a:t>52,9 %</a:t>
+                      </a:r>
+                    </a:p>
+                  </a:txBody>
+                  <a:tcPr>
+                    <a:solidFill>
+                      <a:srgbClr val="E8EAED"/>
+                    </a:solidFill>
+                  </a:tcPr>
+                </a:tc>
+                <a:tc>
+                  <a:txBody>
+                    <a:bodyPr/>
+                    <a:lstStyle/>
+                    <a:p>
+                      <a:r>
+                        <a:rPr sz="1100">
+                          <a:solidFill>
+                            <a:srgbClr val="3D424E"/>
+                          </a:solidFill>
+                        </a:rPr>
+                        <a:t>AlDahoul 2024, Luo FairCLIP 2024, Pereira SkinToneNet 2026</a:t>
+                      </a:r>
+                    </a:p>
+                  </a:txBody>
+                  <a:tcPr>
+                    <a:solidFill>
+                      <a:srgbClr val="E8EAED"/>
+                    </a:solidFill>
+                  </a:tcPr>
+                </a:tc>
+              </a:tr>
+            </a:tbl>
+          </a:graphicData>
+        </a:graphic>
+      </p:graphicFrame>
+      <p:sp>
+        <p:nvSpPr>
+          <p:cNvPr id="5" name="TextBox 4"/>
+          <p:cNvSpPr txBox="1"/>
+          <p:nvPr/>
+        </p:nvSpPr>
+        <p:spPr>
+          <a:xfrm>
+            <a:off x="457200" y="6446520"/>
+            <a:ext cx="11430000" cy="365760"/>
+          </a:xfrm>
+          <a:prstGeom prst="rect">
+            <a:avLst/>
+          </a:prstGeom>
+          <a:noFill/>
+        </p:spPr>
+        <p:txBody>
+          <a:bodyPr wrap="none">
+            <a:spAutoFit/>
+          </a:bodyPr>
+          <a:lstStyle/>
+          <a:p>
+            <a:pPr>
+              <a:defRPr sz="1000" i="1">
+                <a:solidFill>
+                  <a:srgbClr val="707682"/>
+                </a:solidFill>
+              </a:defRPr>
+            </a:pPr>
+            <a:r>
+              <a:t>Mais de metade do corpus é 2024+. Cinco papers 2026 sustentam o argumento de trabalho na fronteira.</a:t>
+            </a:r>
+          </a:p>
+        </p:txBody>
+      </p:sp>
+    </p:spTree>
+  </p:cSld>
+  <p:clrMapOvr>
+    <a:masterClrMapping/>
+  </p:clrMapOvr>
+</p:sld>
+</file>
+
+<file path=ppt/slides/slide6.xml><?xml version="1.0" encoding="utf-8"?>
 <p:sld xmlns:a="http://schemas.openxmlformats.org/drawingml/2006/main" xmlns:p="http://schemas.openxmlformats.org/presentationml/2006/main" xmlns:r="http://schemas.openxmlformats.org/officeDocument/2006/relationships">
   <p:cSld>
     <p:spTree>
@@ -6277,7 +10763,7 @@
               </a:defRPr>
             </a:pPr>
             <a:r>
-              <a:t>Plano de trabalho consolidado</a:t>
+              <a:t>Plano até a defesa</a:t>
             </a:r>
           </a:p>
           <a:p>
@@ -6289,7 +10775,7 @@
               </a:defRPr>
             </a:pPr>
             <a:r>
-              <a:t>Três marcos formais no horizonte</a:t>
+              <a:t>Três marcos formais, novo horizonte de outubro</a:t>
             </a:r>
           </a:p>
         </p:txBody>
@@ -6302,7 +10788,150 @@
 </p:sld>
 </file>
 
-<file path=ppt/slides/slide4.xml><?xml version="1.0" encoding="utf-8"?>
+<file path=ppt/slides/slide7.xml><?xml version="1.0" encoding="utf-8"?>
+<p:sld xmlns:a="http://schemas.openxmlformats.org/drawingml/2006/main" xmlns:p="http://schemas.openxmlformats.org/presentationml/2006/main" xmlns:r="http://schemas.openxmlformats.org/officeDocument/2006/relationships">
+  <p:cSld>
+    <p:spTree>
+      <p:nvGrpSpPr>
+        <p:cNvPr id="1" name=""/>
+        <p:cNvGrpSpPr/>
+        <p:nvPr/>
+      </p:nvGrpSpPr>
+      <p:grpSpPr/>
+      <p:sp>
+        <p:nvSpPr>
+          <p:cNvPr id="2" name="Rectangle 1"/>
+          <p:cNvSpPr/>
+          <p:nvPr/>
+        </p:nvSpPr>
+        <p:spPr>
+          <a:xfrm>
+            <a:off x="0" y="0"/>
+            <a:ext cx="12188952" cy="6858000"/>
+          </a:xfrm>
+          <a:prstGeom prst="rect">
+            <a:avLst/>
+          </a:prstGeom>
+          <a:solidFill>
+            <a:srgbClr val="1F2A4E"/>
+          </a:solidFill>
+          <a:ln>
+            <a:noFill/>
+          </a:ln>
+        </p:spPr>
+        <p:style>
+          <a:lnRef idx="1">
+            <a:schemeClr val="accent1"/>
+          </a:lnRef>
+          <a:fillRef idx="3">
+            <a:schemeClr val="accent1"/>
+          </a:fillRef>
+          <a:effectRef idx="2">
+            <a:schemeClr val="accent1"/>
+          </a:effectRef>
+          <a:fontRef idx="minor">
+            <a:schemeClr val="lt1"/>
+          </a:fontRef>
+        </p:style>
+        <p:txBody>
+          <a:bodyPr rtlCol="0" anchor="ctr"/>
+          <a:lstStyle/>
+          <a:p>
+            <a:pPr algn="ctr"/>
+          </a:p>
+        </p:txBody>
+      </p:sp>
+      <p:sp>
+        <p:nvSpPr>
+          <p:cNvPr id="3" name="TextBox 2"/>
+          <p:cNvSpPr txBox="1"/>
+          <p:nvPr/>
+        </p:nvSpPr>
+        <p:spPr>
+          <a:xfrm>
+            <a:off x="731520" y="1371600"/>
+            <a:ext cx="2743200" cy="2743200"/>
+          </a:xfrm>
+          <a:prstGeom prst="rect">
+            <a:avLst/>
+          </a:prstGeom>
+          <a:noFill/>
+        </p:spPr>
+        <p:txBody>
+          <a:bodyPr wrap="none">
+            <a:spAutoFit/>
+          </a:bodyPr>
+          <a:lstStyle/>
+          <a:p>
+            <a:pPr>
+              <a:defRPr sz="14000" b="1">
+                <a:solidFill>
+                  <a:srgbClr val="FFFFFF"/>
+                </a:solidFill>
+              </a:defRPr>
+            </a:pPr>
+            <a:r>
+              <a:t>1</a:t>
+            </a:r>
+          </a:p>
+        </p:txBody>
+      </p:sp>
+      <p:sp>
+        <p:nvSpPr>
+          <p:cNvPr id="4" name="TextBox 3"/>
+          <p:cNvSpPr txBox="1"/>
+          <p:nvPr/>
+        </p:nvSpPr>
+        <p:spPr>
+          <a:xfrm>
+            <a:off x="3931920" y="2286000"/>
+            <a:ext cx="7772400" cy="1828800"/>
+          </a:xfrm>
+          <a:prstGeom prst="rect">
+            <a:avLst/>
+          </a:prstGeom>
+          <a:noFill/>
+        </p:spPr>
+        <p:txBody>
+          <a:bodyPr wrap="square">
+            <a:spAutoFit/>
+          </a:bodyPr>
+          <a:lstStyle/>
+          <a:p>
+            <a:pPr>
+              <a:defRPr sz="3600" b="1">
+                <a:solidFill>
+                  <a:srgbClr val="FFFFFF"/>
+                </a:solidFill>
+              </a:defRPr>
+            </a:pPr>
+            <a:r>
+              <a:t>Plano até a defesa</a:t>
+            </a:r>
+          </a:p>
+          <a:p>
+            <a:pPr>
+              <a:defRPr sz="1800">
+                <a:solidFill>
+                  <a:srgbClr val="E8EAED"/>
+                </a:solidFill>
+              </a:defRPr>
+            </a:pPr>
+            <a:r>
+              <a:t>Três marcos formais, novo horizonte de outubro</a:t>
+            </a:r>
+          </a:p>
+        </p:txBody>
+      </p:sp>
+    </p:spTree>
+  </p:cSld>
+  <p:clrMapOvr>
+    <a:masterClrMapping/>
+  </p:clrMapOvr>
+</p:sld>
+</file>
+
+<file path=ppt/slides/slide8.xml><?xml version="1.0" encoding="utf-8"?>
 <p:sld xmlns:a="http://schemas.openxmlformats.org/drawingml/2006/main" xmlns:p="http://schemas.openxmlformats.org/presentationml/2006/main" xmlns:r="http://schemas.openxmlformats.org/officeDocument/2006/relationships">
   <p:cSld>
     <p:spTree>
@@ -6342,7 +10971,7 @@
               </a:defRPr>
             </a:pPr>
             <a:r>
-              <a:t>Três marcos formais</a:t>
+              <a:t>Cronograma consolidado</a:t>
             </a:r>
           </a:p>
         </p:txBody>
@@ -6410,8 +11039,8 @@
               </a:tblPr>
               <a:tblGrid>
                 <a:gridCol w="457200"/>
-                <a:gridCol w="4572000"/>
-                <a:gridCol w="2286000"/>
+                <a:gridCol w="5029200"/>
+                <a:gridCol w="1828800"/>
                 <a:gridCol w="4572000"/>
               </a:tblGrid>
               <a:tr h="1188720">
@@ -6489,7 +11118,7 @@
                             <a:srgbClr val="FFFFFF"/>
                           </a:solidFill>
                         </a:rPr>
-                        <a:t>Observação</a:t>
+                        <a:t>Comentário</a:t>
                       </a:r>
                     </a:p>
                   </a:txBody>
@@ -6529,7 +11158,7 @@
                             <a:srgbClr val="3D424E"/>
                           </a:solidFill>
                         </a:rPr>
-                        <a:t>1ª revisão da qualificação ao orientador</a:t>
+                        <a:t>Primeira revisão da qualificação ao orientador</a:t>
                       </a:r>
                     </a:p>
                   </a:txBody>
@@ -6563,7 +11192,7 @@
                             <a:srgbClr val="3D424E"/>
                           </a:solidFill>
                         </a:rPr>
-                        <a:t>Mantida — 7 dias a partir de hoje</a:t>
+                        <a:t>Sete dias a partir de hoje — em curso</a:t>
                       </a:r>
                     </a:p>
                   </a:txBody>
@@ -6599,7 +11228,7 @@
                             <a:srgbClr val="3D424E"/>
                           </a:solidFill>
                         </a:rPr>
-                        <a:t>Pedido formal de qualificação (PPG-CC / ICT)</a:t>
+                        <a:t>Pedido formal de qualificação ao PPG-CC / ICT</a:t>
                       </a:r>
                     </a:p>
                   </a:txBody>
@@ -6633,7 +11262,7 @@
                             <a:srgbClr val="3D424E"/>
                           </a:solidFill>
                         </a:rPr>
-                        <a:t>Mantido — prazo regimental do Programa</a:t>
+                        <a:t>Prazo regimental do Programa — mantido</a:t>
                       </a:r>
                     </a:p>
                   </a:txBody>
@@ -6715,7 +11344,7 @@
                             <a:srgbClr val="3D424E"/>
                           </a:solidFill>
                         </a:rPr>
-                        <a:t>Ajustada de agosto para outubro (solicitação de extensão de 2 meses)</a:t>
+                        <a:t>Ajuste de agosto → outubro (extensão de 2 meses solicitada)</a:t>
                       </a:r>
                     </a:p>
                   </a:txBody>
@@ -6760,7 +11389,7 @@
               </a:defRPr>
             </a:pPr>
             <a:r>
-              <a:t>Marcos 1 e 2 mantidos; marco 3 depende da solicitação formal de extensão.</a:t>
+              <a:t>Os dois primeiros marcos ficam intactos. A extensão só empurra o marco final.</a:t>
             </a:r>
           </a:p>
         </p:txBody>
@@ -6773,7 +11402,7 @@
 </p:sld>
 </file>
 
-<file path=ppt/slides/slide5.xml><?xml version="1.0" encoding="utf-8"?>
+<file path=ppt/slides/slide9.xml><?xml version="1.0" encoding="utf-8"?>
 <p:sld xmlns:a="http://schemas.openxmlformats.org/drawingml/2006/main" xmlns:p="http://schemas.openxmlformats.org/presentationml/2006/main" xmlns:r="http://schemas.openxmlformats.org/officeDocument/2006/relationships">
   <p:cSld>
     <p:spTree>
@@ -6891,7 +11520,7 @@
               </a:defRPr>
             </a:pPr>
             <a:r>
-              <a:t>Pendência 1 — Escrita da qualificação</a:t>
+              <a:t>Estado da escrita</a:t>
             </a:r>
           </a:p>
           <a:p>
@@ -6903,1547 +11532,7 @@
               </a:defRPr>
             </a:pPr>
             <a:r>
-              <a:t>Corpo pronto no repositório; transferência manual para Overleaf</a:t>
-            </a:r>
-          </a:p>
-        </p:txBody>
-      </p:sp>
-    </p:spTree>
-  </p:cSld>
-  <p:clrMapOvr>
-    <a:masterClrMapping/>
-  </p:clrMapOvr>
-</p:sld>
-</file>
-
-<file path=ppt/slides/slide6.xml><?xml version="1.0" encoding="utf-8"?>
-<p:sld xmlns:a="http://schemas.openxmlformats.org/drawingml/2006/main" xmlns:p="http://schemas.openxmlformats.org/presentationml/2006/main" xmlns:r="http://schemas.openxmlformats.org/officeDocument/2006/relationships">
-  <p:cSld>
-    <p:spTree>
-      <p:nvGrpSpPr>
-        <p:cNvPr id="1" name=""/>
-        <p:cNvGrpSpPr/>
-        <p:nvPr/>
-      </p:nvGrpSpPr>
-      <p:grpSpPr/>
-      <p:sp>
-        <p:nvSpPr>
-          <p:cNvPr id="2" name="TextBox 1"/>
-          <p:cNvSpPr txBox="1"/>
-          <p:nvPr/>
-        </p:nvSpPr>
-        <p:spPr>
-          <a:xfrm>
-            <a:off x="457200" y="365760"/>
-            <a:ext cx="11430000" cy="822960"/>
-          </a:xfrm>
-          <a:prstGeom prst="rect">
-            <a:avLst/>
-          </a:prstGeom>
-          <a:noFill/>
-        </p:spPr>
-        <p:txBody>
-          <a:bodyPr wrap="square">
-            <a:spAutoFit/>
-          </a:bodyPr>
-          <a:lstStyle/>
-          <a:p>
-            <a:pPr>
-              <a:defRPr sz="2600" b="1">
-                <a:solidFill>
-                  <a:srgbClr val="1F2A4E"/>
-                </a:solidFill>
-              </a:defRPr>
-            </a:pPr>
-            <a:r>
-              <a:t>Estado do corpo dos capítulos no repositório</a:t>
-            </a:r>
-          </a:p>
-        </p:txBody>
-      </p:sp>
-      <p:sp>
-        <p:nvSpPr>
-          <p:cNvPr id="3" name="Rectangle 2"/>
-          <p:cNvSpPr/>
-          <p:nvPr/>
-        </p:nvSpPr>
-        <p:spPr>
-          <a:xfrm>
-            <a:off x="457200" y="1143000"/>
-            <a:ext cx="11430000" cy="36576"/>
-          </a:xfrm>
-          <a:prstGeom prst="rect">
-            <a:avLst/>
-          </a:prstGeom>
-          <a:solidFill>
-            <a:srgbClr val="1F2A4E"/>
-          </a:solidFill>
-          <a:ln>
-            <a:noFill/>
-          </a:ln>
-        </p:spPr>
-        <p:style>
-          <a:lnRef idx="1">
-            <a:schemeClr val="accent1"/>
-          </a:lnRef>
-          <a:fillRef idx="3">
-            <a:schemeClr val="accent1"/>
-          </a:fillRef>
-          <a:effectRef idx="2">
-            <a:schemeClr val="accent1"/>
-          </a:effectRef>
-          <a:fontRef idx="minor">
-            <a:schemeClr val="lt1"/>
-          </a:fontRef>
-        </p:style>
-        <p:txBody>
-          <a:bodyPr rtlCol="0" anchor="ctr"/>
-          <a:lstStyle/>
-          <a:p>
-            <a:pPr algn="ctr"/>
-          </a:p>
-        </p:txBody>
-      </p:sp>
-      <p:graphicFrame>
-        <p:nvGraphicFramePr>
-          <p:cNvPr id="4" name="Table 3"/>
-          <p:cNvGraphicFramePr>
-            <a:graphicFrameLocks noGrp="1"/>
-          </p:cNvGraphicFramePr>
-          <p:nvPr/>
-        </p:nvGraphicFramePr>
-        <p:xfrm>
-          <a:off x="457200" y="1371600"/>
-          <a:ext cx="11430000" cy="4754880"/>
-        </p:xfrm>
-        <a:graphic>
-          <a:graphicData uri="http://schemas.openxmlformats.org/drawingml/2006/table">
-            <a:tbl>
-              <a:tblPr firstRow="1" bandRow="1">
-                <a:tableStyleId>{5C22544A-7EE6-4342-B048-85BDC9FD1C3A}</a:tableStyleId>
-              </a:tblPr>
-              <a:tblGrid>
-                <a:gridCol w="2286000"/>
-                <a:gridCol w="5943600"/>
-                <a:gridCol w="3200400"/>
-              </a:tblGrid>
-              <a:tr h="792480">
-                <a:tc>
-                  <a:txBody>
-                    <a:bodyPr/>
-                    <a:lstStyle/>
-                    <a:p>
-                      <a:r>
-                        <a:rPr sz="1300" b="1">
-                          <a:solidFill>
-                            <a:srgbClr val="FFFFFF"/>
-                          </a:solidFill>
-                        </a:rPr>
-                        <a:t>Capítulo</a:t>
-                      </a:r>
-                    </a:p>
-                  </a:txBody>
-                  <a:tcPr>
-                    <a:solidFill>
-                      <a:srgbClr val="1F2A4E"/>
-                    </a:solidFill>
-                  </a:tcPr>
-                </a:tc>
-                <a:tc>
-                  <a:txBody>
-                    <a:bodyPr/>
-                    <a:lstStyle/>
-                    <a:p>
-                      <a:r>
-                        <a:rPr sz="1300" b="1">
-                          <a:solidFill>
-                            <a:srgbClr val="FFFFFF"/>
-                          </a:solidFill>
-                        </a:rPr>
-                        <a:t>Base narrativa no repositório</a:t>
-                      </a:r>
-                    </a:p>
-                  </a:txBody>
-                  <a:tcPr>
-                    <a:solidFill>
-                      <a:srgbClr val="1F2A4E"/>
-                    </a:solidFill>
-                  </a:tcPr>
-                </a:tc>
-                <a:tc>
-                  <a:txBody>
-                    <a:bodyPr/>
-                    <a:lstStyle/>
-                    <a:p>
-                      <a:r>
-                        <a:rPr sz="1300" b="1">
-                          <a:solidFill>
-                            <a:srgbClr val="FFFFFF"/>
-                          </a:solidFill>
-                        </a:rPr>
-                        <a:t>Estado</a:t>
-                      </a:r>
-                    </a:p>
-                  </a:txBody>
-                  <a:tcPr>
-                    <a:solidFill>
-                      <a:srgbClr val="1F2A4E"/>
-                    </a:solidFill>
-                  </a:tcPr>
-                </a:tc>
-              </a:tr>
-              <a:tr h="792480">
-                <a:tc>
-                  <a:txBody>
-                    <a:bodyPr/>
-                    <a:lstStyle/>
-                    <a:p>
-                      <a:r>
-                        <a:rPr sz="1100">
-                          <a:solidFill>
-                            <a:srgbClr val="3D424E"/>
-                          </a:solidFill>
-                        </a:rPr>
-                        <a:t>1. Introdução</a:t>
-                      </a:r>
-                    </a:p>
-                  </a:txBody>
-                  <a:tcPr/>
-                </a:tc>
-                <a:tc>
-                  <a:txBody>
-                    <a:bodyPr/>
-                    <a:lstStyle/>
-                    <a:p>
-                      <a:r>
-                        <a:rPr sz="1100">
-                          <a:solidFill>
-                            <a:srgbClr val="3D424E"/>
-                          </a:solidFill>
-                        </a:rPr>
-                        <a:t>_pre_qualificacao_narrativa.md v1.2</a:t>
-                      </a:r>
-                    </a:p>
-                  </a:txBody>
-                  <a:tcPr/>
-                </a:tc>
-                <a:tc>
-                  <a:txBody>
-                    <a:bodyPr/>
-                    <a:lstStyle/>
-                    <a:p>
-                      <a:r>
-                        <a:rPr sz="1100">
-                          <a:solidFill>
-                            <a:srgbClr val="3D424E"/>
-                          </a:solidFill>
-                        </a:rPr>
-                        <a:t>Corpo pronto</a:t>
-                      </a:r>
-                    </a:p>
-                  </a:txBody>
-                  <a:tcPr/>
-                </a:tc>
-              </a:tr>
-              <a:tr h="792480">
-                <a:tc>
-                  <a:txBody>
-                    <a:bodyPr/>
-                    <a:lstStyle/>
-                    <a:p>
-                      <a:r>
-                        <a:rPr sz="1100">
-                          <a:solidFill>
-                            <a:srgbClr val="3D424E"/>
-                          </a:solidFill>
-                        </a:rPr>
-                        <a:t>2. Revisão bibliográfica</a:t>
-                      </a:r>
-                    </a:p>
-                  </a:txBody>
-                  <a:tcPr/>
-                </a:tc>
-                <a:tc>
-                  <a:txBody>
-                    <a:bodyPr/>
-                    <a:lstStyle/>
-                    <a:p>
-                      <a:r>
-                        <a:rPr sz="1100">
-                          <a:solidFill>
-                            <a:srgbClr val="3D424E"/>
-                          </a:solidFill>
-                        </a:rPr>
-                        <a:t>104 fichas + _mapa_citacoes_por_capitulo.md</a:t>
-                      </a:r>
-                    </a:p>
-                  </a:txBody>
-                  <a:tcPr/>
-                </a:tc>
-                <a:tc>
-                  <a:txBody>
-                    <a:bodyPr/>
-                    <a:lstStyle/>
-                    <a:p>
-                      <a:r>
-                        <a:rPr sz="1100">
-                          <a:solidFill>
-                            <a:srgbClr val="3D424E"/>
-                          </a:solidFill>
-                        </a:rPr>
-                        <a:t>Corpo pronto</a:t>
-                      </a:r>
-                    </a:p>
-                  </a:txBody>
-                  <a:tcPr/>
-                </a:tc>
-              </a:tr>
-              <a:tr h="792480">
-                <a:tc>
-                  <a:txBody>
-                    <a:bodyPr/>
-                    <a:lstStyle/>
-                    <a:p>
-                      <a:r>
-                        <a:rPr sz="1100">
-                          <a:solidFill>
-                            <a:srgbClr val="3D424E"/>
-                          </a:solidFill>
-                        </a:rPr>
-                        <a:t>3. Objetivos</a:t>
-                      </a:r>
-                    </a:p>
-                  </a:txBody>
-                  <a:tcPr/>
-                </a:tc>
-                <a:tc>
-                  <a:txBody>
-                    <a:bodyPr/>
-                    <a:lstStyle/>
-                    <a:p>
-                      <a:r>
-                        <a:rPr sz="1100">
-                          <a:solidFill>
-                            <a:srgbClr val="3D424E"/>
-                          </a:solidFill>
-                        </a:rPr>
-                        <a:t>_objetivo_tese v3.6 (OG + 6 OE + 6 H + 7 C)</a:t>
-                      </a:r>
-                    </a:p>
-                  </a:txBody>
-                  <a:tcPr/>
-                </a:tc>
-                <a:tc>
-                  <a:txBody>
-                    <a:bodyPr/>
-                    <a:lstStyle/>
-                    <a:p>
-                      <a:r>
-                        <a:rPr sz="1100">
-                          <a:solidFill>
-                            <a:srgbClr val="3D424E"/>
-                          </a:solidFill>
-                        </a:rPr>
-                        <a:t>Corpo pronto</a:t>
-                      </a:r>
-                    </a:p>
-                  </a:txBody>
-                  <a:tcPr/>
-                </a:tc>
-              </a:tr>
-              <a:tr h="792480">
-                <a:tc>
-                  <a:txBody>
-                    <a:bodyPr/>
-                    <a:lstStyle/>
-                    <a:p>
-                      <a:r>
-                        <a:rPr sz="1100">
-                          <a:solidFill>
-                            <a:srgbClr val="3D424E"/>
-                          </a:solidFill>
-                        </a:rPr>
-                        <a:t>4. Metodologia</a:t>
-                      </a:r>
-                    </a:p>
-                  </a:txBody>
-                  <a:tcPr/>
-                </a:tc>
-                <a:tc>
-                  <a:txBody>
-                    <a:bodyPr/>
-                    <a:lstStyle/>
-                    <a:p>
-                      <a:r>
-                        <a:rPr sz="1100">
-                          <a:solidFill>
-                            <a:srgbClr val="3D424E"/>
-                          </a:solidFill>
-                        </a:rPr>
-                        <a:t>_decisao_arquitetural_film + _checklist_etica_cep</a:t>
-                      </a:r>
-                    </a:p>
-                  </a:txBody>
-                  <a:tcPr/>
-                </a:tc>
-                <a:tc>
-                  <a:txBody>
-                    <a:bodyPr/>
-                    <a:lstStyle/>
-                    <a:p>
-                      <a:r>
-                        <a:rPr sz="1100">
-                          <a:solidFill>
-                            <a:srgbClr val="3D424E"/>
-                          </a:solidFill>
-                        </a:rPr>
-                        <a:t>Corpo pronto</a:t>
-                      </a:r>
-                    </a:p>
-                  </a:txBody>
-                  <a:tcPr/>
-                </a:tc>
-              </a:tr>
-              <a:tr h="792480">
-                <a:tc>
-                  <a:txBody>
-                    <a:bodyPr/>
-                    <a:lstStyle/>
-                    <a:p>
-                      <a:r>
-                        <a:rPr sz="1100">
-                          <a:solidFill>
-                            <a:srgbClr val="3D424E"/>
-                          </a:solidFill>
-                        </a:rPr>
-                        <a:t>5. Cronograma</a:t>
-                      </a:r>
-                    </a:p>
-                  </a:txBody>
-                  <a:tcPr/>
-                </a:tc>
-                <a:tc>
-                  <a:txBody>
-                    <a:bodyPr/>
-                    <a:lstStyle/>
-                    <a:p>
-                      <a:r>
-                        <a:rPr sz="1100">
-                          <a:solidFill>
-                            <a:srgbClr val="3D424E"/>
-                          </a:solidFill>
-                        </a:rPr>
-                        <a:t>Marcos ajustados desta reunião</a:t>
-                      </a:r>
-                    </a:p>
-                  </a:txBody>
-                  <a:tcPr/>
-                </a:tc>
-                <a:tc>
-                  <a:txBody>
-                    <a:bodyPr/>
-                    <a:lstStyle/>
-                    <a:p>
-                      <a:r>
-                        <a:rPr sz="1100">
-                          <a:solidFill>
-                            <a:srgbClr val="3D424E"/>
-                          </a:solidFill>
-                        </a:rPr>
-                        <a:t>A finalizar após alinhamento</a:t>
-                      </a:r>
-                    </a:p>
-                  </a:txBody>
-                  <a:tcPr/>
-                </a:tc>
-              </a:tr>
-            </a:tbl>
-          </a:graphicData>
-        </a:graphic>
-      </p:graphicFrame>
-      <p:sp>
-        <p:nvSpPr>
-          <p:cNvPr id="5" name="TextBox 4"/>
-          <p:cNvSpPr txBox="1"/>
-          <p:nvPr/>
-        </p:nvSpPr>
-        <p:spPr>
-          <a:xfrm>
-            <a:off x="457200" y="6446520"/>
-            <a:ext cx="11430000" cy="365760"/>
-          </a:xfrm>
-          <a:prstGeom prst="rect">
-            <a:avLst/>
-          </a:prstGeom>
-          <a:noFill/>
-        </p:spPr>
-        <p:txBody>
-          <a:bodyPr wrap="none">
-            <a:spAutoFit/>
-          </a:bodyPr>
-          <a:lstStyle/>
-          <a:p>
-            <a:pPr>
-              <a:defRPr sz="1000" i="1">
-                <a:solidFill>
-                  <a:srgbClr val="707682"/>
-                </a:solidFill>
-              </a:defRPr>
-            </a:pPr>
-            <a:r>
-              <a:t>Repositório GitHub pode ser aberto ao vivo durante a reunião.</a:t>
-            </a:r>
-          </a:p>
-        </p:txBody>
-      </p:sp>
-    </p:spTree>
-  </p:cSld>
-  <p:clrMapOvr>
-    <a:masterClrMapping/>
-  </p:clrMapOvr>
-</p:sld>
-</file>
-
-<file path=ppt/slides/slide7.xml><?xml version="1.0" encoding="utf-8"?>
-<p:sld xmlns:a="http://schemas.openxmlformats.org/drawingml/2006/main" xmlns:p="http://schemas.openxmlformats.org/presentationml/2006/main" xmlns:r="http://schemas.openxmlformats.org/officeDocument/2006/relationships">
-  <p:cSld>
-    <p:spTree>
-      <p:nvGrpSpPr>
-        <p:cNvPr id="1" name=""/>
-        <p:cNvGrpSpPr/>
-        <p:nvPr/>
-      </p:nvGrpSpPr>
-      <p:grpSpPr/>
-      <p:sp>
-        <p:nvSpPr>
-          <p:cNvPr id="2" name="TextBox 1"/>
-          <p:cNvSpPr txBox="1"/>
-          <p:nvPr/>
-        </p:nvSpPr>
-        <p:spPr>
-          <a:xfrm>
-            <a:off x="457200" y="365760"/>
-            <a:ext cx="11430000" cy="822960"/>
-          </a:xfrm>
-          <a:prstGeom prst="rect">
-            <a:avLst/>
-          </a:prstGeom>
-          <a:noFill/>
-        </p:spPr>
-        <p:txBody>
-          <a:bodyPr wrap="square">
-            <a:spAutoFit/>
-          </a:bodyPr>
-          <a:lstStyle/>
-          <a:p>
-            <a:pPr>
-              <a:defRPr sz="2600" b="1">
-                <a:solidFill>
-                  <a:srgbClr val="1F2A4E"/>
-                </a:solidFill>
-              </a:defRPr>
-            </a:pPr>
-            <a:r>
-              <a:t>Postura sobre uso de LLM — este trabalho NÃO é 100 % LLM</a:t>
-            </a:r>
-          </a:p>
-        </p:txBody>
-      </p:sp>
-      <p:sp>
-        <p:nvSpPr>
-          <p:cNvPr id="3" name="Rectangle 2"/>
-          <p:cNvSpPr/>
-          <p:nvPr/>
-        </p:nvSpPr>
-        <p:spPr>
-          <a:xfrm>
-            <a:off x="457200" y="1143000"/>
-            <a:ext cx="11430000" cy="36576"/>
-          </a:xfrm>
-          <a:prstGeom prst="rect">
-            <a:avLst/>
-          </a:prstGeom>
-          <a:solidFill>
-            <a:srgbClr val="1F2A4E"/>
-          </a:solidFill>
-          <a:ln>
-            <a:noFill/>
-          </a:ln>
-        </p:spPr>
-        <p:style>
-          <a:lnRef idx="1">
-            <a:schemeClr val="accent1"/>
-          </a:lnRef>
-          <a:fillRef idx="3">
-            <a:schemeClr val="accent1"/>
-          </a:fillRef>
-          <a:effectRef idx="2">
-            <a:schemeClr val="accent1"/>
-          </a:effectRef>
-          <a:fontRef idx="minor">
-            <a:schemeClr val="lt1"/>
-          </a:fontRef>
-        </p:style>
-        <p:txBody>
-          <a:bodyPr rtlCol="0" anchor="ctr"/>
-          <a:lstStyle/>
-          <a:p>
-            <a:pPr algn="ctr"/>
-          </a:p>
-        </p:txBody>
-      </p:sp>
-      <p:sp>
-        <p:nvSpPr>
-          <p:cNvPr id="4" name="TextBox 3"/>
-          <p:cNvSpPr txBox="1"/>
-          <p:nvPr/>
-        </p:nvSpPr>
-        <p:spPr>
-          <a:xfrm>
-            <a:off x="457200" y="1371600"/>
-            <a:ext cx="11430000" cy="4937760"/>
-          </a:xfrm>
-          <a:prstGeom prst="rect">
-            <a:avLst/>
-          </a:prstGeom>
-          <a:noFill/>
-        </p:spPr>
-        <p:txBody>
-          <a:bodyPr wrap="square">
-            <a:spAutoFit/>
-          </a:bodyPr>
-          <a:lstStyle/>
-          <a:p>
-            <a:pPr>
-              <a:spcAft>
-                <a:spcPts val="800"/>
-              </a:spcAft>
-            </a:pPr>
-            <a:r>
-              <a:rPr sz="1600" b="1">
-                <a:solidFill>
-                  <a:srgbClr val="1F2A4E"/>
-                </a:solidFill>
-              </a:rPr>
-              <a:t>Princípio:  </a:t>
-            </a:r>
-            <a:r>
-              <a:rPr sz="1600">
-                <a:solidFill>
-                  <a:srgbClr val="3D424E"/>
-                </a:solidFill>
-              </a:rPr>
-              <a:t>cada linha do texto final é escrita, lida e apropriada conscientemente pelo mestrando</a:t>
-            </a:r>
-          </a:p>
-          <a:p>
-            <a:pPr>
-              <a:spcAft>
-                <a:spcPts val="800"/>
-              </a:spcAft>
-            </a:pPr>
-            <a:r>
-              <a:rPr sz="1600" b="1">
-                <a:solidFill>
-                  <a:srgbClr val="1F2A4E"/>
-                </a:solidFill>
-              </a:rPr>
-              <a:t>  </a:t>
-            </a:r>
-            <a:r>
-              <a:rPr sz="1600">
-                <a:solidFill>
-                  <a:srgbClr val="3D424E"/>
-                </a:solidFill>
-              </a:rPr>
-              <a:t/>
-            </a:r>
-          </a:p>
-          <a:p>
-            <a:pPr>
-              <a:spcAft>
-                <a:spcPts val="800"/>
-              </a:spcAft>
-            </a:pPr>
-            <a:r>
-              <a:rPr sz="1600" b="1">
-                <a:solidFill>
-                  <a:srgbClr val="1F2A4E"/>
-                </a:solidFill>
-              </a:rPr>
-              <a:t>Papel do mestrando:  </a:t>
-            </a:r>
-            <a:r>
-              <a:rPr sz="1600">
-                <a:solidFill>
-                  <a:srgbClr val="3D424E"/>
-                </a:solidFill>
-              </a:rPr>
-              <a:t>definição do problema, escolha do dataset, leitura crítica dos 104 papers, decisões arquiteturais, argumentação</a:t>
-            </a:r>
-          </a:p>
-          <a:p>
-            <a:pPr>
-              <a:spcAft>
-                <a:spcPts val="800"/>
-              </a:spcAft>
-            </a:pPr>
-            <a:r>
-              <a:rPr sz="1600" b="1">
-                <a:solidFill>
-                  <a:srgbClr val="1F2A4E"/>
-                </a:solidFill>
-              </a:rPr>
-              <a:t>Papel da LLM (Claude Code):  </a:t>
-            </a:r>
-            <a:r>
-              <a:rPr sz="1600">
-                <a:solidFill>
-                  <a:srgbClr val="3D424E"/>
-                </a:solidFill>
-              </a:rPr>
-              <a:t>ferramenta operacional — estruturação, revisão de coerência, formatação de fichas</a:t>
-            </a:r>
-          </a:p>
-          <a:p>
-            <a:pPr>
-              <a:spcAft>
-                <a:spcPts val="800"/>
-              </a:spcAft>
-            </a:pPr>
-            <a:r>
-              <a:rPr sz="1600" b="1">
-                <a:solidFill>
-                  <a:srgbClr val="1F2A4E"/>
-                </a:solidFill>
-              </a:rPr>
-              <a:t>Papel do NotebookLM:  </a:t>
-            </a:r>
-            <a:r>
-              <a:rPr sz="1600">
-                <a:solidFill>
-                  <a:srgbClr val="3D424E"/>
-                </a:solidFill>
-              </a:rPr>
-              <a:t>segunda opinião externa e independente (validação, não construção)</a:t>
-            </a:r>
-          </a:p>
-          <a:p>
-            <a:pPr>
-              <a:spcAft>
-                <a:spcPts val="800"/>
-              </a:spcAft>
-            </a:pPr>
-            <a:r>
-              <a:rPr sz="1600" b="1">
-                <a:solidFill>
-                  <a:srgbClr val="1F2A4E"/>
-                </a:solidFill>
-              </a:rPr>
-              <a:t>  </a:t>
-            </a:r>
-            <a:r>
-              <a:rPr sz="1600">
-                <a:solidFill>
-                  <a:srgbClr val="3D424E"/>
-                </a:solidFill>
-              </a:rPr>
-              <a:t/>
-            </a:r>
-          </a:p>
-          <a:p>
-            <a:pPr>
-              <a:spcAft>
-                <a:spcPts val="800"/>
-              </a:spcAft>
-            </a:pPr>
-            <a:r>
-              <a:rPr sz="1600" b="1">
-                <a:solidFill>
-                  <a:srgbClr val="1F2A4E"/>
-                </a:solidFill>
-              </a:rPr>
-              <a:t>Transferência para Overleaf:  </a:t>
-            </a:r>
-            <a:r>
-              <a:rPr sz="1600">
-                <a:solidFill>
-                  <a:srgbClr val="3D424E"/>
-                </a:solidFill>
-              </a:rPr>
-              <a:t>MANUAL, linha a linha — garante consistência ABNT + revisão obrigatória + apropriação defensável</a:t>
-            </a:r>
-          </a:p>
-        </p:txBody>
-      </p:sp>
-      <p:sp>
-        <p:nvSpPr>
-          <p:cNvPr id="5" name="TextBox 4"/>
-          <p:cNvSpPr txBox="1"/>
-          <p:nvPr/>
-        </p:nvSpPr>
-        <p:spPr>
-          <a:xfrm>
-            <a:off x="457200" y="6446520"/>
-            <a:ext cx="11430000" cy="365760"/>
-          </a:xfrm>
-          <a:prstGeom prst="rect">
-            <a:avLst/>
-          </a:prstGeom>
-          <a:noFill/>
-        </p:spPr>
-        <p:txBody>
-          <a:bodyPr wrap="none">
-            <a:spAutoFit/>
-          </a:bodyPr>
-          <a:lstStyle/>
-          <a:p>
-            <a:pPr>
-              <a:defRPr sz="1000" i="1">
-                <a:solidFill>
-                  <a:srgbClr val="707682"/>
-                </a:solidFill>
-              </a:defRPr>
-            </a:pPr>
-            <a:r>
-              <a:t>Analogia: LLM é ferramenta operacional (como IDE, corretor ortográfico, mecanismo de busca).</a:t>
-            </a:r>
-          </a:p>
-        </p:txBody>
-      </p:sp>
-    </p:spTree>
-  </p:cSld>
-  <p:clrMapOvr>
-    <a:masterClrMapping/>
-  </p:clrMapOvr>
-</p:sld>
-</file>
-
-<file path=ppt/slides/slide8.xml><?xml version="1.0" encoding="utf-8"?>
-<p:sld xmlns:a="http://schemas.openxmlformats.org/drawingml/2006/main" xmlns:p="http://schemas.openxmlformats.org/presentationml/2006/main" xmlns:r="http://schemas.openxmlformats.org/officeDocument/2006/relationships">
-  <p:cSld>
-    <p:spTree>
-      <p:nvGrpSpPr>
-        <p:cNvPr id="1" name=""/>
-        <p:cNvGrpSpPr/>
-        <p:nvPr/>
-      </p:nvGrpSpPr>
-      <p:grpSpPr/>
-      <p:sp>
-        <p:nvSpPr>
-          <p:cNvPr id="2" name="TextBox 1"/>
-          <p:cNvSpPr txBox="1"/>
-          <p:nvPr/>
-        </p:nvSpPr>
-        <p:spPr>
-          <a:xfrm>
-            <a:off x="457200" y="365760"/>
-            <a:ext cx="11430000" cy="822960"/>
-          </a:xfrm>
-          <a:prstGeom prst="rect">
-            <a:avLst/>
-          </a:prstGeom>
-          <a:noFill/>
-        </p:spPr>
-        <p:txBody>
-          <a:bodyPr wrap="square">
-            <a:spAutoFit/>
-          </a:bodyPr>
-          <a:lstStyle/>
-          <a:p>
-            <a:pPr>
-              <a:defRPr sz="2600" b="1">
-                <a:solidFill>
-                  <a:srgbClr val="1F2A4E"/>
-                </a:solidFill>
-              </a:defRPr>
-            </a:pPr>
-            <a:r>
-              <a:t>Divisão explícita de responsabilidade autor × LLM</a:t>
-            </a:r>
-          </a:p>
-        </p:txBody>
-      </p:sp>
-      <p:sp>
-        <p:nvSpPr>
-          <p:cNvPr id="3" name="Rectangle 2"/>
-          <p:cNvSpPr/>
-          <p:nvPr/>
-        </p:nvSpPr>
-        <p:spPr>
-          <a:xfrm>
-            <a:off x="457200" y="1143000"/>
-            <a:ext cx="11430000" cy="36576"/>
-          </a:xfrm>
-          <a:prstGeom prst="rect">
-            <a:avLst/>
-          </a:prstGeom>
-          <a:solidFill>
-            <a:srgbClr val="1F2A4E"/>
-          </a:solidFill>
-          <a:ln>
-            <a:noFill/>
-          </a:ln>
-        </p:spPr>
-        <p:style>
-          <a:lnRef idx="1">
-            <a:schemeClr val="accent1"/>
-          </a:lnRef>
-          <a:fillRef idx="3">
-            <a:schemeClr val="accent1"/>
-          </a:fillRef>
-          <a:effectRef idx="2">
-            <a:schemeClr val="accent1"/>
-          </a:effectRef>
-          <a:fontRef idx="minor">
-            <a:schemeClr val="lt1"/>
-          </a:fontRef>
-        </p:style>
-        <p:txBody>
-          <a:bodyPr rtlCol="0" anchor="ctr"/>
-          <a:lstStyle/>
-          <a:p>
-            <a:pPr algn="ctr"/>
-          </a:p>
-        </p:txBody>
-      </p:sp>
-      <p:graphicFrame>
-        <p:nvGraphicFramePr>
-          <p:cNvPr id="4" name="Table 3"/>
-          <p:cNvGraphicFramePr>
-            <a:graphicFrameLocks noGrp="1"/>
-          </p:cNvGraphicFramePr>
-          <p:nvPr/>
-        </p:nvGraphicFramePr>
-        <p:xfrm>
-          <a:off x="457200" y="1371600"/>
-          <a:ext cx="11430000" cy="4754880"/>
-        </p:xfrm>
-        <a:graphic>
-          <a:graphicData uri="http://schemas.openxmlformats.org/drawingml/2006/table">
-            <a:tbl>
-              <a:tblPr firstRow="1" bandRow="1">
-                <a:tableStyleId>{5C22544A-7EE6-4342-B048-85BDC9FD1C3A}</a:tableStyleId>
-              </a:tblPr>
-              <a:tblGrid>
-                <a:gridCol w="4114800"/>
-                <a:gridCol w="3657600"/>
-                <a:gridCol w="3657600"/>
-              </a:tblGrid>
-              <a:tr h="594360">
-                <a:tc>
-                  <a:txBody>
-                    <a:bodyPr/>
-                    <a:lstStyle/>
-                    <a:p>
-                      <a:r>
-                        <a:rPr sz="1300" b="1">
-                          <a:solidFill>
-                            <a:srgbClr val="FFFFFF"/>
-                          </a:solidFill>
-                        </a:rPr>
-                        <a:t>Atividade</a:t>
-                      </a:r>
-                    </a:p>
-                  </a:txBody>
-                  <a:tcPr>
-                    <a:solidFill>
-                      <a:srgbClr val="1F2A4E"/>
-                    </a:solidFill>
-                  </a:tcPr>
-                </a:tc>
-                <a:tc>
-                  <a:txBody>
-                    <a:bodyPr/>
-                    <a:lstStyle/>
-                    <a:p>
-                      <a:r>
-                        <a:rPr sz="1300" b="1">
-                          <a:solidFill>
-                            <a:srgbClr val="FFFFFF"/>
-                          </a:solidFill>
-                        </a:rPr>
-                        <a:t>Autor</a:t>
-                      </a:r>
-                    </a:p>
-                  </a:txBody>
-                  <a:tcPr>
-                    <a:solidFill>
-                      <a:srgbClr val="1F2A4E"/>
-                    </a:solidFill>
-                  </a:tcPr>
-                </a:tc>
-                <a:tc>
-                  <a:txBody>
-                    <a:bodyPr/>
-                    <a:lstStyle/>
-                    <a:p>
-                      <a:r>
-                        <a:rPr sz="1300" b="1">
-                          <a:solidFill>
-                            <a:srgbClr val="FFFFFF"/>
-                          </a:solidFill>
-                        </a:rPr>
-                        <a:t>Papel da LLM</a:t>
-                      </a:r>
-                    </a:p>
-                  </a:txBody>
-                  <a:tcPr>
-                    <a:solidFill>
-                      <a:srgbClr val="1F2A4E"/>
-                    </a:solidFill>
-                  </a:tcPr>
-                </a:tc>
-              </a:tr>
-              <a:tr h="594360">
-                <a:tc>
-                  <a:txBody>
-                    <a:bodyPr/>
-                    <a:lstStyle/>
-                    <a:p>
-                      <a:r>
-                        <a:rPr sz="1100">
-                          <a:solidFill>
-                            <a:srgbClr val="3D424E"/>
-                          </a:solidFill>
-                        </a:rPr>
-                        <a:t>Definição do problema e pergunta de pesquisa</a:t>
-                      </a:r>
-                    </a:p>
-                  </a:txBody>
-                  <a:tcPr/>
-                </a:tc>
-                <a:tc>
-                  <a:txBody>
-                    <a:bodyPr/>
-                    <a:lstStyle/>
-                    <a:p>
-                      <a:r>
-                        <a:rPr sz="1100">
-                          <a:solidFill>
-                            <a:srgbClr val="3D424E"/>
-                          </a:solidFill>
-                        </a:rPr>
-                        <a:t>Marcello</a:t>
-                      </a:r>
-                    </a:p>
-                  </a:txBody>
-                  <a:tcPr/>
-                </a:tc>
-                <a:tc>
-                  <a:txBody>
-                    <a:bodyPr/>
-                    <a:lstStyle/>
-                    <a:p>
-                      <a:r>
-                        <a:rPr sz="1100">
-                          <a:solidFill>
-                            <a:srgbClr val="3D424E"/>
-                          </a:solidFill>
-                        </a:rPr>
-                        <a:t>Nenhum</a:t>
-                      </a:r>
-                    </a:p>
-                  </a:txBody>
-                  <a:tcPr/>
-                </a:tc>
-              </a:tr>
-              <a:tr h="594360">
-                <a:tc>
-                  <a:txBody>
-                    <a:bodyPr/>
-                    <a:lstStyle/>
-                    <a:p>
-                      <a:r>
-                        <a:rPr sz="1100">
-                          <a:solidFill>
-                            <a:srgbClr val="3D424E"/>
-                          </a:solidFill>
-                        </a:rPr>
-                        <a:t>Leitura crítica dos 104 papers</a:t>
-                      </a:r>
-                    </a:p>
-                  </a:txBody>
-                  <a:tcPr/>
-                </a:tc>
-                <a:tc>
-                  <a:txBody>
-                    <a:bodyPr/>
-                    <a:lstStyle/>
-                    <a:p>
-                      <a:r>
-                        <a:rPr sz="1100">
-                          <a:solidFill>
-                            <a:srgbClr val="3D424E"/>
-                          </a:solidFill>
-                        </a:rPr>
-                        <a:t>Marcello (PDFs, VPN)</a:t>
-                      </a:r>
-                    </a:p>
-                  </a:txBody>
-                  <a:tcPr/>
-                </a:tc>
-                <a:tc>
-                  <a:txBody>
-                    <a:bodyPr/>
-                    <a:lstStyle/>
-                    <a:p>
-                      <a:r>
-                        <a:rPr sz="1100">
-                          <a:solidFill>
-                            <a:srgbClr val="3D424E"/>
-                          </a:solidFill>
-                        </a:rPr>
-                        <a:t>Assistência em resumos pós-leitura</a:t>
-                      </a:r>
-                    </a:p>
-                  </a:txBody>
-                  <a:tcPr/>
-                </a:tc>
-              </a:tr>
-              <a:tr h="594360">
-                <a:tc>
-                  <a:txBody>
-                    <a:bodyPr/>
-                    <a:lstStyle/>
-                    <a:p>
-                      <a:r>
-                        <a:rPr sz="1100">
-                          <a:solidFill>
-                            <a:srgbClr val="3D424E"/>
-                          </a:solidFill>
-                        </a:rPr>
-                        <a:t>Fichas bibliográficas (104)</a:t>
-                      </a:r>
-                    </a:p>
-                  </a:txBody>
-                  <a:tcPr/>
-                </a:tc>
-                <a:tc>
-                  <a:txBody>
-                    <a:bodyPr/>
-                    <a:lstStyle/>
-                    <a:p>
-                      <a:r>
-                        <a:rPr sz="1100">
-                          <a:solidFill>
-                            <a:srgbClr val="3D424E"/>
-                          </a:solidFill>
-                        </a:rPr>
-                        <a:t>Marcello (verificação PDF a PDF)</a:t>
-                      </a:r>
-                    </a:p>
-                  </a:txBody>
-                  <a:tcPr/>
-                </a:tc>
-                <a:tc>
-                  <a:txBody>
-                    <a:bodyPr/>
-                    <a:lstStyle/>
-                    <a:p>
-                      <a:r>
-                        <a:rPr sz="1100">
-                          <a:solidFill>
-                            <a:srgbClr val="3D424E"/>
-                          </a:solidFill>
-                        </a:rPr>
-                        <a:t>Formatação padronizada</a:t>
-                      </a:r>
-                    </a:p>
-                  </a:txBody>
-                  <a:tcPr/>
-                </a:tc>
-              </a:tr>
-              <a:tr h="594360">
-                <a:tc>
-                  <a:txBody>
-                    <a:bodyPr/>
-                    <a:lstStyle/>
-                    <a:p>
-                      <a:r>
-                        <a:rPr sz="1100">
-                          <a:solidFill>
-                            <a:srgbClr val="3D424E"/>
-                          </a:solidFill>
-                        </a:rPr>
-                        <a:t>Argumentação e storytelling</a:t>
-                      </a:r>
-                    </a:p>
-                  </a:txBody>
-                  <a:tcPr/>
-                </a:tc>
-                <a:tc>
-                  <a:txBody>
-                    <a:bodyPr/>
-                    <a:lstStyle/>
-                    <a:p>
-                      <a:r>
-                        <a:rPr sz="1100">
-                          <a:solidFill>
-                            <a:srgbClr val="3D424E"/>
-                          </a:solidFill>
-                        </a:rPr>
-                        <a:t>Marcello (decisões editoriais)</a:t>
-                      </a:r>
-                    </a:p>
-                  </a:txBody>
-                  <a:tcPr/>
-                </a:tc>
-                <a:tc>
-                  <a:txBody>
-                    <a:bodyPr/>
-                    <a:lstStyle/>
-                    <a:p>
-                      <a:r>
-                        <a:rPr sz="1100">
-                          <a:solidFill>
-                            <a:srgbClr val="3D424E"/>
-                          </a:solidFill>
-                        </a:rPr>
-                        <a:t>Sugestão de estrutura + revisão de coerência</a:t>
-                      </a:r>
-                    </a:p>
-                  </a:txBody>
-                  <a:tcPr/>
-                </a:tc>
-              </a:tr>
-              <a:tr h="594360">
-                <a:tc>
-                  <a:txBody>
-                    <a:bodyPr/>
-                    <a:lstStyle/>
-                    <a:p>
-                      <a:r>
-                        <a:rPr sz="1100">
-                          <a:solidFill>
-                            <a:srgbClr val="3D424E"/>
-                          </a:solidFill>
-                        </a:rPr>
-                        <a:t>Decisão arquitetural FiLM</a:t>
-                      </a:r>
-                    </a:p>
-                  </a:txBody>
-                  <a:tcPr/>
-                </a:tc>
-                <a:tc>
-                  <a:txBody>
-                    <a:bodyPr/>
-                    <a:lstStyle/>
-                    <a:p>
-                      <a:r>
-                        <a:rPr sz="1100">
-                          <a:solidFill>
-                            <a:srgbClr val="3D424E"/>
-                          </a:solidFill>
-                        </a:rPr>
-                        <a:t>Marcello + Orientador (reuniões)</a:t>
-                      </a:r>
-                    </a:p>
-                  </a:txBody>
-                  <a:tcPr/>
-                </a:tc>
-                <a:tc>
-                  <a:txBody>
-                    <a:bodyPr/>
-                    <a:lstStyle/>
-                    <a:p>
-                      <a:r>
-                        <a:rPr sz="1100">
-                          <a:solidFill>
-                            <a:srgbClr val="3D424E"/>
-                          </a:solidFill>
-                        </a:rPr>
-                        <a:t>Comparação sistemática entre alternativas</a:t>
-                      </a:r>
-                    </a:p>
-                  </a:txBody>
-                  <a:tcPr/>
-                </a:tc>
-              </a:tr>
-              <a:tr h="594360">
-                <a:tc>
-                  <a:txBody>
-                    <a:bodyPr/>
-                    <a:lstStyle/>
-                    <a:p>
-                      <a:r>
-                        <a:rPr sz="1100">
-                          <a:solidFill>
-                            <a:srgbClr val="3D424E"/>
-                          </a:solidFill>
-                        </a:rPr>
-                        <a:t>Ajuste ético do OE-1 (v3.6)</a:t>
-                      </a:r>
-                    </a:p>
-                  </a:txBody>
-                  <a:tcPr/>
-                </a:tc>
-                <a:tc>
-                  <a:txBody>
-                    <a:bodyPr/>
-                    <a:lstStyle/>
-                    <a:p>
-                      <a:r>
-                        <a:rPr sz="1100">
-                          <a:solidFill>
-                            <a:srgbClr val="3D424E"/>
-                          </a:solidFill>
-                        </a:rPr>
-                        <a:t>Marcello (interpretação Res. 200/2021)</a:t>
-                      </a:r>
-                    </a:p>
-                  </a:txBody>
-                  <a:tcPr/>
-                </a:tc>
-                <a:tc>
-                  <a:txBody>
-                    <a:bodyPr/>
-                    <a:lstStyle/>
-                    <a:p>
-                      <a:r>
-                        <a:rPr sz="1100">
-                          <a:solidFill>
-                            <a:srgbClr val="3D424E"/>
-                          </a:solidFill>
-                        </a:rPr>
-                        <a:t>Análise da resolução</a:t>
-                      </a:r>
-                    </a:p>
-                  </a:txBody>
-                  <a:tcPr/>
-                </a:tc>
-              </a:tr>
-              <a:tr h="594360">
-                <a:tc>
-                  <a:txBody>
-                    <a:bodyPr/>
-                    <a:lstStyle/>
-                    <a:p>
-                      <a:r>
-                        <a:rPr sz="1100">
-                          <a:solidFill>
-                            <a:srgbClr val="3D424E"/>
-                          </a:solidFill>
-                        </a:rPr>
-                        <a:t>Transferência para Overleaf</a:t>
-                      </a:r>
-                    </a:p>
-                  </a:txBody>
-                  <a:tcPr/>
-                </a:tc>
-                <a:tc>
-                  <a:txBody>
-                    <a:bodyPr/>
-                    <a:lstStyle/>
-                    <a:p>
-                      <a:r>
-                        <a:rPr sz="1100">
-                          <a:solidFill>
-                            <a:srgbClr val="3D424E"/>
-                          </a:solidFill>
-                        </a:rPr>
-                        <a:t>Marcello — manual, linha a linha</a:t>
-                      </a:r>
-                    </a:p>
-                  </a:txBody>
-                  <a:tcPr/>
-                </a:tc>
-                <a:tc>
-                  <a:txBody>
-                    <a:bodyPr/>
-                    <a:lstStyle/>
-                    <a:p>
-                      <a:r>
-                        <a:rPr sz="1100">
-                          <a:solidFill>
-                            <a:srgbClr val="3D424E"/>
-                          </a:solidFill>
-                        </a:rPr>
-                        <a:t>Nenhum</a:t>
-                      </a:r>
-                    </a:p>
-                  </a:txBody>
-                  <a:tcPr/>
-                </a:tc>
-              </a:tr>
-            </a:tbl>
-          </a:graphicData>
-        </a:graphic>
-      </p:graphicFrame>
-      <p:sp>
-        <p:nvSpPr>
-          <p:cNvPr id="5" name="TextBox 4"/>
-          <p:cNvSpPr txBox="1"/>
-          <p:nvPr/>
-        </p:nvSpPr>
-        <p:spPr>
-          <a:xfrm>
-            <a:off x="457200" y="6446520"/>
-            <a:ext cx="11430000" cy="365760"/>
-          </a:xfrm>
-          <a:prstGeom prst="rect">
-            <a:avLst/>
-          </a:prstGeom>
-          <a:noFill/>
-        </p:spPr>
-        <p:txBody>
-          <a:bodyPr wrap="none">
-            <a:spAutoFit/>
-          </a:bodyPr>
-          <a:lstStyle/>
-          <a:p>
-            <a:pPr>
-              <a:defRPr sz="1000" i="1">
-                <a:solidFill>
-                  <a:srgbClr val="707682"/>
-                </a:solidFill>
-              </a:defRPr>
-            </a:pPr>
-            <a:r>
-              <a:t>Se o orientador desejar, posso abrir os capítulos no repositório agora.</a:t>
-            </a:r>
-          </a:p>
-        </p:txBody>
-      </p:sp>
-    </p:spTree>
-  </p:cSld>
-  <p:clrMapOvr>
-    <a:masterClrMapping/>
-  </p:clrMapOvr>
-</p:sld>
-</file>
-
-<file path=ppt/slides/slide9.xml><?xml version="1.0" encoding="utf-8"?>
-<p:sld xmlns:a="http://schemas.openxmlformats.org/drawingml/2006/main" xmlns:p="http://schemas.openxmlformats.org/presentationml/2006/main" xmlns:r="http://schemas.openxmlformats.org/officeDocument/2006/relationships">
-  <p:cSld>
-    <p:spTree>
-      <p:nvGrpSpPr>
-        <p:cNvPr id="1" name=""/>
-        <p:cNvGrpSpPr/>
-        <p:nvPr/>
-      </p:nvGrpSpPr>
-      <p:grpSpPr/>
-      <p:sp>
-        <p:nvSpPr>
-          <p:cNvPr id="2" name="Rectangle 1"/>
-          <p:cNvSpPr/>
-          <p:nvPr/>
-        </p:nvSpPr>
-        <p:spPr>
-          <a:xfrm>
-            <a:off x="0" y="0"/>
-            <a:ext cx="12188952" cy="6858000"/>
-          </a:xfrm>
-          <a:prstGeom prst="rect">
-            <a:avLst/>
-          </a:prstGeom>
-          <a:solidFill>
-            <a:srgbClr val="1F2A4E"/>
-          </a:solidFill>
-          <a:ln>
-            <a:noFill/>
-          </a:ln>
-        </p:spPr>
-        <p:style>
-          <a:lnRef idx="1">
-            <a:schemeClr val="accent1"/>
-          </a:lnRef>
-          <a:fillRef idx="3">
-            <a:schemeClr val="accent1"/>
-          </a:fillRef>
-          <a:effectRef idx="2">
-            <a:schemeClr val="accent1"/>
-          </a:effectRef>
-          <a:fontRef idx="minor">
-            <a:schemeClr val="lt1"/>
-          </a:fontRef>
-        </p:style>
-        <p:txBody>
-          <a:bodyPr rtlCol="0" anchor="ctr"/>
-          <a:lstStyle/>
-          <a:p>
-            <a:pPr algn="ctr"/>
-          </a:p>
-        </p:txBody>
-      </p:sp>
-      <p:sp>
-        <p:nvSpPr>
-          <p:cNvPr id="3" name="TextBox 2"/>
-          <p:cNvSpPr txBox="1"/>
-          <p:nvPr/>
-        </p:nvSpPr>
-        <p:spPr>
-          <a:xfrm>
-            <a:off x="731520" y="1371600"/>
-            <a:ext cx="2743200" cy="2743200"/>
-          </a:xfrm>
-          <a:prstGeom prst="rect">
-            <a:avLst/>
-          </a:prstGeom>
-          <a:noFill/>
-        </p:spPr>
-        <p:txBody>
-          <a:bodyPr wrap="none">
-            <a:spAutoFit/>
-          </a:bodyPr>
-          <a:lstStyle/>
-          <a:p>
-            <a:pPr>
-              <a:defRPr sz="14000" b="1">
-                <a:solidFill>
-                  <a:srgbClr val="FFFFFF"/>
-                </a:solidFill>
-              </a:defRPr>
-            </a:pPr>
-            <a:r>
-              <a:t>3</a:t>
-            </a:r>
-          </a:p>
-        </p:txBody>
-      </p:sp>
-      <p:sp>
-        <p:nvSpPr>
-          <p:cNvPr id="4" name="TextBox 3"/>
-          <p:cNvSpPr txBox="1"/>
-          <p:nvPr/>
-        </p:nvSpPr>
-        <p:spPr>
-          <a:xfrm>
-            <a:off x="3931920" y="2286000"/>
-            <a:ext cx="7772400" cy="1828800"/>
-          </a:xfrm>
-          <a:prstGeom prst="rect">
-            <a:avLst/>
-          </a:prstGeom>
-          <a:noFill/>
-        </p:spPr>
-        <p:txBody>
-          <a:bodyPr wrap="square">
-            <a:spAutoFit/>
-          </a:bodyPr>
-          <a:lstStyle/>
-          <a:p>
-            <a:pPr>
-              <a:defRPr sz="3600" b="1">
-                <a:solidFill>
-                  <a:srgbClr val="FFFFFF"/>
-                </a:solidFill>
-              </a:defRPr>
-            </a:pPr>
-            <a:r>
-              <a:t>Pendência 2 — Adequação ética CEP</a:t>
-            </a:r>
-          </a:p>
-          <a:p>
-            <a:pPr>
-              <a:defRPr sz="1800">
-                <a:solidFill>
-                  <a:srgbClr val="E8EAED"/>
-                </a:solidFill>
-              </a:defRPr>
-            </a:pPr>
-            <a:r>
-              <a:t>Resolução 200/2021/CONSU Unifesp — enquadramento no Art. 8º</a:t>
+              <a:t>O que já está escrito e como vai virar Overleaf</a:t>
             </a:r>
           </a:p>
         </p:txBody>
